--- a/_downloads/134e415b8a40d408c1cfa6f36ebc74a2/RISCVstage3.pptx
+++ b/_downloads/134e415b8a40d408c1cfa6f36ebc74a2/RISCVstage3.pptx
@@ -112,6 +112,323 @@
 </p:presentation>
 </file>
 
+<file path=ppt/revisionInfo.xml><?xml version="1.0" encoding="utf-8"?>
+<p1510:revInfo xmlns:a="http://schemas.openxmlformats.org/drawingml/2006/main" xmlns:r="http://schemas.openxmlformats.org/officeDocument/2006/relationships" xmlns:p1510="http://schemas.microsoft.com/office/powerpoint/2015/10/main">
+  <p1510:revLst>
+    <p1510:client id="{E75867FF-49DB-4DC0-967A-A19776D02C5E}" v="4" dt="2026-03-10T16:48:05.976"/>
+  </p1510:revLst>
+</p1510:revInfo>
+</file>
+
+<file path=ppt/changesInfos/changesInfo1.xml><?xml version="1.0" encoding="utf-8"?>
+<pc:chgInfo xmlns:a="http://schemas.openxmlformats.org/drawingml/2006/main" xmlns:r="http://schemas.openxmlformats.org/officeDocument/2006/relationships" xmlns:ac="http://schemas.microsoft.com/office/drawing/2013/main/command" xmlns:pc="http://schemas.microsoft.com/office/powerpoint/2013/main/command">
+  <pc:docChgLst>
+    <pc:chgData name="York, George W CIV USAF USAFA DF/DFEC" userId="1fb5875a-4594-4db2-80fb-f0db3de11280" providerId="ADAL" clId="{09330963-85FD-4C99-A81B-94D0EE5CFFEB}"/>
+    <pc:docChg chg="custSel modSld">
+      <pc:chgData name="York, George W CIV USAF USAFA DF/DFEC" userId="1fb5875a-4594-4db2-80fb-f0db3de11280" providerId="ADAL" clId="{09330963-85FD-4C99-A81B-94D0EE5CFFEB}" dt="2026-03-10T16:48:05.976" v="8"/>
+      <pc:docMkLst>
+        <pc:docMk/>
+      </pc:docMkLst>
+      <pc:sldChg chg="addSp delSp modSp mod">
+        <pc:chgData name="York, George W CIV USAF USAFA DF/DFEC" userId="1fb5875a-4594-4db2-80fb-f0db3de11280" providerId="ADAL" clId="{09330963-85FD-4C99-A81B-94D0EE5CFFEB}" dt="2026-03-10T16:48:05.976" v="8"/>
+        <pc:sldMkLst>
+          <pc:docMk/>
+          <pc:sldMk cId="1501170907" sldId="256"/>
+        </pc:sldMkLst>
+        <pc:spChg chg="mod">
+          <ac:chgData name="York, George W CIV USAF USAFA DF/DFEC" userId="1fb5875a-4594-4db2-80fb-f0db3de11280" providerId="ADAL" clId="{09330963-85FD-4C99-A81B-94D0EE5CFFEB}" dt="2026-03-05T22:46:17.762" v="4" actId="20577"/>
+          <ac:spMkLst>
+            <pc:docMk/>
+            <pc:sldMk cId="1501170907" sldId="256"/>
+            <ac:spMk id="4" creationId="{FB55267A-D19E-887C-DE49-0FCC56FF700B}"/>
+          </ac:spMkLst>
+        </pc:spChg>
+        <pc:spChg chg="del">
+          <ac:chgData name="York, George W CIV USAF USAFA DF/DFEC" userId="1fb5875a-4594-4db2-80fb-f0db3de11280" providerId="ADAL" clId="{09330963-85FD-4C99-A81B-94D0EE5CFFEB}" dt="2026-03-10T16:47:43.899" v="5" actId="478"/>
+          <ac:spMkLst>
+            <pc:docMk/>
+            <pc:sldMk cId="1501170907" sldId="256"/>
+            <ac:spMk id="54" creationId="{7C5CCBD1-0844-480F-8141-9A9CAA44FF50}"/>
+          </ac:spMkLst>
+        </pc:spChg>
+        <pc:spChg chg="del">
+          <ac:chgData name="York, George W CIV USAF USAFA DF/DFEC" userId="1fb5875a-4594-4db2-80fb-f0db3de11280" providerId="ADAL" clId="{09330963-85FD-4C99-A81B-94D0EE5CFFEB}" dt="2026-03-10T16:47:43.899" v="5" actId="478"/>
+          <ac:spMkLst>
+            <pc:docMk/>
+            <pc:sldMk cId="1501170907" sldId="256"/>
+            <ac:spMk id="57" creationId="{BE8947B1-691B-936E-60AD-9FDFE4A4EA75}"/>
+          </ac:spMkLst>
+        </pc:spChg>
+        <pc:spChg chg="del">
+          <ac:chgData name="York, George W CIV USAF USAFA DF/DFEC" userId="1fb5875a-4594-4db2-80fb-f0db3de11280" providerId="ADAL" clId="{09330963-85FD-4C99-A81B-94D0EE5CFFEB}" dt="2026-03-10T16:47:43.899" v="5" actId="478"/>
+          <ac:spMkLst>
+            <pc:docMk/>
+            <pc:sldMk cId="1501170907" sldId="256"/>
+            <ac:spMk id="59" creationId="{62908768-78CB-6AA2-9F8F-560147BBA50C}"/>
+          </ac:spMkLst>
+        </pc:spChg>
+        <pc:spChg chg="del">
+          <ac:chgData name="York, George W CIV USAF USAFA DF/DFEC" userId="1fb5875a-4594-4db2-80fb-f0db3de11280" providerId="ADAL" clId="{09330963-85FD-4C99-A81B-94D0EE5CFFEB}" dt="2026-03-10T16:47:43.899" v="5" actId="478"/>
+          <ac:spMkLst>
+            <pc:docMk/>
+            <pc:sldMk cId="1501170907" sldId="256"/>
+            <ac:spMk id="80" creationId="{55A3E227-0BF3-A73B-3BC7-43B3ED0C951A}"/>
+          </ac:spMkLst>
+        </pc:spChg>
+        <pc:spChg chg="del">
+          <ac:chgData name="York, George W CIV USAF USAFA DF/DFEC" userId="1fb5875a-4594-4db2-80fb-f0db3de11280" providerId="ADAL" clId="{09330963-85FD-4C99-A81B-94D0EE5CFFEB}" dt="2026-03-10T16:47:43.899" v="5" actId="478"/>
+          <ac:spMkLst>
+            <pc:docMk/>
+            <pc:sldMk cId="1501170907" sldId="256"/>
+            <ac:spMk id="84" creationId="{D1142331-E346-04E4-CE7D-40DA0254B7E8}"/>
+          </ac:spMkLst>
+        </pc:spChg>
+        <pc:spChg chg="add del mod">
+          <ac:chgData name="York, George W CIV USAF USAFA DF/DFEC" userId="1fb5875a-4594-4db2-80fb-f0db3de11280" providerId="ADAL" clId="{09330963-85FD-4C99-A81B-94D0EE5CFFEB}" dt="2026-03-10T16:47:43.899" v="5" actId="478"/>
+          <ac:spMkLst>
+            <pc:docMk/>
+            <pc:sldMk cId="1501170907" sldId="256"/>
+            <ac:spMk id="105" creationId="{8150CAF1-DAFF-41B1-37D9-3AA58EDF71DA}"/>
+          </ac:spMkLst>
+        </pc:spChg>
+        <pc:spChg chg="add mod">
+          <ac:chgData name="York, George W CIV USAF USAFA DF/DFEC" userId="1fb5875a-4594-4db2-80fb-f0db3de11280" providerId="ADAL" clId="{09330963-85FD-4C99-A81B-94D0EE5CFFEB}" dt="2026-03-05T22:29:55.846" v="0"/>
+          <ac:spMkLst>
+            <pc:docMk/>
+            <pc:sldMk cId="1501170907" sldId="256"/>
+            <ac:spMk id="106" creationId="{802EBAD3-1207-E175-F4E6-F1CAAFD5CB84}"/>
+          </ac:spMkLst>
+        </pc:spChg>
+        <pc:spChg chg="add mod">
+          <ac:chgData name="York, George W CIV USAF USAFA DF/DFEC" userId="1fb5875a-4594-4db2-80fb-f0db3de11280" providerId="ADAL" clId="{09330963-85FD-4C99-A81B-94D0EE5CFFEB}" dt="2026-03-05T22:29:55.846" v="0"/>
+          <ac:spMkLst>
+            <pc:docMk/>
+            <pc:sldMk cId="1501170907" sldId="256"/>
+            <ac:spMk id="107" creationId="{B1546BBC-B812-DED8-4B26-9FABE47BC3AA}"/>
+          </ac:spMkLst>
+        </pc:spChg>
+        <pc:spChg chg="add mod">
+          <ac:chgData name="York, George W CIV USAF USAFA DF/DFEC" userId="1fb5875a-4594-4db2-80fb-f0db3de11280" providerId="ADAL" clId="{09330963-85FD-4C99-A81B-94D0EE5CFFEB}" dt="2026-03-05T22:29:55.846" v="0"/>
+          <ac:spMkLst>
+            <pc:docMk/>
+            <pc:sldMk cId="1501170907" sldId="256"/>
+            <ac:spMk id="109" creationId="{A81CABDD-6671-8136-C507-5421CBF47C22}"/>
+          </ac:spMkLst>
+        </pc:spChg>
+        <pc:spChg chg="add mod">
+          <ac:chgData name="York, George W CIV USAF USAFA DF/DFEC" userId="1fb5875a-4594-4db2-80fb-f0db3de11280" providerId="ADAL" clId="{09330963-85FD-4C99-A81B-94D0EE5CFFEB}" dt="2026-03-05T22:29:55.846" v="0"/>
+          <ac:spMkLst>
+            <pc:docMk/>
+            <pc:sldMk cId="1501170907" sldId="256"/>
+            <ac:spMk id="110" creationId="{F182B11B-81F0-C7FD-76B3-7C27A04FAE43}"/>
+          </ac:spMkLst>
+        </pc:spChg>
+        <pc:spChg chg="add mod">
+          <ac:chgData name="York, George W CIV USAF USAFA DF/DFEC" userId="1fb5875a-4594-4db2-80fb-f0db3de11280" providerId="ADAL" clId="{09330963-85FD-4C99-A81B-94D0EE5CFFEB}" dt="2026-03-10T16:47:45.074" v="6"/>
+          <ac:spMkLst>
+            <pc:docMk/>
+            <pc:sldMk cId="1501170907" sldId="256"/>
+            <ac:spMk id="140" creationId="{42D03EFD-C681-4EA9-84D6-2D58957476C9}"/>
+          </ac:spMkLst>
+        </pc:spChg>
+        <pc:spChg chg="add mod">
+          <ac:chgData name="York, George W CIV USAF USAFA DF/DFEC" userId="1fb5875a-4594-4db2-80fb-f0db3de11280" providerId="ADAL" clId="{09330963-85FD-4C99-A81B-94D0EE5CFFEB}" dt="2026-03-10T16:47:45.074" v="6"/>
+          <ac:spMkLst>
+            <pc:docMk/>
+            <pc:sldMk cId="1501170907" sldId="256"/>
+            <ac:spMk id="141" creationId="{130DB228-30F1-3EAB-8348-ADF6B84F5227}"/>
+          </ac:spMkLst>
+        </pc:spChg>
+        <pc:spChg chg="add mod">
+          <ac:chgData name="York, George W CIV USAF USAFA DF/DFEC" userId="1fb5875a-4594-4db2-80fb-f0db3de11280" providerId="ADAL" clId="{09330963-85FD-4C99-A81B-94D0EE5CFFEB}" dt="2026-03-10T16:47:45.074" v="6"/>
+          <ac:spMkLst>
+            <pc:docMk/>
+            <pc:sldMk cId="1501170907" sldId="256"/>
+            <ac:spMk id="143" creationId="{28B52DA0-5124-B1DD-6399-E77E9F27E337}"/>
+          </ac:spMkLst>
+        </pc:spChg>
+        <pc:spChg chg="add mod">
+          <ac:chgData name="York, George W CIV USAF USAFA DF/DFEC" userId="1fb5875a-4594-4db2-80fb-f0db3de11280" providerId="ADAL" clId="{09330963-85FD-4C99-A81B-94D0EE5CFFEB}" dt="2026-03-10T16:47:45.074" v="6"/>
+          <ac:spMkLst>
+            <pc:docMk/>
+            <pc:sldMk cId="1501170907" sldId="256"/>
+            <ac:spMk id="154" creationId="{A1848007-5C57-2514-E0D9-E9FAA0E1581E}"/>
+          </ac:spMkLst>
+        </pc:spChg>
+        <pc:spChg chg="add mod">
+          <ac:chgData name="York, George W CIV USAF USAFA DF/DFEC" userId="1fb5875a-4594-4db2-80fb-f0db3de11280" providerId="ADAL" clId="{09330963-85FD-4C99-A81B-94D0EE5CFFEB}" dt="2026-03-10T16:47:45.074" v="6"/>
+          <ac:spMkLst>
+            <pc:docMk/>
+            <pc:sldMk cId="1501170907" sldId="256"/>
+            <ac:spMk id="156" creationId="{8EE68CD5-3828-66D3-CF69-264F08A0AC09}"/>
+          </ac:spMkLst>
+        </pc:spChg>
+        <pc:spChg chg="add mod">
+          <ac:chgData name="York, George W CIV USAF USAFA DF/DFEC" userId="1fb5875a-4594-4db2-80fb-f0db3de11280" providerId="ADAL" clId="{09330963-85FD-4C99-A81B-94D0EE5CFFEB}" dt="2026-03-10T16:47:45.074" v="6"/>
+          <ac:spMkLst>
+            <pc:docMk/>
+            <pc:sldMk cId="1501170907" sldId="256"/>
+            <ac:spMk id="174" creationId="{7519AAD8-ECD9-BCFB-E19F-03D8220E44C3}"/>
+          </ac:spMkLst>
+        </pc:spChg>
+        <pc:spChg chg="add mod">
+          <ac:chgData name="York, George W CIV USAF USAFA DF/DFEC" userId="1fb5875a-4594-4db2-80fb-f0db3de11280" providerId="ADAL" clId="{09330963-85FD-4C99-A81B-94D0EE5CFFEB}" dt="2026-03-10T16:47:45.074" v="6"/>
+          <ac:spMkLst>
+            <pc:docMk/>
+            <pc:sldMk cId="1501170907" sldId="256"/>
+            <ac:spMk id="186" creationId="{4DF51EAB-8861-0396-BAA6-9479806818EB}"/>
+          </ac:spMkLst>
+        </pc:spChg>
+        <pc:spChg chg="add mod">
+          <ac:chgData name="York, George W CIV USAF USAFA DF/DFEC" userId="1fb5875a-4594-4db2-80fb-f0db3de11280" providerId="ADAL" clId="{09330963-85FD-4C99-A81B-94D0EE5CFFEB}" dt="2026-03-10T16:47:45.074" v="6"/>
+          <ac:spMkLst>
+            <pc:docMk/>
+            <pc:sldMk cId="1501170907" sldId="256"/>
+            <ac:spMk id="187" creationId="{02F76C24-B5A2-EF6E-0213-72D63A9FAEFB}"/>
+          </ac:spMkLst>
+        </pc:spChg>
+        <pc:spChg chg="del">
+          <ac:chgData name="York, George W CIV USAF USAFA DF/DFEC" userId="1fb5875a-4594-4db2-80fb-f0db3de11280" providerId="ADAL" clId="{09330963-85FD-4C99-A81B-94D0EE5CFFEB}" dt="2026-03-10T16:47:43.899" v="5" actId="478"/>
+          <ac:spMkLst>
+            <pc:docMk/>
+            <pc:sldMk cId="1501170907" sldId="256"/>
+            <ac:spMk id="264" creationId="{18102C07-F7E1-1AF1-477B-00B68F177F07}"/>
+          </ac:spMkLst>
+        </pc:spChg>
+        <pc:spChg chg="del">
+          <ac:chgData name="York, George W CIV USAF USAFA DF/DFEC" userId="1fb5875a-4594-4db2-80fb-f0db3de11280" providerId="ADAL" clId="{09330963-85FD-4C99-A81B-94D0EE5CFFEB}" dt="2026-03-10T16:47:43.899" v="5" actId="478"/>
+          <ac:spMkLst>
+            <pc:docMk/>
+            <pc:sldMk cId="1501170907" sldId="256"/>
+            <ac:spMk id="265" creationId="{00A05C49-A5A2-CC74-BAEB-00CF47323BC9}"/>
+          </ac:spMkLst>
+        </pc:spChg>
+        <pc:spChg chg="del">
+          <ac:chgData name="York, George W CIV USAF USAFA DF/DFEC" userId="1fb5875a-4594-4db2-80fb-f0db3de11280" providerId="ADAL" clId="{09330963-85FD-4C99-A81B-94D0EE5CFFEB}" dt="2026-03-10T16:47:43.899" v="5" actId="478"/>
+          <ac:spMkLst>
+            <pc:docMk/>
+            <pc:sldMk cId="1501170907" sldId="256"/>
+            <ac:spMk id="266" creationId="{B178740B-BE6B-31B0-B4FD-0ED1D3EABF36}"/>
+          </ac:spMkLst>
+        </pc:spChg>
+        <pc:grpChg chg="del">
+          <ac:chgData name="York, George W CIV USAF USAFA DF/DFEC" userId="1fb5875a-4594-4db2-80fb-f0db3de11280" providerId="ADAL" clId="{09330963-85FD-4C99-A81B-94D0EE5CFFEB}" dt="2026-03-10T16:47:43.899" v="5" actId="478"/>
+          <ac:grpSpMkLst>
+            <pc:docMk/>
+            <pc:sldMk cId="1501170907" sldId="256"/>
+            <ac:grpSpMk id="61" creationId="{16FC76F5-1B0B-DFD2-2DFE-467D7246D31F}"/>
+          </ac:grpSpMkLst>
+        </pc:grpChg>
+        <pc:grpChg chg="add mod">
+          <ac:chgData name="York, George W CIV USAF USAFA DF/DFEC" userId="1fb5875a-4594-4db2-80fb-f0db3de11280" providerId="ADAL" clId="{09330963-85FD-4C99-A81B-94D0EE5CFFEB}" dt="2026-03-10T16:47:45.074" v="6"/>
+          <ac:grpSpMkLst>
+            <pc:docMk/>
+            <pc:sldMk cId="1501170907" sldId="256"/>
+            <ac:grpSpMk id="131" creationId="{7985B0F1-5D5A-96E1-0D14-965720B89EB9}"/>
+          </ac:grpSpMkLst>
+        </pc:grpChg>
+        <pc:grpChg chg="add mod">
+          <ac:chgData name="York, George W CIV USAF USAFA DF/DFEC" userId="1fb5875a-4594-4db2-80fb-f0db3de11280" providerId="ADAL" clId="{09330963-85FD-4C99-A81B-94D0EE5CFFEB}" dt="2026-03-10T16:47:45.074" v="6"/>
+          <ac:grpSpMkLst>
+            <pc:docMk/>
+            <pc:sldMk cId="1501170907" sldId="256"/>
+            <ac:grpSpMk id="144" creationId="{668D9262-FD4F-8437-B65A-FF28CF8998C5}"/>
+          </ac:grpSpMkLst>
+        </pc:grpChg>
+        <pc:cxnChg chg="del">
+          <ac:chgData name="York, George W CIV USAF USAFA DF/DFEC" userId="1fb5875a-4594-4db2-80fb-f0db3de11280" providerId="ADAL" clId="{09330963-85FD-4C99-A81B-94D0EE5CFFEB}" dt="2026-03-10T16:47:53.742" v="7" actId="478"/>
+          <ac:cxnSpMkLst>
+            <pc:docMk/>
+            <pc:sldMk cId="1501170907" sldId="256"/>
+            <ac:cxnSpMk id="17" creationId="{D24E488E-A173-AFA0-3F6A-78FF8CC6952B}"/>
+          </ac:cxnSpMkLst>
+        </pc:cxnChg>
+        <pc:cxnChg chg="del">
+          <ac:chgData name="York, George W CIV USAF USAFA DF/DFEC" userId="1fb5875a-4594-4db2-80fb-f0db3de11280" providerId="ADAL" clId="{09330963-85FD-4C99-A81B-94D0EE5CFFEB}" dt="2026-03-10T16:47:53.742" v="7" actId="478"/>
+          <ac:cxnSpMkLst>
+            <pc:docMk/>
+            <pc:sldMk cId="1501170907" sldId="256"/>
+            <ac:cxnSpMk id="26" creationId="{EFC7A41C-61ED-49E4-BA0B-27EC82F62902}"/>
+          </ac:cxnSpMkLst>
+        </pc:cxnChg>
+        <pc:cxnChg chg="del">
+          <ac:chgData name="York, George W CIV USAF USAFA DF/DFEC" userId="1fb5875a-4594-4db2-80fb-f0db3de11280" providerId="ADAL" clId="{09330963-85FD-4C99-A81B-94D0EE5CFFEB}" dt="2026-03-10T16:47:53.742" v="7" actId="478"/>
+          <ac:cxnSpMkLst>
+            <pc:docMk/>
+            <pc:sldMk cId="1501170907" sldId="256"/>
+            <ac:cxnSpMk id="28" creationId="{EE79F449-2B1D-87A9-9E7B-9DD8C11C7B9B}"/>
+          </ac:cxnSpMkLst>
+        </pc:cxnChg>
+        <pc:cxnChg chg="add mod">
+          <ac:chgData name="York, George W CIV USAF USAFA DF/DFEC" userId="1fb5875a-4594-4db2-80fb-f0db3de11280" providerId="ADAL" clId="{09330963-85FD-4C99-A81B-94D0EE5CFFEB}" dt="2026-03-05T22:29:55.846" v="0"/>
+          <ac:cxnSpMkLst>
+            <pc:docMk/>
+            <pc:sldMk cId="1501170907" sldId="256"/>
+            <ac:cxnSpMk id="108" creationId="{55D04E53-F0F2-CC32-832F-AD990A0BD8D2}"/>
+          </ac:cxnSpMkLst>
+        </pc:cxnChg>
+        <pc:cxnChg chg="add mod">
+          <ac:chgData name="York, George W CIV USAF USAFA DF/DFEC" userId="1fb5875a-4594-4db2-80fb-f0db3de11280" providerId="ADAL" clId="{09330963-85FD-4C99-A81B-94D0EE5CFFEB}" dt="2026-03-05T22:29:55.846" v="0"/>
+          <ac:cxnSpMkLst>
+            <pc:docMk/>
+            <pc:sldMk cId="1501170907" sldId="256"/>
+            <ac:cxnSpMk id="120" creationId="{1883FA79-CBE1-81F9-475F-742DC442633A}"/>
+          </ac:cxnSpMkLst>
+        </pc:cxnChg>
+        <pc:cxnChg chg="add mod">
+          <ac:chgData name="York, George W CIV USAF USAFA DF/DFEC" userId="1fb5875a-4594-4db2-80fb-f0db3de11280" providerId="ADAL" clId="{09330963-85FD-4C99-A81B-94D0EE5CFFEB}" dt="2026-03-05T22:29:55.846" v="0"/>
+          <ac:cxnSpMkLst>
+            <pc:docMk/>
+            <pc:sldMk cId="1501170907" sldId="256"/>
+            <ac:cxnSpMk id="121" creationId="{D53ADBF7-10DC-5789-46E9-813992762F1C}"/>
+          </ac:cxnSpMkLst>
+        </pc:cxnChg>
+        <pc:cxnChg chg="add mod">
+          <ac:chgData name="York, George W CIV USAF USAFA DF/DFEC" userId="1fb5875a-4594-4db2-80fb-f0db3de11280" providerId="ADAL" clId="{09330963-85FD-4C99-A81B-94D0EE5CFFEB}" dt="2026-03-05T22:29:55.846" v="0"/>
+          <ac:cxnSpMkLst>
+            <pc:docMk/>
+            <pc:sldMk cId="1501170907" sldId="256"/>
+            <ac:cxnSpMk id="123" creationId="{61CB085F-EFA5-81F0-171A-B0F01423DFC7}"/>
+          </ac:cxnSpMkLst>
+        </pc:cxnChg>
+        <pc:cxnChg chg="add mod">
+          <ac:chgData name="York, George W CIV USAF USAFA DF/DFEC" userId="1fb5875a-4594-4db2-80fb-f0db3de11280" providerId="ADAL" clId="{09330963-85FD-4C99-A81B-94D0EE5CFFEB}" dt="2026-03-05T22:29:55.846" v="0"/>
+          <ac:cxnSpMkLst>
+            <pc:docMk/>
+            <pc:sldMk cId="1501170907" sldId="256"/>
+            <ac:cxnSpMk id="125" creationId="{EC42D385-1455-5F7D-5DE9-63C32D5B7E54}"/>
+          </ac:cxnSpMkLst>
+        </pc:cxnChg>
+        <pc:cxnChg chg="add mod">
+          <ac:chgData name="York, George W CIV USAF USAFA DF/DFEC" userId="1fb5875a-4594-4db2-80fb-f0db3de11280" providerId="ADAL" clId="{09330963-85FD-4C99-A81B-94D0EE5CFFEB}" dt="2026-03-05T22:29:55.846" v="0"/>
+          <ac:cxnSpMkLst>
+            <pc:docMk/>
+            <pc:sldMk cId="1501170907" sldId="256"/>
+            <ac:cxnSpMk id="128" creationId="{2FF7584B-44F4-AC4F-1A2B-A5EEAC3183AF}"/>
+          </ac:cxnSpMkLst>
+        </pc:cxnChg>
+        <pc:cxnChg chg="add mod">
+          <ac:chgData name="York, George W CIV USAF USAFA DF/DFEC" userId="1fb5875a-4594-4db2-80fb-f0db3de11280" providerId="ADAL" clId="{09330963-85FD-4C99-A81B-94D0EE5CFFEB}" dt="2026-03-10T16:48:05.976" v="8"/>
+          <ac:cxnSpMkLst>
+            <pc:docMk/>
+            <pc:sldMk cId="1501170907" sldId="256"/>
+            <ac:cxnSpMk id="189" creationId="{4F79E217-E351-6707-29A8-684823FCD841}"/>
+          </ac:cxnSpMkLst>
+        </pc:cxnChg>
+        <pc:cxnChg chg="add mod">
+          <ac:chgData name="York, George W CIV USAF USAFA DF/DFEC" userId="1fb5875a-4594-4db2-80fb-f0db3de11280" providerId="ADAL" clId="{09330963-85FD-4C99-A81B-94D0EE5CFFEB}" dt="2026-03-10T16:48:05.976" v="8"/>
+          <ac:cxnSpMkLst>
+            <pc:docMk/>
+            <pc:sldMk cId="1501170907" sldId="256"/>
+            <ac:cxnSpMk id="190" creationId="{88E60B1A-8F9F-F801-EE6D-5051B5DDD7FD}"/>
+          </ac:cxnSpMkLst>
+        </pc:cxnChg>
+      </pc:sldChg>
+    </pc:docChg>
+  </pc:docChgLst>
+</pc:chgInfo>
+</file>
+
 <file path=ppt/slideLayouts/slideLayout1.xml><?xml version="1.0" encoding="utf-8"?>
 <p:sldLayout xmlns:a="http://schemas.openxmlformats.org/drawingml/2006/main" xmlns:r="http://schemas.openxmlformats.org/officeDocument/2006/relationships" xmlns:p="http://schemas.openxmlformats.org/presentationml/2006/main" type="title" preserve="1">
   <p:cSld name="Title Slide">
@@ -259,7 +576,7 @@
           <a:p>
             <a:fld id="{51AFF834-1BEC-4F95-9622-28B5DCC1FE16}" type="datetimeFigureOut">
               <a:rPr lang="en-US" smtClean="0"/>
-              <a:t>7/1/2025</a:t>
+              <a:t>3/10/2026</a:t>
             </a:fld>
             <a:endParaRPr lang="en-US"/>
           </a:p>
@@ -457,7 +774,7 @@
           <a:p>
             <a:fld id="{51AFF834-1BEC-4F95-9622-28B5DCC1FE16}" type="datetimeFigureOut">
               <a:rPr lang="en-US" smtClean="0"/>
-              <a:t>7/1/2025</a:t>
+              <a:t>3/10/2026</a:t>
             </a:fld>
             <a:endParaRPr lang="en-US"/>
           </a:p>
@@ -665,7 +982,7 @@
           <a:p>
             <a:fld id="{51AFF834-1BEC-4F95-9622-28B5DCC1FE16}" type="datetimeFigureOut">
               <a:rPr lang="en-US" smtClean="0"/>
-              <a:t>7/1/2025</a:t>
+              <a:t>3/10/2026</a:t>
             </a:fld>
             <a:endParaRPr lang="en-US"/>
           </a:p>
@@ -863,7 +1180,7 @@
           <a:p>
             <a:fld id="{51AFF834-1BEC-4F95-9622-28B5DCC1FE16}" type="datetimeFigureOut">
               <a:rPr lang="en-US" smtClean="0"/>
-              <a:t>7/1/2025</a:t>
+              <a:t>3/10/2026</a:t>
             </a:fld>
             <a:endParaRPr lang="en-US"/>
           </a:p>
@@ -1138,7 +1455,7 @@
           <a:p>
             <a:fld id="{51AFF834-1BEC-4F95-9622-28B5DCC1FE16}" type="datetimeFigureOut">
               <a:rPr lang="en-US" smtClean="0"/>
-              <a:t>7/1/2025</a:t>
+              <a:t>3/10/2026</a:t>
             </a:fld>
             <a:endParaRPr lang="en-US"/>
           </a:p>
@@ -1403,7 +1720,7 @@
           <a:p>
             <a:fld id="{51AFF834-1BEC-4F95-9622-28B5DCC1FE16}" type="datetimeFigureOut">
               <a:rPr lang="en-US" smtClean="0"/>
-              <a:t>7/1/2025</a:t>
+              <a:t>3/10/2026</a:t>
             </a:fld>
             <a:endParaRPr lang="en-US"/>
           </a:p>
@@ -1815,7 +2132,7 @@
           <a:p>
             <a:fld id="{51AFF834-1BEC-4F95-9622-28B5DCC1FE16}" type="datetimeFigureOut">
               <a:rPr lang="en-US" smtClean="0"/>
-              <a:t>7/1/2025</a:t>
+              <a:t>3/10/2026</a:t>
             </a:fld>
             <a:endParaRPr lang="en-US"/>
           </a:p>
@@ -1956,7 +2273,7 @@
           <a:p>
             <a:fld id="{51AFF834-1BEC-4F95-9622-28B5DCC1FE16}" type="datetimeFigureOut">
               <a:rPr lang="en-US" smtClean="0"/>
-              <a:t>7/1/2025</a:t>
+              <a:t>3/10/2026</a:t>
             </a:fld>
             <a:endParaRPr lang="en-US"/>
           </a:p>
@@ -2069,7 +2386,7 @@
           <a:p>
             <a:fld id="{51AFF834-1BEC-4F95-9622-28B5DCC1FE16}" type="datetimeFigureOut">
               <a:rPr lang="en-US" smtClean="0"/>
-              <a:t>7/1/2025</a:t>
+              <a:t>3/10/2026</a:t>
             </a:fld>
             <a:endParaRPr lang="en-US"/>
           </a:p>
@@ -2380,7 +2697,7 @@
           <a:p>
             <a:fld id="{51AFF834-1BEC-4F95-9622-28B5DCC1FE16}" type="datetimeFigureOut">
               <a:rPr lang="en-US" smtClean="0"/>
-              <a:t>7/1/2025</a:t>
+              <a:t>3/10/2026</a:t>
             </a:fld>
             <a:endParaRPr lang="en-US"/>
           </a:p>
@@ -2668,7 +2985,7 @@
           <a:p>
             <a:fld id="{51AFF834-1BEC-4F95-9622-28B5DCC1FE16}" type="datetimeFigureOut">
               <a:rPr lang="en-US" smtClean="0"/>
-              <a:t>7/1/2025</a:t>
+              <a:t>3/10/2026</a:t>
             </a:fld>
             <a:endParaRPr lang="en-US"/>
           </a:p>
@@ -2909,7 +3226,7 @@
           <a:p>
             <a:fld id="{51AFF834-1BEC-4F95-9622-28B5DCC1FE16}" type="datetimeFigureOut">
               <a:rPr lang="en-US" smtClean="0"/>
-              <a:t>7/1/2025</a:t>
+              <a:t>3/10/2026</a:t>
             </a:fld>
             <a:endParaRPr lang="en-US"/>
           </a:p>
@@ -3326,6 +3643,36 @@
           <a:chExt cx="0" cy="0"/>
         </a:xfrm>
       </p:grpSpPr>
+      <p:pic>
+        <p:nvPicPr>
+          <p:cNvPr id="36" name="Picture 35">
+            <a:extLst>
+              <a:ext uri="{FF2B5EF4-FFF2-40B4-BE49-F238E27FC236}">
+                <a16:creationId xmlns:a16="http://schemas.microsoft.com/office/drawing/2014/main" id="{7D1B8B85-7F90-6201-21E9-F6ABDFFBBFF8}"/>
+              </a:ext>
+            </a:extLst>
+          </p:cNvPr>
+          <p:cNvPicPr>
+            <a:picLocks noChangeAspect="1"/>
+          </p:cNvPicPr>
+          <p:nvPr/>
+        </p:nvPicPr>
+        <p:blipFill>
+          <a:blip r:embed="rId2"/>
+          <a:stretch>
+            <a:fillRect/>
+          </a:stretch>
+        </p:blipFill>
+        <p:spPr>
+          <a:xfrm>
+            <a:off x="2899612" y="3237305"/>
+            <a:ext cx="503999" cy="267608"/>
+          </a:xfrm>
+          <a:prstGeom prst="rect">
+            <a:avLst/>
+          </a:prstGeom>
+        </p:spPr>
+      </p:pic>
       <p:sp>
         <p:nvSpPr>
           <p:cNvPr id="4" name="TextBox 3">
@@ -3364,7 +3711,7 @@
             <a:pPr algn="ctr"/>
             <a:r>
               <a:rPr lang="en-US" sz="1200" b="1" dirty="0"/>
-              <a:t>Stall Detection</a:t>
+              <a:t>NOPs to prevent hazards</a:t>
             </a:r>
           </a:p>
         </p:txBody>
@@ -5788,48 +6135,6 @@
           </a:fontRef>
         </p:style>
       </p:cxnSp>
-      <p:cxnSp>
-        <p:nvCxnSpPr>
-          <p:cNvPr id="105" name="Straight Arrow Connector 104">
-            <a:extLst>
-              <a:ext uri="{FF2B5EF4-FFF2-40B4-BE49-F238E27FC236}">
-                <a16:creationId xmlns:a16="http://schemas.microsoft.com/office/drawing/2014/main" id="{96194351-1F6F-6ECD-551A-2B077972FE1F}"/>
-              </a:ext>
-            </a:extLst>
-          </p:cNvPr>
-          <p:cNvCxnSpPr/>
-          <p:nvPr/>
-        </p:nvCxnSpPr>
-        <p:spPr>
-          <a:xfrm>
-            <a:off x="3216369" y="3387564"/>
-            <a:ext cx="177808" cy="0"/>
-          </a:xfrm>
-          <a:prstGeom prst="straightConnector1">
-            <a:avLst/>
-          </a:prstGeom>
-          <a:ln>
-            <a:solidFill>
-              <a:srgbClr val="FF0000"/>
-            </a:solidFill>
-            <a:tailEnd type="triangle"/>
-          </a:ln>
-        </p:spPr>
-        <p:style>
-          <a:lnRef idx="2">
-            <a:schemeClr val="accent1"/>
-          </a:lnRef>
-          <a:fillRef idx="0">
-            <a:schemeClr val="accent1"/>
-          </a:fillRef>
-          <a:effectRef idx="1">
-            <a:schemeClr val="accent1"/>
-          </a:effectRef>
-          <a:fontRef idx="minor">
-            <a:schemeClr val="tx1"/>
-          </a:fontRef>
-        </p:style>
-      </p:cxnSp>
       <p:sp>
         <p:nvSpPr>
           <p:cNvPr id="111" name="Rectangle 110">
@@ -6367,213 +6672,12 @@
           </a:fontRef>
         </p:style>
       </p:cxnSp>
-      <p:sp>
-        <p:nvSpPr>
-          <p:cNvPr id="145" name="Rectangle 144">
-            <a:extLst>
-              <a:ext uri="{FF2B5EF4-FFF2-40B4-BE49-F238E27FC236}">
-                <a16:creationId xmlns:a16="http://schemas.microsoft.com/office/drawing/2014/main" id="{D48BF948-61BF-AC37-8597-388094170D18}"/>
-              </a:ext>
-            </a:extLst>
-          </p:cNvPr>
-          <p:cNvSpPr/>
-          <p:nvPr/>
-        </p:nvSpPr>
-        <p:spPr>
-          <a:xfrm>
-            <a:off x="8073953" y="3976514"/>
-            <a:ext cx="865785" cy="1056594"/>
-          </a:xfrm>
-          <a:prstGeom prst="rect">
-            <a:avLst/>
-          </a:prstGeom>
-          <a:solidFill>
-            <a:schemeClr val="bg1"/>
-          </a:solidFill>
-        </p:spPr>
-        <p:style>
-          <a:lnRef idx="2">
-            <a:schemeClr val="accent1">
-              <a:shade val="15000"/>
-            </a:schemeClr>
-          </a:lnRef>
-          <a:fillRef idx="1">
-            <a:schemeClr val="accent1"/>
-          </a:fillRef>
-          <a:effectRef idx="0">
-            <a:schemeClr val="accent1"/>
-          </a:effectRef>
-          <a:fontRef idx="minor">
-            <a:schemeClr val="lt1"/>
-          </a:fontRef>
-        </p:style>
-        <p:txBody>
-          <a:bodyPr rtlCol="0" anchor="ctr"/>
-          <a:lstStyle/>
-          <a:p>
-            <a:pPr algn="ctr"/>
-            <a:r>
-              <a:rPr lang="en-US" dirty="0"/>
-              <a:t>PC</a:t>
-            </a:r>
-          </a:p>
-        </p:txBody>
-      </p:sp>
-      <p:sp>
-        <p:nvSpPr>
-          <p:cNvPr id="146" name="TextBox 145">
-            <a:extLst>
-              <a:ext uri="{FF2B5EF4-FFF2-40B4-BE49-F238E27FC236}">
-                <a16:creationId xmlns:a16="http://schemas.microsoft.com/office/drawing/2014/main" id="{69719632-7E59-F7B2-AEF4-E4C30AA0AEF2}"/>
-              </a:ext>
-            </a:extLst>
-          </p:cNvPr>
-          <p:cNvSpPr txBox="1"/>
-          <p:nvPr/>
-        </p:nvSpPr>
-        <p:spPr>
-          <a:xfrm>
-            <a:off x="8252423" y="3945511"/>
-            <a:ext cx="527709" cy="400110"/>
-          </a:xfrm>
-          <a:prstGeom prst="rect">
-            <a:avLst/>
-          </a:prstGeom>
-          <a:noFill/>
-        </p:spPr>
-        <p:txBody>
-          <a:bodyPr wrap="none" rtlCol="0">
-            <a:spAutoFit/>
-          </a:bodyPr>
-          <a:lstStyle/>
-          <a:p>
-            <a:pPr algn="ctr"/>
-            <a:r>
-              <a:rPr lang="en-US" sz="1000" dirty="0"/>
-              <a:t>Offset</a:t>
-            </a:r>
-          </a:p>
-          <a:p>
-            <a:pPr algn="ctr"/>
-            <a:endParaRPr lang="en-US" sz="1000" dirty="0"/>
-          </a:p>
-        </p:txBody>
-      </p:sp>
-      <p:sp>
-        <p:nvSpPr>
-          <p:cNvPr id="148" name="TextBox 147">
-            <a:extLst>
-              <a:ext uri="{FF2B5EF4-FFF2-40B4-BE49-F238E27FC236}">
-                <a16:creationId xmlns:a16="http://schemas.microsoft.com/office/drawing/2014/main" id="{6432B689-7D1C-F807-6B45-D8272427DA3A}"/>
-              </a:ext>
-            </a:extLst>
-          </p:cNvPr>
-          <p:cNvSpPr txBox="1"/>
-          <p:nvPr/>
-        </p:nvSpPr>
-        <p:spPr>
-          <a:xfrm>
-            <a:off x="8023507" y="4194029"/>
-            <a:ext cx="413896" cy="230832"/>
-          </a:xfrm>
-          <a:prstGeom prst="rect">
-            <a:avLst/>
-          </a:prstGeom>
-          <a:noFill/>
-        </p:spPr>
-        <p:txBody>
-          <a:bodyPr wrap="none" rtlCol="0">
-            <a:spAutoFit/>
-          </a:bodyPr>
-          <a:lstStyle/>
-          <a:p>
-            <a:pPr algn="ctr"/>
-            <a:r>
-              <a:rPr lang="en-US" sz="900" dirty="0"/>
-              <a:t>NPC</a:t>
-            </a:r>
-          </a:p>
-        </p:txBody>
-      </p:sp>
-      <p:sp>
-        <p:nvSpPr>
-          <p:cNvPr id="149" name="TextBox 148">
-            <a:extLst>
-              <a:ext uri="{FF2B5EF4-FFF2-40B4-BE49-F238E27FC236}">
-                <a16:creationId xmlns:a16="http://schemas.microsoft.com/office/drawing/2014/main" id="{831B5896-D57B-4667-02CD-6AAF11DEE5E2}"/>
-              </a:ext>
-            </a:extLst>
-          </p:cNvPr>
-          <p:cNvSpPr txBox="1"/>
-          <p:nvPr/>
-        </p:nvSpPr>
-        <p:spPr>
-          <a:xfrm>
-            <a:off x="8037782" y="4384148"/>
-            <a:ext cx="407484" cy="230832"/>
-          </a:xfrm>
-          <a:prstGeom prst="rect">
-            <a:avLst/>
-          </a:prstGeom>
-          <a:noFill/>
-        </p:spPr>
-        <p:txBody>
-          <a:bodyPr wrap="none" rtlCol="0">
-            <a:spAutoFit/>
-          </a:bodyPr>
-          <a:lstStyle/>
-          <a:p>
-            <a:pPr algn="ctr"/>
-            <a:r>
-              <a:rPr lang="en-US" sz="900" dirty="0" err="1"/>
-              <a:t>imm</a:t>
-            </a:r>
-            <a:endParaRPr lang="en-US" sz="900" dirty="0"/>
-          </a:p>
-        </p:txBody>
-      </p:sp>
-      <p:sp>
-        <p:nvSpPr>
-          <p:cNvPr id="151" name="TextBox 150">
-            <a:extLst>
-              <a:ext uri="{FF2B5EF4-FFF2-40B4-BE49-F238E27FC236}">
-                <a16:creationId xmlns:a16="http://schemas.microsoft.com/office/drawing/2014/main" id="{BC6DDD09-EA41-1470-2429-DBE27164913F}"/>
-              </a:ext>
-            </a:extLst>
-          </p:cNvPr>
-          <p:cNvSpPr txBox="1"/>
-          <p:nvPr/>
-        </p:nvSpPr>
-        <p:spPr>
-          <a:xfrm>
-            <a:off x="8224994" y="4611234"/>
-            <a:ext cx="713658" cy="230832"/>
-          </a:xfrm>
-          <a:prstGeom prst="rect">
-            <a:avLst/>
-          </a:prstGeom>
-          <a:noFill/>
-        </p:spPr>
-        <p:txBody>
-          <a:bodyPr wrap="none" rtlCol="0">
-            <a:spAutoFit/>
-          </a:bodyPr>
-          <a:lstStyle/>
-          <a:p>
-            <a:pPr algn="ctr"/>
-            <a:r>
-              <a:rPr lang="en-US" sz="900" dirty="0"/>
-              <a:t>Branch PC</a:t>
-            </a:r>
-          </a:p>
-        </p:txBody>
-      </p:sp>
       <p:cxnSp>
         <p:nvCxnSpPr>
-          <p:cNvPr id="152" name="Straight Arrow Connector 151">
-            <a:extLst>
-              <a:ext uri="{FF2B5EF4-FFF2-40B4-BE49-F238E27FC236}">
-                <a16:creationId xmlns:a16="http://schemas.microsoft.com/office/drawing/2014/main" id="{0B969FF2-6DAD-23DC-28B8-ACF737E02DB2}"/>
+          <p:cNvPr id="158" name="Straight Connector 157">
+            <a:extLst>
+              <a:ext uri="{FF2B5EF4-FFF2-40B4-BE49-F238E27FC236}">
+                <a16:creationId xmlns:a16="http://schemas.microsoft.com/office/drawing/2014/main" id="{1691EF3B-B49C-E8C7-89F0-04E2CEA7B43B}"/>
               </a:ext>
             </a:extLst>
           </p:cNvPr>
@@ -6584,15 +6688,12 @@
         </p:nvCxnSpPr>
         <p:spPr>
           <a:xfrm>
-            <a:off x="8937730" y="4726650"/>
-            <a:ext cx="374301" cy="0"/>
-          </a:xfrm>
-          <a:prstGeom prst="straightConnector1">
-            <a:avLst/>
-          </a:prstGeom>
-          <a:ln>
-            <a:tailEnd type="triangle"/>
-          </a:ln>
+            <a:off x="2639349" y="3251607"/>
+            <a:ext cx="0" cy="1014753"/>
+          </a:xfrm>
+          <a:prstGeom prst="line">
+            <a:avLst/>
+          </a:prstGeom>
         </p:spPr>
         <p:style>
           <a:lnRef idx="2">
@@ -6609,272 +6710,6 @@
           </a:fontRef>
         </p:style>
       </p:cxnSp>
-      <p:cxnSp>
-        <p:nvCxnSpPr>
-          <p:cNvPr id="153" name="Straight Arrow Connector 152">
-            <a:extLst>
-              <a:ext uri="{FF2B5EF4-FFF2-40B4-BE49-F238E27FC236}">
-                <a16:creationId xmlns:a16="http://schemas.microsoft.com/office/drawing/2014/main" id="{F030B5C6-68FA-2DA5-919A-5B353DA9C1A8}"/>
-              </a:ext>
-            </a:extLst>
-          </p:cNvPr>
-          <p:cNvCxnSpPr/>
-          <p:nvPr/>
-        </p:nvCxnSpPr>
-        <p:spPr>
-          <a:xfrm>
-            <a:off x="7896145" y="4306947"/>
-            <a:ext cx="177808" cy="0"/>
-          </a:xfrm>
-          <a:prstGeom prst="straightConnector1">
-            <a:avLst/>
-          </a:prstGeom>
-          <a:ln>
-            <a:tailEnd type="triangle"/>
-          </a:ln>
-        </p:spPr>
-        <p:style>
-          <a:lnRef idx="2">
-            <a:schemeClr val="accent1"/>
-          </a:lnRef>
-          <a:fillRef idx="0">
-            <a:schemeClr val="accent1"/>
-          </a:fillRef>
-          <a:effectRef idx="1">
-            <a:schemeClr val="accent1"/>
-          </a:effectRef>
-          <a:fontRef idx="minor">
-            <a:schemeClr val="tx1"/>
-          </a:fontRef>
-        </p:style>
-      </p:cxnSp>
-      <p:cxnSp>
-        <p:nvCxnSpPr>
-          <p:cNvPr id="154" name="Straight Arrow Connector 153">
-            <a:extLst>
-              <a:ext uri="{FF2B5EF4-FFF2-40B4-BE49-F238E27FC236}">
-                <a16:creationId xmlns:a16="http://schemas.microsoft.com/office/drawing/2014/main" id="{9779A5A3-D9AC-4884-E09E-088355A5273D}"/>
-              </a:ext>
-            </a:extLst>
-          </p:cNvPr>
-          <p:cNvCxnSpPr/>
-          <p:nvPr/>
-        </p:nvCxnSpPr>
-        <p:spPr>
-          <a:xfrm>
-            <a:off x="7896145" y="4507267"/>
-            <a:ext cx="177808" cy="0"/>
-          </a:xfrm>
-          <a:prstGeom prst="straightConnector1">
-            <a:avLst/>
-          </a:prstGeom>
-          <a:ln>
-            <a:tailEnd type="triangle"/>
-          </a:ln>
-        </p:spPr>
-        <p:style>
-          <a:lnRef idx="2">
-            <a:schemeClr val="accent1"/>
-          </a:lnRef>
-          <a:fillRef idx="0">
-            <a:schemeClr val="accent1"/>
-          </a:fillRef>
-          <a:effectRef idx="1">
-            <a:schemeClr val="accent1"/>
-          </a:effectRef>
-          <a:fontRef idx="minor">
-            <a:schemeClr val="tx1"/>
-          </a:fontRef>
-        </p:style>
-      </p:cxnSp>
-      <p:sp>
-        <p:nvSpPr>
-          <p:cNvPr id="155" name="TextBox 154">
-            <a:extLst>
-              <a:ext uri="{FF2B5EF4-FFF2-40B4-BE49-F238E27FC236}">
-                <a16:creationId xmlns:a16="http://schemas.microsoft.com/office/drawing/2014/main" id="{75FA3F6B-D94A-A494-28FD-7D4F921979A2}"/>
-              </a:ext>
-            </a:extLst>
-          </p:cNvPr>
-          <p:cNvSpPr txBox="1"/>
-          <p:nvPr/>
-        </p:nvSpPr>
-        <p:spPr>
-          <a:xfrm>
-            <a:off x="8311407" y="4765177"/>
-            <a:ext cx="620684" cy="230832"/>
-          </a:xfrm>
-          <a:prstGeom prst="rect">
-            <a:avLst/>
-          </a:prstGeom>
-          <a:noFill/>
-        </p:spPr>
-        <p:txBody>
-          <a:bodyPr wrap="none" rtlCol="0">
-            <a:spAutoFit/>
-          </a:bodyPr>
-          <a:lstStyle/>
-          <a:p>
-            <a:pPr algn="ctr"/>
-            <a:r>
-              <a:rPr lang="en-US" sz="900" dirty="0"/>
-              <a:t>Jump PC</a:t>
-            </a:r>
-          </a:p>
-        </p:txBody>
-      </p:sp>
-      <p:cxnSp>
-        <p:nvCxnSpPr>
-          <p:cNvPr id="156" name="Straight Arrow Connector 155">
-            <a:extLst>
-              <a:ext uri="{FF2B5EF4-FFF2-40B4-BE49-F238E27FC236}">
-                <a16:creationId xmlns:a16="http://schemas.microsoft.com/office/drawing/2014/main" id="{4E8E377D-848A-C4CD-E531-28E5114DF352}"/>
-              </a:ext>
-            </a:extLst>
-          </p:cNvPr>
-          <p:cNvCxnSpPr>
-            <a:cxnSpLocks/>
-          </p:cNvCxnSpPr>
-          <p:nvPr/>
-        </p:nvCxnSpPr>
-        <p:spPr>
-          <a:xfrm>
-            <a:off x="8937730" y="4895500"/>
-            <a:ext cx="379410" cy="0"/>
-          </a:xfrm>
-          <a:prstGeom prst="straightConnector1">
-            <a:avLst/>
-          </a:prstGeom>
-          <a:ln>
-            <a:tailEnd type="triangle"/>
-          </a:ln>
-        </p:spPr>
-        <p:style>
-          <a:lnRef idx="2">
-            <a:schemeClr val="accent1"/>
-          </a:lnRef>
-          <a:fillRef idx="0">
-            <a:schemeClr val="accent1"/>
-          </a:fillRef>
-          <a:effectRef idx="1">
-            <a:schemeClr val="accent1"/>
-          </a:effectRef>
-          <a:fontRef idx="minor">
-            <a:schemeClr val="tx1"/>
-          </a:fontRef>
-        </p:style>
-      </p:cxnSp>
-      <p:cxnSp>
-        <p:nvCxnSpPr>
-          <p:cNvPr id="158" name="Straight Connector 157">
-            <a:extLst>
-              <a:ext uri="{FF2B5EF4-FFF2-40B4-BE49-F238E27FC236}">
-                <a16:creationId xmlns:a16="http://schemas.microsoft.com/office/drawing/2014/main" id="{1691EF3B-B49C-E8C7-89F0-04E2CEA7B43B}"/>
-              </a:ext>
-            </a:extLst>
-          </p:cNvPr>
-          <p:cNvCxnSpPr>
-            <a:cxnSpLocks/>
-          </p:cNvCxnSpPr>
-          <p:nvPr/>
-        </p:nvCxnSpPr>
-        <p:spPr>
-          <a:xfrm>
-            <a:off x="2639349" y="3251607"/>
-            <a:ext cx="0" cy="1014753"/>
-          </a:xfrm>
-          <a:prstGeom prst="line">
-            <a:avLst/>
-          </a:prstGeom>
-        </p:spPr>
-        <p:style>
-          <a:lnRef idx="2">
-            <a:schemeClr val="accent1"/>
-          </a:lnRef>
-          <a:fillRef idx="0">
-            <a:schemeClr val="accent1"/>
-          </a:fillRef>
-          <a:effectRef idx="1">
-            <a:schemeClr val="accent1"/>
-          </a:effectRef>
-          <a:fontRef idx="minor">
-            <a:schemeClr val="tx1"/>
-          </a:fontRef>
-        </p:style>
-      </p:cxnSp>
-      <p:sp>
-        <p:nvSpPr>
-          <p:cNvPr id="160" name="TextBox 159">
-            <a:extLst>
-              <a:ext uri="{FF2B5EF4-FFF2-40B4-BE49-F238E27FC236}">
-                <a16:creationId xmlns:a16="http://schemas.microsoft.com/office/drawing/2014/main" id="{3BF5B236-4D8B-849D-0CDF-2CB1B5EE7284}"/>
-              </a:ext>
-            </a:extLst>
-          </p:cNvPr>
-          <p:cNvSpPr txBox="1"/>
-          <p:nvPr/>
-        </p:nvSpPr>
-        <p:spPr>
-          <a:xfrm>
-            <a:off x="7559719" y="4194029"/>
-            <a:ext cx="413896" cy="230832"/>
-          </a:xfrm>
-          <a:prstGeom prst="rect">
-            <a:avLst/>
-          </a:prstGeom>
-          <a:noFill/>
-        </p:spPr>
-        <p:txBody>
-          <a:bodyPr wrap="none" rtlCol="0">
-            <a:spAutoFit/>
-          </a:bodyPr>
-          <a:lstStyle/>
-          <a:p>
-            <a:pPr algn="ctr"/>
-            <a:r>
-              <a:rPr lang="en-US" sz="900" dirty="0"/>
-              <a:t>NPC</a:t>
-            </a:r>
-          </a:p>
-        </p:txBody>
-      </p:sp>
-      <p:sp>
-        <p:nvSpPr>
-          <p:cNvPr id="161" name="TextBox 160">
-            <a:extLst>
-              <a:ext uri="{FF2B5EF4-FFF2-40B4-BE49-F238E27FC236}">
-                <a16:creationId xmlns:a16="http://schemas.microsoft.com/office/drawing/2014/main" id="{0E9784F2-B3AB-C0FA-FDFE-48C83AB9B12E}"/>
-              </a:ext>
-            </a:extLst>
-          </p:cNvPr>
-          <p:cNvSpPr txBox="1"/>
-          <p:nvPr/>
-        </p:nvSpPr>
-        <p:spPr>
-          <a:xfrm>
-            <a:off x="7553125" y="4380402"/>
-            <a:ext cx="407484" cy="230832"/>
-          </a:xfrm>
-          <a:prstGeom prst="rect">
-            <a:avLst/>
-          </a:prstGeom>
-          <a:noFill/>
-        </p:spPr>
-        <p:txBody>
-          <a:bodyPr wrap="none" rtlCol="0">
-            <a:spAutoFit/>
-          </a:bodyPr>
-          <a:lstStyle/>
-          <a:p>
-            <a:pPr algn="ctr"/>
-            <a:r>
-              <a:rPr lang="en-US" sz="900" dirty="0" err="1"/>
-              <a:t>imm</a:t>
-            </a:r>
-            <a:endParaRPr lang="en-US" sz="900" dirty="0"/>
-          </a:p>
-        </p:txBody>
-      </p:sp>
       <p:grpSp>
         <p:nvGrpSpPr>
           <p:cNvPr id="162" name="Group 161">
@@ -7244,373 +7079,6 @@
       </p:cxnSp>
       <p:grpSp>
         <p:nvGrpSpPr>
-          <p:cNvPr id="175" name="Group 174">
-            <a:extLst>
-              <a:ext uri="{FF2B5EF4-FFF2-40B4-BE49-F238E27FC236}">
-                <a16:creationId xmlns:a16="http://schemas.microsoft.com/office/drawing/2014/main" id="{CF1E05C7-0258-A1DB-5D4E-EA66C6CAA296}"/>
-              </a:ext>
-            </a:extLst>
-          </p:cNvPr>
-          <p:cNvGrpSpPr/>
-          <p:nvPr/>
-        </p:nvGrpSpPr>
-        <p:grpSpPr>
-          <a:xfrm>
-            <a:off x="8385327" y="3269097"/>
-            <a:ext cx="292770" cy="637674"/>
-            <a:chOff x="1074820" y="1507958"/>
-            <a:chExt cx="292770" cy="637674"/>
-          </a:xfrm>
-        </p:grpSpPr>
-        <p:cxnSp>
-          <p:nvCxnSpPr>
-            <p:cNvPr id="176" name="Straight Connector 175">
-              <a:extLst>
-                <a:ext uri="{FF2B5EF4-FFF2-40B4-BE49-F238E27FC236}">
-                  <a16:creationId xmlns:a16="http://schemas.microsoft.com/office/drawing/2014/main" id="{9B1C3327-A611-2BA8-B007-9186CF3A0E42}"/>
-                </a:ext>
-              </a:extLst>
-            </p:cNvPr>
-            <p:cNvCxnSpPr>
-              <a:cxnSpLocks/>
-            </p:cNvCxnSpPr>
-            <p:nvPr/>
-          </p:nvCxnSpPr>
-          <p:spPr>
-            <a:xfrm>
-              <a:off x="1074821" y="1507958"/>
-              <a:ext cx="0" cy="212558"/>
-            </a:xfrm>
-            <a:prstGeom prst="line">
-              <a:avLst/>
-            </a:prstGeom>
-          </p:spPr>
-          <p:style>
-            <a:lnRef idx="2">
-              <a:schemeClr val="accent1"/>
-            </a:lnRef>
-            <a:fillRef idx="0">
-              <a:schemeClr val="accent1"/>
-            </a:fillRef>
-            <a:effectRef idx="1">
-              <a:schemeClr val="accent1"/>
-            </a:effectRef>
-            <a:fontRef idx="minor">
-              <a:schemeClr val="tx1"/>
-            </a:fontRef>
-          </p:style>
-        </p:cxnSp>
-        <p:cxnSp>
-          <p:nvCxnSpPr>
-            <p:cNvPr id="177" name="Straight Connector 176">
-              <a:extLst>
-                <a:ext uri="{FF2B5EF4-FFF2-40B4-BE49-F238E27FC236}">
-                  <a16:creationId xmlns:a16="http://schemas.microsoft.com/office/drawing/2014/main" id="{3874B16B-1236-9BD1-3E90-062756FAD0B0}"/>
-                </a:ext>
-              </a:extLst>
-            </p:cNvPr>
-            <p:cNvCxnSpPr>
-              <a:cxnSpLocks/>
-            </p:cNvCxnSpPr>
-            <p:nvPr/>
-          </p:nvCxnSpPr>
-          <p:spPr>
-            <a:xfrm>
-              <a:off x="1367590" y="1720516"/>
-              <a:ext cx="0" cy="212558"/>
-            </a:xfrm>
-            <a:prstGeom prst="line">
-              <a:avLst/>
-            </a:prstGeom>
-          </p:spPr>
-          <p:style>
-            <a:lnRef idx="2">
-              <a:schemeClr val="accent1"/>
-            </a:lnRef>
-            <a:fillRef idx="0">
-              <a:schemeClr val="accent1"/>
-            </a:fillRef>
-            <a:effectRef idx="1">
-              <a:schemeClr val="accent1"/>
-            </a:effectRef>
-            <a:fontRef idx="minor">
-              <a:schemeClr val="tx1"/>
-            </a:fontRef>
-          </p:style>
-        </p:cxnSp>
-        <p:cxnSp>
-          <p:nvCxnSpPr>
-            <p:cNvPr id="178" name="Straight Connector 177">
-              <a:extLst>
-                <a:ext uri="{FF2B5EF4-FFF2-40B4-BE49-F238E27FC236}">
-                  <a16:creationId xmlns:a16="http://schemas.microsoft.com/office/drawing/2014/main" id="{C545D7D5-18F9-460B-16FB-45A5E5B3036A}"/>
-                </a:ext>
-              </a:extLst>
-            </p:cNvPr>
-            <p:cNvCxnSpPr>
-              <a:cxnSpLocks/>
-            </p:cNvCxnSpPr>
-            <p:nvPr/>
-          </p:nvCxnSpPr>
-          <p:spPr>
-            <a:xfrm>
-              <a:off x="1074821" y="1933074"/>
-              <a:ext cx="0" cy="212558"/>
-            </a:xfrm>
-            <a:prstGeom prst="line">
-              <a:avLst/>
-            </a:prstGeom>
-          </p:spPr>
-          <p:style>
-            <a:lnRef idx="2">
-              <a:schemeClr val="accent1"/>
-            </a:lnRef>
-            <a:fillRef idx="0">
-              <a:schemeClr val="accent1"/>
-            </a:fillRef>
-            <a:effectRef idx="1">
-              <a:schemeClr val="accent1"/>
-            </a:effectRef>
-            <a:fontRef idx="minor">
-              <a:schemeClr val="tx1"/>
-            </a:fontRef>
-          </p:style>
-        </p:cxnSp>
-        <p:cxnSp>
-          <p:nvCxnSpPr>
-            <p:cNvPr id="179" name="Straight Connector 178">
-              <a:extLst>
-                <a:ext uri="{FF2B5EF4-FFF2-40B4-BE49-F238E27FC236}">
-                  <a16:creationId xmlns:a16="http://schemas.microsoft.com/office/drawing/2014/main" id="{18D96393-1B92-25C8-CCC7-A10F33059DC8}"/>
-                </a:ext>
-              </a:extLst>
-            </p:cNvPr>
-            <p:cNvCxnSpPr>
-              <a:cxnSpLocks/>
-            </p:cNvCxnSpPr>
-            <p:nvPr/>
-          </p:nvCxnSpPr>
-          <p:spPr>
-            <a:xfrm flipH="1">
-              <a:off x="1074821" y="1936227"/>
-              <a:ext cx="292769" cy="209405"/>
-            </a:xfrm>
-            <a:prstGeom prst="line">
-              <a:avLst/>
-            </a:prstGeom>
-          </p:spPr>
-          <p:style>
-            <a:lnRef idx="2">
-              <a:schemeClr val="accent1"/>
-            </a:lnRef>
-            <a:fillRef idx="0">
-              <a:schemeClr val="accent1"/>
-            </a:fillRef>
-            <a:effectRef idx="1">
-              <a:schemeClr val="accent1"/>
-            </a:effectRef>
-            <a:fontRef idx="minor">
-              <a:schemeClr val="tx1"/>
-            </a:fontRef>
-          </p:style>
-        </p:cxnSp>
-        <p:cxnSp>
-          <p:nvCxnSpPr>
-            <p:cNvPr id="180" name="Straight Connector 179">
-              <a:extLst>
-                <a:ext uri="{FF2B5EF4-FFF2-40B4-BE49-F238E27FC236}">
-                  <a16:creationId xmlns:a16="http://schemas.microsoft.com/office/drawing/2014/main" id="{753456A5-2F22-6878-6368-381F766CB36D}"/>
-                </a:ext>
-              </a:extLst>
-            </p:cNvPr>
-            <p:cNvCxnSpPr>
-              <a:cxnSpLocks/>
-            </p:cNvCxnSpPr>
-            <p:nvPr/>
-          </p:nvCxnSpPr>
-          <p:spPr>
-            <a:xfrm flipH="1" flipV="1">
-              <a:off x="1074821" y="1507958"/>
-              <a:ext cx="292769" cy="215711"/>
-            </a:xfrm>
-            <a:prstGeom prst="line">
-              <a:avLst/>
-            </a:prstGeom>
-          </p:spPr>
-          <p:style>
-            <a:lnRef idx="2">
-              <a:schemeClr val="accent1"/>
-            </a:lnRef>
-            <a:fillRef idx="0">
-              <a:schemeClr val="accent1"/>
-            </a:fillRef>
-            <a:effectRef idx="1">
-              <a:schemeClr val="accent1"/>
-            </a:effectRef>
-            <a:fontRef idx="minor">
-              <a:schemeClr val="tx1"/>
-            </a:fontRef>
-          </p:style>
-        </p:cxnSp>
-        <p:cxnSp>
-          <p:nvCxnSpPr>
-            <p:cNvPr id="181" name="Straight Connector 180">
-              <a:extLst>
-                <a:ext uri="{FF2B5EF4-FFF2-40B4-BE49-F238E27FC236}">
-                  <a16:creationId xmlns:a16="http://schemas.microsoft.com/office/drawing/2014/main" id="{0460A47E-6551-87B8-D148-22BB0E7B222D}"/>
-                </a:ext>
-              </a:extLst>
-            </p:cNvPr>
-            <p:cNvCxnSpPr>
-              <a:cxnSpLocks/>
-            </p:cNvCxnSpPr>
-            <p:nvPr/>
-          </p:nvCxnSpPr>
-          <p:spPr>
-            <a:xfrm flipV="1">
-              <a:off x="1074821" y="1829948"/>
-              <a:ext cx="140545" cy="103126"/>
-            </a:xfrm>
-            <a:prstGeom prst="line">
-              <a:avLst/>
-            </a:prstGeom>
-          </p:spPr>
-          <p:style>
-            <a:lnRef idx="2">
-              <a:schemeClr val="accent1"/>
-            </a:lnRef>
-            <a:fillRef idx="0">
-              <a:schemeClr val="accent1"/>
-            </a:fillRef>
-            <a:effectRef idx="1">
-              <a:schemeClr val="accent1"/>
-            </a:effectRef>
-            <a:fontRef idx="minor">
-              <a:schemeClr val="tx1"/>
-            </a:fontRef>
-          </p:style>
-        </p:cxnSp>
-        <p:cxnSp>
-          <p:nvCxnSpPr>
-            <p:cNvPr id="182" name="Straight Connector 181">
-              <a:extLst>
-                <a:ext uri="{FF2B5EF4-FFF2-40B4-BE49-F238E27FC236}">
-                  <a16:creationId xmlns:a16="http://schemas.microsoft.com/office/drawing/2014/main" id="{5A016AB0-C9E3-96DB-019B-5F43AB8DD8B9}"/>
-                </a:ext>
-              </a:extLst>
-            </p:cNvPr>
-            <p:cNvCxnSpPr>
-              <a:cxnSpLocks/>
-            </p:cNvCxnSpPr>
-            <p:nvPr/>
-          </p:nvCxnSpPr>
-          <p:spPr>
-            <a:xfrm>
-              <a:off x="1074820" y="1716505"/>
-              <a:ext cx="140545" cy="107137"/>
-            </a:xfrm>
-            <a:prstGeom prst="line">
-              <a:avLst/>
-            </a:prstGeom>
-          </p:spPr>
-          <p:style>
-            <a:lnRef idx="2">
-              <a:schemeClr val="accent1"/>
-            </a:lnRef>
-            <a:fillRef idx="0">
-              <a:schemeClr val="accent1"/>
-            </a:fillRef>
-            <a:effectRef idx="1">
-              <a:schemeClr val="accent1"/>
-            </a:effectRef>
-            <a:fontRef idx="minor">
-              <a:schemeClr val="tx1"/>
-            </a:fontRef>
-          </p:style>
-        </p:cxnSp>
-      </p:grpSp>
-      <p:cxnSp>
-        <p:nvCxnSpPr>
-          <p:cNvPr id="183" name="Straight Arrow Connector 182">
-            <a:extLst>
-              <a:ext uri="{FF2B5EF4-FFF2-40B4-BE49-F238E27FC236}">
-                <a16:creationId xmlns:a16="http://schemas.microsoft.com/office/drawing/2014/main" id="{FD895F0D-4BF5-DC7B-F7F3-413542C80AFB}"/>
-              </a:ext>
-            </a:extLst>
-          </p:cNvPr>
-          <p:cNvCxnSpPr>
-            <a:cxnSpLocks/>
-          </p:cNvCxnSpPr>
-          <p:nvPr/>
-        </p:nvCxnSpPr>
-        <p:spPr>
-          <a:xfrm>
-            <a:off x="8211392" y="3800492"/>
-            <a:ext cx="173935" cy="0"/>
-          </a:xfrm>
-          <a:prstGeom prst="straightConnector1">
-            <a:avLst/>
-          </a:prstGeom>
-          <a:ln>
-            <a:tailEnd type="triangle"/>
-          </a:ln>
-        </p:spPr>
-        <p:style>
-          <a:lnRef idx="2">
-            <a:schemeClr val="accent1"/>
-          </a:lnRef>
-          <a:fillRef idx="0">
-            <a:schemeClr val="accent1"/>
-          </a:fillRef>
-          <a:effectRef idx="1">
-            <a:schemeClr val="accent1"/>
-          </a:effectRef>
-          <a:fontRef idx="minor">
-            <a:schemeClr val="tx1"/>
-          </a:fontRef>
-        </p:style>
-      </p:cxnSp>
-      <p:cxnSp>
-        <p:nvCxnSpPr>
-          <p:cNvPr id="185" name="Straight Arrow Connector 184">
-            <a:extLst>
-              <a:ext uri="{FF2B5EF4-FFF2-40B4-BE49-F238E27FC236}">
-                <a16:creationId xmlns:a16="http://schemas.microsoft.com/office/drawing/2014/main" id="{8A322888-ED2A-D52F-5D81-55A9F50D831D}"/>
-              </a:ext>
-            </a:extLst>
-          </p:cNvPr>
-          <p:cNvCxnSpPr/>
-          <p:nvPr/>
-        </p:nvCxnSpPr>
-        <p:spPr>
-          <a:xfrm>
-            <a:off x="8207519" y="3375376"/>
-            <a:ext cx="177808" cy="0"/>
-          </a:xfrm>
-          <a:prstGeom prst="straightConnector1">
-            <a:avLst/>
-          </a:prstGeom>
-          <a:ln>
-            <a:tailEnd type="triangle"/>
-          </a:ln>
-        </p:spPr>
-        <p:style>
-          <a:lnRef idx="2">
-            <a:schemeClr val="accent1"/>
-          </a:lnRef>
-          <a:fillRef idx="0">
-            <a:schemeClr val="accent1"/>
-          </a:fillRef>
-          <a:effectRef idx="1">
-            <a:schemeClr val="accent1"/>
-          </a:effectRef>
-          <a:fontRef idx="minor">
-            <a:schemeClr val="tx1"/>
-          </a:fontRef>
-        </p:style>
-      </p:cxnSp>
-      <p:grpSp>
-        <p:nvGrpSpPr>
           <p:cNvPr id="214" name="Group 213">
             <a:extLst>
               <a:ext uri="{FF2B5EF4-FFF2-40B4-BE49-F238E27FC236}">
@@ -8303,10 +7771,10 @@
       </p:cxnSp>
       <p:cxnSp>
         <p:nvCxnSpPr>
-          <p:cNvPr id="245" name="Straight Arrow Connector 244">
-            <a:extLst>
-              <a:ext uri="{FF2B5EF4-FFF2-40B4-BE49-F238E27FC236}">
-                <a16:creationId xmlns:a16="http://schemas.microsoft.com/office/drawing/2014/main" id="{44285445-3673-F463-34B1-B7F351676027}"/>
+          <p:cNvPr id="257" name="Straight Connector 256">
+            <a:extLst>
+              <a:ext uri="{FF2B5EF4-FFF2-40B4-BE49-F238E27FC236}">
+                <a16:creationId xmlns:a16="http://schemas.microsoft.com/office/drawing/2014/main" id="{3C457D5C-9212-E0FE-91EE-284C0BA5FE52}"/>
               </a:ext>
             </a:extLst>
           </p:cNvPr>
@@ -8314,19 +7782,13 @@
           <p:nvPr/>
         </p:nvCxnSpPr>
         <p:spPr>
-          <a:xfrm flipV="1">
-            <a:off x="8716191" y="2434882"/>
-            <a:ext cx="0" cy="167673"/>
-          </a:xfrm>
-          <a:prstGeom prst="straightConnector1">
-            <a:avLst/>
-          </a:prstGeom>
-          <a:ln>
-            <a:solidFill>
-              <a:srgbClr val="FF0000"/>
-            </a:solidFill>
-            <a:tailEnd type="triangle"/>
-          </a:ln>
+          <a:xfrm flipH="1">
+            <a:off x="2286000" y="3251607"/>
+            <a:ext cx="353349" cy="0"/>
+          </a:xfrm>
+          <a:prstGeom prst="line">
+            <a:avLst/>
+          </a:prstGeom>
         </p:spPr>
         <p:style>
           <a:lnRef idx="2">
@@ -8343,215 +7805,6 @@
           </a:fontRef>
         </p:style>
       </p:cxnSp>
-      <p:grpSp>
-        <p:nvGrpSpPr>
-          <p:cNvPr id="247" name="Group 246">
-            <a:extLst>
-              <a:ext uri="{FF2B5EF4-FFF2-40B4-BE49-F238E27FC236}">
-                <a16:creationId xmlns:a16="http://schemas.microsoft.com/office/drawing/2014/main" id="{C53FABC7-DD90-8352-C66A-7DFA23EE2633}"/>
-              </a:ext>
-            </a:extLst>
-          </p:cNvPr>
-          <p:cNvGrpSpPr/>
-          <p:nvPr/>
-        </p:nvGrpSpPr>
-        <p:grpSpPr>
-          <a:xfrm>
-            <a:off x="9307301" y="4163398"/>
-            <a:ext cx="234557" cy="870633"/>
-            <a:chOff x="6175096" y="3854324"/>
-            <a:chExt cx="144932" cy="375881"/>
-          </a:xfrm>
-        </p:grpSpPr>
-        <p:cxnSp>
-          <p:nvCxnSpPr>
-            <p:cNvPr id="248" name="Straight Connector 247">
-              <a:extLst>
-                <a:ext uri="{FF2B5EF4-FFF2-40B4-BE49-F238E27FC236}">
-                  <a16:creationId xmlns:a16="http://schemas.microsoft.com/office/drawing/2014/main" id="{D64F4C90-ABA8-4DDC-5808-F9A278B4E6FD}"/>
-                </a:ext>
-              </a:extLst>
-            </p:cNvPr>
-            <p:cNvCxnSpPr>
-              <a:cxnSpLocks/>
-            </p:cNvCxnSpPr>
-            <p:nvPr/>
-          </p:nvCxnSpPr>
-          <p:spPr>
-            <a:xfrm>
-              <a:off x="6180266" y="3861114"/>
-              <a:ext cx="0" cy="369091"/>
-            </a:xfrm>
-            <a:prstGeom prst="line">
-              <a:avLst/>
-            </a:prstGeom>
-          </p:spPr>
-          <p:style>
-            <a:lnRef idx="2">
-              <a:schemeClr val="accent1"/>
-            </a:lnRef>
-            <a:fillRef idx="0">
-              <a:schemeClr val="accent1"/>
-            </a:fillRef>
-            <a:effectRef idx="1">
-              <a:schemeClr val="accent1"/>
-            </a:effectRef>
-            <a:fontRef idx="minor">
-              <a:schemeClr val="tx1"/>
-            </a:fontRef>
-          </p:style>
-        </p:cxnSp>
-        <p:cxnSp>
-          <p:nvCxnSpPr>
-            <p:cNvPr id="249" name="Straight Connector 248">
-              <a:extLst>
-                <a:ext uri="{FF2B5EF4-FFF2-40B4-BE49-F238E27FC236}">
-                  <a16:creationId xmlns:a16="http://schemas.microsoft.com/office/drawing/2014/main" id="{6FC64163-8C45-5848-AF36-721E2025DF54}"/>
-                </a:ext>
-              </a:extLst>
-            </p:cNvPr>
-            <p:cNvCxnSpPr>
-              <a:cxnSpLocks/>
-            </p:cNvCxnSpPr>
-            <p:nvPr/>
-          </p:nvCxnSpPr>
-          <p:spPr>
-            <a:xfrm>
-              <a:off x="6320028" y="3936909"/>
-              <a:ext cx="0" cy="212558"/>
-            </a:xfrm>
-            <a:prstGeom prst="line">
-              <a:avLst/>
-            </a:prstGeom>
-          </p:spPr>
-          <p:style>
-            <a:lnRef idx="2">
-              <a:schemeClr val="accent1"/>
-            </a:lnRef>
-            <a:fillRef idx="0">
-              <a:schemeClr val="accent1"/>
-            </a:fillRef>
-            <a:effectRef idx="1">
-              <a:schemeClr val="accent1"/>
-            </a:effectRef>
-            <a:fontRef idx="minor">
-              <a:schemeClr val="tx1"/>
-            </a:fontRef>
-          </p:style>
-        </p:cxnSp>
-        <p:cxnSp>
-          <p:nvCxnSpPr>
-            <p:cNvPr id="250" name="Straight Connector 249">
-              <a:extLst>
-                <a:ext uri="{FF2B5EF4-FFF2-40B4-BE49-F238E27FC236}">
-                  <a16:creationId xmlns:a16="http://schemas.microsoft.com/office/drawing/2014/main" id="{3B09081B-A704-2107-897F-12A59ADE3922}"/>
-                </a:ext>
-              </a:extLst>
-            </p:cNvPr>
-            <p:cNvCxnSpPr>
-              <a:cxnSpLocks/>
-            </p:cNvCxnSpPr>
-            <p:nvPr/>
-          </p:nvCxnSpPr>
-          <p:spPr>
-            <a:xfrm flipH="1">
-              <a:off x="6175096" y="4152620"/>
-              <a:ext cx="144932" cy="77585"/>
-            </a:xfrm>
-            <a:prstGeom prst="line">
-              <a:avLst/>
-            </a:prstGeom>
-          </p:spPr>
-          <p:style>
-            <a:lnRef idx="2">
-              <a:schemeClr val="accent1"/>
-            </a:lnRef>
-            <a:fillRef idx="0">
-              <a:schemeClr val="accent1"/>
-            </a:fillRef>
-            <a:effectRef idx="1">
-              <a:schemeClr val="accent1"/>
-            </a:effectRef>
-            <a:fontRef idx="minor">
-              <a:schemeClr val="tx1"/>
-            </a:fontRef>
-          </p:style>
-        </p:cxnSp>
-        <p:cxnSp>
-          <p:nvCxnSpPr>
-            <p:cNvPr id="251" name="Straight Connector 250">
-              <a:extLst>
-                <a:ext uri="{FF2B5EF4-FFF2-40B4-BE49-F238E27FC236}">
-                  <a16:creationId xmlns:a16="http://schemas.microsoft.com/office/drawing/2014/main" id="{465FB0D5-90F0-B240-13F3-D73E3B74C106}"/>
-                </a:ext>
-              </a:extLst>
-            </p:cNvPr>
-            <p:cNvCxnSpPr>
-              <a:cxnSpLocks/>
-            </p:cNvCxnSpPr>
-            <p:nvPr/>
-          </p:nvCxnSpPr>
-          <p:spPr>
-            <a:xfrm flipH="1" flipV="1">
-              <a:off x="6175096" y="3854324"/>
-              <a:ext cx="144932" cy="85738"/>
-            </a:xfrm>
-            <a:prstGeom prst="line">
-              <a:avLst/>
-            </a:prstGeom>
-          </p:spPr>
-          <p:style>
-            <a:lnRef idx="2">
-              <a:schemeClr val="accent1"/>
-            </a:lnRef>
-            <a:fillRef idx="0">
-              <a:schemeClr val="accent1"/>
-            </a:fillRef>
-            <a:effectRef idx="1">
-              <a:schemeClr val="accent1"/>
-            </a:effectRef>
-            <a:fontRef idx="minor">
-              <a:schemeClr val="tx1"/>
-            </a:fontRef>
-          </p:style>
-        </p:cxnSp>
-      </p:grpSp>
-      <p:cxnSp>
-        <p:nvCxnSpPr>
-          <p:cNvPr id="257" name="Straight Connector 256">
-            <a:extLst>
-              <a:ext uri="{FF2B5EF4-FFF2-40B4-BE49-F238E27FC236}">
-                <a16:creationId xmlns:a16="http://schemas.microsoft.com/office/drawing/2014/main" id="{3C457D5C-9212-E0FE-91EE-284C0BA5FE52}"/>
-              </a:ext>
-            </a:extLst>
-          </p:cNvPr>
-          <p:cNvCxnSpPr/>
-          <p:nvPr/>
-        </p:nvCxnSpPr>
-        <p:spPr>
-          <a:xfrm flipH="1">
-            <a:off x="2286000" y="3251607"/>
-            <a:ext cx="353349" cy="0"/>
-          </a:xfrm>
-          <a:prstGeom prst="line">
-            <a:avLst/>
-          </a:prstGeom>
-        </p:spPr>
-        <p:style>
-          <a:lnRef idx="2">
-            <a:schemeClr val="accent1"/>
-          </a:lnRef>
-          <a:fillRef idx="0">
-            <a:schemeClr val="accent1"/>
-          </a:fillRef>
-          <a:effectRef idx="1">
-            <a:schemeClr val="accent1"/>
-          </a:effectRef>
-          <a:fontRef idx="minor">
-            <a:schemeClr val="tx1"/>
-          </a:fontRef>
-        </p:style>
-      </p:cxnSp>
       <p:sp>
         <p:nvSpPr>
           <p:cNvPr id="258" name="TextBox 257">
@@ -8663,320 +7916,6 @@
           </a:p>
         </p:txBody>
       </p:sp>
-      <p:sp>
-        <p:nvSpPr>
-          <p:cNvPr id="264" name="TextBox 263">
-            <a:extLst>
-              <a:ext uri="{FF2B5EF4-FFF2-40B4-BE49-F238E27FC236}">
-                <a16:creationId xmlns:a16="http://schemas.microsoft.com/office/drawing/2014/main" id="{18102C07-F7E1-1AF1-477B-00B68F177F07}"/>
-              </a:ext>
-            </a:extLst>
-          </p:cNvPr>
-          <p:cNvSpPr txBox="1"/>
-          <p:nvPr/>
-        </p:nvSpPr>
-        <p:spPr>
-          <a:xfrm>
-            <a:off x="7795398" y="3262227"/>
-            <a:ext cx="474810" cy="230832"/>
-          </a:xfrm>
-          <a:prstGeom prst="rect">
-            <a:avLst/>
-          </a:prstGeom>
-          <a:noFill/>
-        </p:spPr>
-        <p:txBody>
-          <a:bodyPr wrap="none" rtlCol="0">
-            <a:spAutoFit/>
-          </a:bodyPr>
-          <a:lstStyle/>
-          <a:p>
-            <a:pPr algn="ctr"/>
-            <a:r>
-              <a:rPr lang="en-US" sz="900" dirty="0"/>
-              <a:t>dout1</a:t>
-            </a:r>
-          </a:p>
-        </p:txBody>
-      </p:sp>
-      <p:sp>
-        <p:nvSpPr>
-          <p:cNvPr id="265" name="TextBox 264">
-            <a:extLst>
-              <a:ext uri="{FF2B5EF4-FFF2-40B4-BE49-F238E27FC236}">
-                <a16:creationId xmlns:a16="http://schemas.microsoft.com/office/drawing/2014/main" id="{00A05C49-A5A2-CC74-BAEB-00CF47323BC9}"/>
-              </a:ext>
-            </a:extLst>
-          </p:cNvPr>
-          <p:cNvSpPr txBox="1"/>
-          <p:nvPr/>
-        </p:nvSpPr>
-        <p:spPr>
-          <a:xfrm>
-            <a:off x="7776328" y="3693360"/>
-            <a:ext cx="474810" cy="230832"/>
-          </a:xfrm>
-          <a:prstGeom prst="rect">
-            <a:avLst/>
-          </a:prstGeom>
-          <a:noFill/>
-        </p:spPr>
-        <p:txBody>
-          <a:bodyPr wrap="none" rtlCol="0">
-            <a:spAutoFit/>
-          </a:bodyPr>
-          <a:lstStyle/>
-          <a:p>
-            <a:pPr algn="ctr"/>
-            <a:r>
-              <a:rPr lang="en-US" sz="900" dirty="0"/>
-              <a:t>dout2</a:t>
-            </a:r>
-          </a:p>
-        </p:txBody>
-      </p:sp>
-      <p:sp>
-        <p:nvSpPr>
-          <p:cNvPr id="266" name="TextBox 265">
-            <a:extLst>
-              <a:ext uri="{FF2B5EF4-FFF2-40B4-BE49-F238E27FC236}">
-                <a16:creationId xmlns:a16="http://schemas.microsoft.com/office/drawing/2014/main" id="{B178740B-BE6B-31B0-B4FD-0ED1D3EABF36}"/>
-              </a:ext>
-            </a:extLst>
-          </p:cNvPr>
-          <p:cNvSpPr txBox="1"/>
-          <p:nvPr/>
-        </p:nvSpPr>
-        <p:spPr>
-          <a:xfrm>
-            <a:off x="8430583" y="3473909"/>
-            <a:ext cx="330540" cy="230832"/>
-          </a:xfrm>
-          <a:prstGeom prst="rect">
-            <a:avLst/>
-          </a:prstGeom>
-          <a:noFill/>
-        </p:spPr>
-        <p:txBody>
-          <a:bodyPr wrap="none" rtlCol="0">
-            <a:spAutoFit/>
-          </a:bodyPr>
-          <a:lstStyle/>
-          <a:p>
-            <a:pPr algn="ctr"/>
-            <a:r>
-              <a:rPr lang="en-US" sz="900" dirty="0"/>
-              <a:t>“-”</a:t>
-            </a:r>
-          </a:p>
-        </p:txBody>
-      </p:sp>
-      <p:cxnSp>
-        <p:nvCxnSpPr>
-          <p:cNvPr id="269" name="Straight Arrow Connector 268">
-            <a:extLst>
-              <a:ext uri="{FF2B5EF4-FFF2-40B4-BE49-F238E27FC236}">
-                <a16:creationId xmlns:a16="http://schemas.microsoft.com/office/drawing/2014/main" id="{87860765-22E8-2DBF-0155-43937E1810EB}"/>
-              </a:ext>
-            </a:extLst>
-          </p:cNvPr>
-          <p:cNvCxnSpPr>
-            <a:cxnSpLocks/>
-          </p:cNvCxnSpPr>
-          <p:nvPr/>
-        </p:nvCxnSpPr>
-        <p:spPr>
-          <a:xfrm flipV="1">
-            <a:off x="9204837" y="4520967"/>
-            <a:ext cx="100338" cy="2498"/>
-          </a:xfrm>
-          <a:prstGeom prst="straightConnector1">
-            <a:avLst/>
-          </a:prstGeom>
-          <a:ln>
-            <a:tailEnd type="triangle"/>
-          </a:ln>
-        </p:spPr>
-        <p:style>
-          <a:lnRef idx="2">
-            <a:schemeClr val="accent1"/>
-          </a:lnRef>
-          <a:fillRef idx="0">
-            <a:schemeClr val="accent1"/>
-          </a:fillRef>
-          <a:effectRef idx="1">
-            <a:schemeClr val="accent1"/>
-          </a:effectRef>
-          <a:fontRef idx="minor">
-            <a:schemeClr val="tx1"/>
-          </a:fontRef>
-        </p:style>
-      </p:cxnSp>
-      <p:sp>
-        <p:nvSpPr>
-          <p:cNvPr id="270" name="TextBox 269">
-            <a:extLst>
-              <a:ext uri="{FF2B5EF4-FFF2-40B4-BE49-F238E27FC236}">
-                <a16:creationId xmlns:a16="http://schemas.microsoft.com/office/drawing/2014/main" id="{E335D321-53C8-872A-430E-7732E67F0A79}"/>
-              </a:ext>
-            </a:extLst>
-          </p:cNvPr>
-          <p:cNvSpPr txBox="1"/>
-          <p:nvPr/>
-        </p:nvSpPr>
-        <p:spPr>
-          <a:xfrm>
-            <a:off x="8882744" y="4402632"/>
-            <a:ext cx="413896" cy="230832"/>
-          </a:xfrm>
-          <a:prstGeom prst="rect">
-            <a:avLst/>
-          </a:prstGeom>
-          <a:noFill/>
-        </p:spPr>
-        <p:txBody>
-          <a:bodyPr wrap="none" rtlCol="0">
-            <a:spAutoFit/>
-          </a:bodyPr>
-          <a:lstStyle/>
-          <a:p>
-            <a:pPr algn="ctr"/>
-            <a:r>
-              <a:rPr lang="en-US" sz="900" dirty="0"/>
-              <a:t>NPC</a:t>
-            </a:r>
-          </a:p>
-        </p:txBody>
-      </p:sp>
-      <p:cxnSp>
-        <p:nvCxnSpPr>
-          <p:cNvPr id="275" name="Straight Arrow Connector 274">
-            <a:extLst>
-              <a:ext uri="{FF2B5EF4-FFF2-40B4-BE49-F238E27FC236}">
-                <a16:creationId xmlns:a16="http://schemas.microsoft.com/office/drawing/2014/main" id="{FF5E826E-C5DA-266A-3DEA-9D97594449EE}"/>
-              </a:ext>
-            </a:extLst>
-          </p:cNvPr>
-          <p:cNvCxnSpPr/>
-          <p:nvPr/>
-        </p:nvCxnSpPr>
-        <p:spPr>
-          <a:xfrm>
-            <a:off x="9506818" y="4099798"/>
-            <a:ext cx="0" cy="230832"/>
-          </a:xfrm>
-          <a:prstGeom prst="straightConnector1">
-            <a:avLst/>
-          </a:prstGeom>
-          <a:ln>
-            <a:solidFill>
-              <a:srgbClr val="FF0000"/>
-            </a:solidFill>
-            <a:tailEnd type="triangle"/>
-          </a:ln>
-        </p:spPr>
-        <p:style>
-          <a:lnRef idx="2">
-            <a:schemeClr val="accent1"/>
-          </a:lnRef>
-          <a:fillRef idx="0">
-            <a:schemeClr val="accent1"/>
-          </a:fillRef>
-          <a:effectRef idx="1">
-            <a:schemeClr val="accent1"/>
-          </a:effectRef>
-          <a:fontRef idx="minor">
-            <a:schemeClr val="tx1"/>
-          </a:fontRef>
-        </p:style>
-      </p:cxnSp>
-      <p:cxnSp>
-        <p:nvCxnSpPr>
-          <p:cNvPr id="276" name="Straight Arrow Connector 275">
-            <a:extLst>
-              <a:ext uri="{FF2B5EF4-FFF2-40B4-BE49-F238E27FC236}">
-                <a16:creationId xmlns:a16="http://schemas.microsoft.com/office/drawing/2014/main" id="{370ACF3C-5A72-31AC-3830-8B43C336935F}"/>
-              </a:ext>
-            </a:extLst>
-          </p:cNvPr>
-          <p:cNvCxnSpPr>
-            <a:cxnSpLocks/>
-          </p:cNvCxnSpPr>
-          <p:nvPr/>
-        </p:nvCxnSpPr>
-        <p:spPr>
-          <a:xfrm>
-            <a:off x="9389588" y="3591169"/>
-            <a:ext cx="0" cy="650213"/>
-          </a:xfrm>
-          <a:prstGeom prst="straightConnector1">
-            <a:avLst/>
-          </a:prstGeom>
-          <a:ln>
-            <a:solidFill>
-              <a:srgbClr val="FF0000"/>
-            </a:solidFill>
-            <a:tailEnd type="triangle"/>
-          </a:ln>
-        </p:spPr>
-        <p:style>
-          <a:lnRef idx="2">
-            <a:schemeClr val="accent1"/>
-          </a:lnRef>
-          <a:fillRef idx="0">
-            <a:schemeClr val="accent1"/>
-          </a:fillRef>
-          <a:effectRef idx="1">
-            <a:schemeClr val="accent1"/>
-          </a:effectRef>
-          <a:fontRef idx="minor">
-            <a:schemeClr val="tx1"/>
-          </a:fontRef>
-        </p:style>
-      </p:cxnSp>
-      <p:cxnSp>
-        <p:nvCxnSpPr>
-          <p:cNvPr id="280" name="Straight Connector 279">
-            <a:extLst>
-              <a:ext uri="{FF2B5EF4-FFF2-40B4-BE49-F238E27FC236}">
-                <a16:creationId xmlns:a16="http://schemas.microsoft.com/office/drawing/2014/main" id="{BF12A351-142A-23D7-36BD-9308B9D720AA}"/>
-              </a:ext>
-            </a:extLst>
-          </p:cNvPr>
-          <p:cNvCxnSpPr>
-            <a:cxnSpLocks/>
-          </p:cNvCxnSpPr>
-          <p:nvPr/>
-        </p:nvCxnSpPr>
-        <p:spPr>
-          <a:xfrm>
-            <a:off x="8690708" y="3591169"/>
-            <a:ext cx="695569" cy="0"/>
-          </a:xfrm>
-          <a:prstGeom prst="line">
-            <a:avLst/>
-          </a:prstGeom>
-          <a:ln>
-            <a:solidFill>
-              <a:srgbClr val="FF0000"/>
-            </a:solidFill>
-          </a:ln>
-        </p:spPr>
-        <p:style>
-          <a:lnRef idx="2">
-            <a:schemeClr val="accent1"/>
-          </a:lnRef>
-          <a:fillRef idx="0">
-            <a:schemeClr val="accent1"/>
-          </a:fillRef>
-          <a:effectRef idx="1">
-            <a:schemeClr val="accent1"/>
-          </a:effectRef>
-          <a:fontRef idx="minor">
-            <a:schemeClr val="tx1"/>
-          </a:fontRef>
-        </p:style>
-      </p:cxnSp>
       <p:cxnSp>
         <p:nvCxnSpPr>
           <p:cNvPr id="286" name="Straight Connector 285">
@@ -9029,44 +7968,6 @@
           <a:xfrm flipV="1">
             <a:off x="211807" y="2717971"/>
             <a:ext cx="0" cy="3295203"/>
-          </a:xfrm>
-          <a:prstGeom prst="line">
-            <a:avLst/>
-          </a:prstGeom>
-        </p:spPr>
-        <p:style>
-          <a:lnRef idx="2">
-            <a:schemeClr val="accent1"/>
-          </a:lnRef>
-          <a:fillRef idx="0">
-            <a:schemeClr val="accent1"/>
-          </a:fillRef>
-          <a:effectRef idx="1">
-            <a:schemeClr val="accent1"/>
-          </a:effectRef>
-          <a:fontRef idx="minor">
-            <a:schemeClr val="tx1"/>
-          </a:fontRef>
-        </p:style>
-      </p:cxnSp>
-      <p:cxnSp>
-        <p:nvCxnSpPr>
-          <p:cNvPr id="290" name="Straight Connector 289">
-            <a:extLst>
-              <a:ext uri="{FF2B5EF4-FFF2-40B4-BE49-F238E27FC236}">
-                <a16:creationId xmlns:a16="http://schemas.microsoft.com/office/drawing/2014/main" id="{1876BEE7-FDFC-0D31-7B67-CAA4ECA61CC2}"/>
-              </a:ext>
-            </a:extLst>
-          </p:cNvPr>
-          <p:cNvCxnSpPr>
-            <a:cxnSpLocks/>
-          </p:cNvCxnSpPr>
-          <p:nvPr/>
-        </p:nvCxnSpPr>
-        <p:spPr>
-          <a:xfrm>
-            <a:off x="9542834" y="4611234"/>
-            <a:ext cx="136187" cy="0"/>
           </a:xfrm>
           <a:prstGeom prst="line">
             <a:avLst/>
@@ -9571,50 +8472,6 @@
       </p:sp>
       <p:cxnSp>
         <p:nvCxnSpPr>
-          <p:cNvPr id="315" name="Straight Arrow Connector 314">
-            <a:extLst>
-              <a:ext uri="{FF2B5EF4-FFF2-40B4-BE49-F238E27FC236}">
-                <a16:creationId xmlns:a16="http://schemas.microsoft.com/office/drawing/2014/main" id="{CC2E6CF6-7F9B-DF2E-8401-A11C6FFE7D1D}"/>
-              </a:ext>
-            </a:extLst>
-          </p:cNvPr>
-          <p:cNvCxnSpPr>
-            <a:cxnSpLocks/>
-          </p:cNvCxnSpPr>
-          <p:nvPr/>
-        </p:nvCxnSpPr>
-        <p:spPr>
-          <a:xfrm flipV="1">
-            <a:off x="10852467" y="3154000"/>
-            <a:ext cx="0" cy="195214"/>
-          </a:xfrm>
-          <a:prstGeom prst="straightConnector1">
-            <a:avLst/>
-          </a:prstGeom>
-          <a:ln>
-            <a:solidFill>
-              <a:srgbClr val="FF0000"/>
-            </a:solidFill>
-            <a:tailEnd type="triangle"/>
-          </a:ln>
-        </p:spPr>
-        <p:style>
-          <a:lnRef idx="2">
-            <a:schemeClr val="accent1"/>
-          </a:lnRef>
-          <a:fillRef idx="0">
-            <a:schemeClr val="accent1"/>
-          </a:fillRef>
-          <a:effectRef idx="1">
-            <a:schemeClr val="accent1"/>
-          </a:effectRef>
-          <a:fontRef idx="minor">
-            <a:schemeClr val="tx1"/>
-          </a:fontRef>
-        </p:style>
-      </p:cxnSp>
-      <p:cxnSp>
-        <p:nvCxnSpPr>
           <p:cNvPr id="316" name="Straight Connector 315">
             <a:extLst>
               <a:ext uri="{FF2B5EF4-FFF2-40B4-BE49-F238E27FC236}">
@@ -10243,8 +9100,8 @@
         </p:nvSpPr>
         <p:spPr>
           <a:xfrm>
-            <a:off x="2458495" y="983375"/>
-            <a:ext cx="142681" cy="3600425"/>
+            <a:off x="2458496" y="983375"/>
+            <a:ext cx="124516" cy="4611756"/>
           </a:xfrm>
           <a:prstGeom prst="rect">
             <a:avLst/>
@@ -10288,119 +9145,161 @@
           </a:p>
         </p:txBody>
       </p:sp>
-      <p:sp>
-        <p:nvSpPr>
-          <p:cNvPr id="17" name="Rectangle 16">
-            <a:extLst>
-              <a:ext uri="{FF2B5EF4-FFF2-40B4-BE49-F238E27FC236}">
-                <a16:creationId xmlns:a16="http://schemas.microsoft.com/office/drawing/2014/main" id="{4480F685-AE09-0D32-5539-8E4975E6DF53}"/>
-              </a:ext>
-            </a:extLst>
-          </p:cNvPr>
-          <p:cNvSpPr/>
-          <p:nvPr/>
-        </p:nvSpPr>
-        <p:spPr>
-          <a:xfrm>
-            <a:off x="4112869" y="5087156"/>
-            <a:ext cx="663423" cy="460640"/>
-          </a:xfrm>
-          <a:prstGeom prst="rect">
-            <a:avLst/>
-          </a:prstGeom>
-          <a:solidFill>
-            <a:schemeClr val="bg1"/>
-          </a:solidFill>
-        </p:spPr>
-        <p:style>
-          <a:lnRef idx="2">
-            <a:schemeClr val="accent1">
-              <a:shade val="15000"/>
-            </a:schemeClr>
-          </a:lnRef>
-          <a:fillRef idx="1">
-            <a:schemeClr val="accent1"/>
-          </a:fillRef>
-          <a:effectRef idx="0">
-            <a:schemeClr val="accent1"/>
-          </a:effectRef>
-          <a:fontRef idx="minor">
-            <a:schemeClr val="lt1"/>
-          </a:fontRef>
-        </p:style>
-        <p:txBody>
-          <a:bodyPr rtlCol="0" anchor="ctr"/>
-          <a:lstStyle/>
-          <a:p>
-            <a:pPr algn="ctr"/>
-            <a:r>
-              <a:rPr lang="en-US" dirty="0"/>
-              <a:t>PC</a:t>
-            </a:r>
-          </a:p>
-        </p:txBody>
-      </p:sp>
-      <p:sp>
-        <p:nvSpPr>
-          <p:cNvPr id="26" name="TextBox 25">
-            <a:extLst>
-              <a:ext uri="{FF2B5EF4-FFF2-40B4-BE49-F238E27FC236}">
-                <a16:creationId xmlns:a16="http://schemas.microsoft.com/office/drawing/2014/main" id="{2AE4C0B7-D9E3-3907-9505-138DB1D14F87}"/>
-              </a:ext>
-            </a:extLst>
-          </p:cNvPr>
-          <p:cNvSpPr txBox="1"/>
-          <p:nvPr/>
-        </p:nvSpPr>
-        <p:spPr>
-          <a:xfrm>
-            <a:off x="4171777" y="5125610"/>
-            <a:ext cx="574196" cy="384721"/>
-          </a:xfrm>
-          <a:prstGeom prst="rect">
-            <a:avLst/>
-          </a:prstGeom>
-          <a:noFill/>
-        </p:spPr>
-        <p:txBody>
-          <a:bodyPr wrap="none" rtlCol="0">
-            <a:spAutoFit/>
-          </a:bodyPr>
-          <a:lstStyle/>
-          <a:p>
-            <a:pPr algn="ctr"/>
-            <a:r>
-              <a:rPr lang="en-US" sz="1000" dirty="0"/>
-              <a:t>Stall</a:t>
-            </a:r>
-          </a:p>
-          <a:p>
-            <a:pPr algn="ctr"/>
-            <a:r>
-              <a:rPr lang="en-US" sz="900" dirty="0"/>
-              <a:t>counter</a:t>
-            </a:r>
-          </a:p>
-        </p:txBody>
-      </p:sp>
+      <p:grpSp>
+        <p:nvGrpSpPr>
+          <p:cNvPr id="30" name="Group 29">
+            <a:extLst>
+              <a:ext uri="{FF2B5EF4-FFF2-40B4-BE49-F238E27FC236}">
+                <a16:creationId xmlns:a16="http://schemas.microsoft.com/office/drawing/2014/main" id="{F29CD4F1-4D65-2071-CB5D-56C21B0A8ADD}"/>
+              </a:ext>
+            </a:extLst>
+          </p:cNvPr>
+          <p:cNvGrpSpPr/>
+          <p:nvPr/>
+        </p:nvGrpSpPr>
+        <p:grpSpPr>
+          <a:xfrm rot="16200000">
+            <a:off x="8495764" y="2520050"/>
+            <a:ext cx="405246" cy="267608"/>
+            <a:chOff x="6169099" y="3766490"/>
+            <a:chExt cx="533480" cy="267608"/>
+          </a:xfrm>
+        </p:grpSpPr>
+        <p:pic>
+          <p:nvPicPr>
+            <p:cNvPr id="32" name="Picture 31">
+              <a:extLst>
+                <a:ext uri="{FF2B5EF4-FFF2-40B4-BE49-F238E27FC236}">
+                  <a16:creationId xmlns:a16="http://schemas.microsoft.com/office/drawing/2014/main" id="{08E484B5-905D-B38D-3D91-241CE1719D6C}"/>
+                </a:ext>
+              </a:extLst>
+            </p:cNvPr>
+            <p:cNvPicPr>
+              <a:picLocks noChangeAspect="1"/>
+            </p:cNvPicPr>
+            <p:nvPr/>
+          </p:nvPicPr>
+          <p:blipFill>
+            <a:blip r:embed="rId2"/>
+            <a:stretch>
+              <a:fillRect/>
+            </a:stretch>
+          </p:blipFill>
+          <p:spPr>
+            <a:xfrm>
+              <a:off x="6198580" y="3766490"/>
+              <a:ext cx="503999" cy="267608"/>
+            </a:xfrm>
+            <a:prstGeom prst="rect">
+              <a:avLst/>
+            </a:prstGeom>
+          </p:spPr>
+        </p:pic>
+        <p:cxnSp>
+          <p:nvCxnSpPr>
+            <p:cNvPr id="34" name="Straight Arrow Connector 33">
+              <a:extLst>
+                <a:ext uri="{FF2B5EF4-FFF2-40B4-BE49-F238E27FC236}">
+                  <a16:creationId xmlns:a16="http://schemas.microsoft.com/office/drawing/2014/main" id="{72BE6CC3-2C59-A24A-5E92-68A707F8638E}"/>
+                </a:ext>
+              </a:extLst>
+            </p:cNvPr>
+            <p:cNvCxnSpPr>
+              <a:cxnSpLocks/>
+            </p:cNvCxnSpPr>
+            <p:nvPr/>
+          </p:nvCxnSpPr>
+          <p:spPr>
+            <a:xfrm>
+              <a:off x="6169099" y="3838587"/>
+              <a:ext cx="177808" cy="0"/>
+            </a:xfrm>
+            <a:prstGeom prst="straightConnector1">
+              <a:avLst/>
+            </a:prstGeom>
+            <a:ln>
+              <a:solidFill>
+                <a:srgbClr val="FF0000"/>
+              </a:solidFill>
+              <a:tailEnd type="triangle"/>
+            </a:ln>
+          </p:spPr>
+          <p:style>
+            <a:lnRef idx="2">
+              <a:schemeClr val="accent1"/>
+            </a:lnRef>
+            <a:fillRef idx="0">
+              <a:schemeClr val="accent1"/>
+            </a:fillRef>
+            <a:effectRef idx="1">
+              <a:schemeClr val="accent1"/>
+            </a:effectRef>
+            <a:fontRef idx="minor">
+              <a:schemeClr val="tx1"/>
+            </a:fontRef>
+          </p:style>
+        </p:cxnSp>
+        <p:cxnSp>
+          <p:nvCxnSpPr>
+            <p:cNvPr id="35" name="Straight Arrow Connector 34">
+              <a:extLst>
+                <a:ext uri="{FF2B5EF4-FFF2-40B4-BE49-F238E27FC236}">
+                  <a16:creationId xmlns:a16="http://schemas.microsoft.com/office/drawing/2014/main" id="{8AB80F94-094C-4CE9-C275-29945A350AA8}"/>
+                </a:ext>
+              </a:extLst>
+            </p:cNvPr>
+            <p:cNvCxnSpPr>
+              <a:cxnSpLocks/>
+            </p:cNvCxnSpPr>
+            <p:nvPr/>
+          </p:nvCxnSpPr>
+          <p:spPr>
+            <a:xfrm>
+              <a:off x="6169099" y="3958185"/>
+              <a:ext cx="177808" cy="0"/>
+            </a:xfrm>
+            <a:prstGeom prst="straightConnector1">
+              <a:avLst/>
+            </a:prstGeom>
+            <a:ln>
+              <a:solidFill>
+                <a:srgbClr val="FF0000"/>
+              </a:solidFill>
+              <a:tailEnd type="triangle"/>
+            </a:ln>
+          </p:spPr>
+          <p:style>
+            <a:lnRef idx="2">
+              <a:schemeClr val="accent1"/>
+            </a:lnRef>
+            <a:fillRef idx="0">
+              <a:schemeClr val="accent1"/>
+            </a:fillRef>
+            <a:effectRef idx="1">
+              <a:schemeClr val="accent1"/>
+            </a:effectRef>
+            <a:fontRef idx="minor">
+              <a:schemeClr val="tx1"/>
+            </a:fontRef>
+          </p:style>
+        </p:cxnSp>
+      </p:grpSp>
       <p:cxnSp>
         <p:nvCxnSpPr>
-          <p:cNvPr id="30" name="Straight Arrow Connector 29">
-            <a:extLst>
-              <a:ext uri="{FF2B5EF4-FFF2-40B4-BE49-F238E27FC236}">
-                <a16:creationId xmlns:a16="http://schemas.microsoft.com/office/drawing/2014/main" id="{0FCEB13D-6178-8B05-6BF7-AA34265C10ED}"/>
-              </a:ext>
-            </a:extLst>
-          </p:cNvPr>
-          <p:cNvCxnSpPr>
-            <a:cxnSpLocks/>
-          </p:cNvCxnSpPr>
+          <p:cNvPr id="37" name="Straight Arrow Connector 36">
+            <a:extLst>
+              <a:ext uri="{FF2B5EF4-FFF2-40B4-BE49-F238E27FC236}">
+                <a16:creationId xmlns:a16="http://schemas.microsoft.com/office/drawing/2014/main" id="{A09C37C1-E5D0-9FBA-A932-2F98BACEC0B2}"/>
+              </a:ext>
+            </a:extLst>
+          </p:cNvPr>
+          <p:cNvCxnSpPr/>
           <p:nvPr/>
         </p:nvCxnSpPr>
         <p:spPr>
           <a:xfrm>
-            <a:off x="3882996" y="5224369"/>
-            <a:ext cx="229874" cy="0"/>
+            <a:off x="2870131" y="3309402"/>
+            <a:ext cx="177808" cy="0"/>
           </a:xfrm>
           <a:prstGeom prst="straightConnector1">
             <a:avLst/>
@@ -10409,142 +9308,6 @@
             <a:solidFill>
               <a:srgbClr val="FF0000"/>
             </a:solidFill>
-            <a:tailEnd type="triangle"/>
-          </a:ln>
-        </p:spPr>
-        <p:style>
-          <a:lnRef idx="2">
-            <a:schemeClr val="accent1"/>
-          </a:lnRef>
-          <a:fillRef idx="0">
-            <a:schemeClr val="accent1"/>
-          </a:fillRef>
-          <a:effectRef idx="1">
-            <a:schemeClr val="accent1"/>
-          </a:effectRef>
-          <a:fontRef idx="minor">
-            <a:schemeClr val="tx1"/>
-          </a:fontRef>
-        </p:style>
-      </p:cxnSp>
-      <p:sp>
-        <p:nvSpPr>
-          <p:cNvPr id="32" name="Rectangle 31">
-            <a:extLst>
-              <a:ext uri="{FF2B5EF4-FFF2-40B4-BE49-F238E27FC236}">
-                <a16:creationId xmlns:a16="http://schemas.microsoft.com/office/drawing/2014/main" id="{5964E24E-8C81-EFE0-AB26-0F6BAD08C8E1}"/>
-              </a:ext>
-            </a:extLst>
-          </p:cNvPr>
-          <p:cNvSpPr/>
-          <p:nvPr/>
-        </p:nvSpPr>
-        <p:spPr>
-          <a:xfrm>
-            <a:off x="3204207" y="5087370"/>
-            <a:ext cx="678789" cy="484706"/>
-          </a:xfrm>
-          <a:prstGeom prst="rect">
-            <a:avLst/>
-          </a:prstGeom>
-          <a:solidFill>
-            <a:schemeClr val="bg1"/>
-          </a:solidFill>
-        </p:spPr>
-        <p:style>
-          <a:lnRef idx="2">
-            <a:schemeClr val="accent1">
-              <a:shade val="15000"/>
-            </a:schemeClr>
-          </a:lnRef>
-          <a:fillRef idx="1">
-            <a:schemeClr val="accent1"/>
-          </a:fillRef>
-          <a:effectRef idx="0">
-            <a:schemeClr val="accent1"/>
-          </a:effectRef>
-          <a:fontRef idx="minor">
-            <a:schemeClr val="lt1"/>
-          </a:fontRef>
-        </p:style>
-        <p:txBody>
-          <a:bodyPr rtlCol="0" anchor="ctr"/>
-          <a:lstStyle/>
-          <a:p>
-            <a:pPr algn="ctr"/>
-            <a:r>
-              <a:rPr lang="en-US" dirty="0"/>
-              <a:t>PC</a:t>
-            </a:r>
-          </a:p>
-        </p:txBody>
-      </p:sp>
-      <p:sp>
-        <p:nvSpPr>
-          <p:cNvPr id="34" name="TextBox 33">
-            <a:extLst>
-              <a:ext uri="{FF2B5EF4-FFF2-40B4-BE49-F238E27FC236}">
-                <a16:creationId xmlns:a16="http://schemas.microsoft.com/office/drawing/2014/main" id="{AAF8D060-B516-028F-A160-DDD58A9B4A1C}"/>
-              </a:ext>
-            </a:extLst>
-          </p:cNvPr>
-          <p:cNvSpPr txBox="1"/>
-          <p:nvPr/>
-        </p:nvSpPr>
-        <p:spPr>
-          <a:xfrm>
-            <a:off x="3169553" y="5107257"/>
-            <a:ext cx="729687" cy="400110"/>
-          </a:xfrm>
-          <a:prstGeom prst="rect">
-            <a:avLst/>
-          </a:prstGeom>
-          <a:noFill/>
-        </p:spPr>
-        <p:txBody>
-          <a:bodyPr wrap="none" rtlCol="0">
-            <a:spAutoFit/>
-          </a:bodyPr>
-          <a:lstStyle/>
-          <a:p>
-            <a:pPr algn="ctr"/>
-            <a:r>
-              <a:rPr lang="en-US" sz="1000" dirty="0"/>
-              <a:t>Hazard</a:t>
-            </a:r>
-          </a:p>
-          <a:p>
-            <a:pPr algn="ctr"/>
-            <a:r>
-              <a:rPr lang="en-US" sz="1000" dirty="0"/>
-              <a:t>Detection</a:t>
-            </a:r>
-          </a:p>
-        </p:txBody>
-      </p:sp>
-      <p:cxnSp>
-        <p:nvCxnSpPr>
-          <p:cNvPr id="35" name="Straight Arrow Connector 34">
-            <a:extLst>
-              <a:ext uri="{FF2B5EF4-FFF2-40B4-BE49-F238E27FC236}">
-                <a16:creationId xmlns:a16="http://schemas.microsoft.com/office/drawing/2014/main" id="{41C7F50D-F709-CA85-5675-DD0636890A76}"/>
-              </a:ext>
-            </a:extLst>
-          </p:cNvPr>
-          <p:cNvCxnSpPr>
-            <a:cxnSpLocks/>
-          </p:cNvCxnSpPr>
-          <p:nvPr/>
-        </p:nvCxnSpPr>
-        <p:spPr>
-          <a:xfrm>
-            <a:off x="2743887" y="5277871"/>
-            <a:ext cx="442253" cy="0"/>
-          </a:xfrm>
-          <a:prstGeom prst="straightConnector1">
-            <a:avLst/>
-          </a:prstGeom>
-          <a:ln>
             <a:tailEnd type="triangle"/>
           </a:ln>
         </p:spPr>
@@ -10565,22 +9328,20 @@
       </p:cxnSp>
       <p:cxnSp>
         <p:nvCxnSpPr>
-          <p:cNvPr id="61" name="Straight Arrow Connector 60">
-            <a:extLst>
-              <a:ext uri="{FF2B5EF4-FFF2-40B4-BE49-F238E27FC236}">
-                <a16:creationId xmlns:a16="http://schemas.microsoft.com/office/drawing/2014/main" id="{628AAA9C-DA03-CA34-B011-035AEF93D851}"/>
-              </a:ext>
-            </a:extLst>
-          </p:cNvPr>
-          <p:cNvCxnSpPr>
-            <a:cxnSpLocks/>
-          </p:cNvCxnSpPr>
+          <p:cNvPr id="38" name="Straight Arrow Connector 37">
+            <a:extLst>
+              <a:ext uri="{FF2B5EF4-FFF2-40B4-BE49-F238E27FC236}">
+                <a16:creationId xmlns:a16="http://schemas.microsoft.com/office/drawing/2014/main" id="{4D9B3B66-045C-4BC7-2F4D-857D0D686CD3}"/>
+              </a:ext>
+            </a:extLst>
+          </p:cNvPr>
+          <p:cNvCxnSpPr/>
           <p:nvPr/>
         </p:nvCxnSpPr>
         <p:spPr>
-          <a:xfrm flipH="1">
-            <a:off x="3888841" y="5478179"/>
-            <a:ext cx="205614" cy="0"/>
+          <a:xfrm>
+            <a:off x="2870131" y="3429000"/>
+            <a:ext cx="177808" cy="0"/>
           </a:xfrm>
           <a:prstGeom prst="straightConnector1">
             <a:avLst/>
@@ -10589,6 +9350,281 @@
             <a:solidFill>
               <a:srgbClr val="FF0000"/>
             </a:solidFill>
+            <a:tailEnd type="triangle"/>
+          </a:ln>
+        </p:spPr>
+        <p:style>
+          <a:lnRef idx="2">
+            <a:schemeClr val="accent1"/>
+          </a:lnRef>
+          <a:fillRef idx="0">
+            <a:schemeClr val="accent1"/>
+          </a:fillRef>
+          <a:effectRef idx="1">
+            <a:schemeClr val="accent1"/>
+          </a:effectRef>
+          <a:fontRef idx="minor">
+            <a:schemeClr val="tx1"/>
+          </a:fontRef>
+        </p:style>
+      </p:cxnSp>
+      <p:sp>
+        <p:nvSpPr>
+          <p:cNvPr id="106" name="Rectangle 105">
+            <a:extLst>
+              <a:ext uri="{FF2B5EF4-FFF2-40B4-BE49-F238E27FC236}">
+                <a16:creationId xmlns:a16="http://schemas.microsoft.com/office/drawing/2014/main" id="{802EBAD3-1207-E175-F4E6-F1CAAFD5CB84}"/>
+              </a:ext>
+            </a:extLst>
+          </p:cNvPr>
+          <p:cNvSpPr/>
+          <p:nvPr/>
+        </p:nvSpPr>
+        <p:spPr>
+          <a:xfrm>
+            <a:off x="4112869" y="5087156"/>
+            <a:ext cx="663423" cy="460640"/>
+          </a:xfrm>
+          <a:prstGeom prst="rect">
+            <a:avLst/>
+          </a:prstGeom>
+          <a:solidFill>
+            <a:schemeClr val="bg1"/>
+          </a:solidFill>
+        </p:spPr>
+        <p:style>
+          <a:lnRef idx="2">
+            <a:schemeClr val="accent1">
+              <a:shade val="15000"/>
+            </a:schemeClr>
+          </a:lnRef>
+          <a:fillRef idx="1">
+            <a:schemeClr val="accent1"/>
+          </a:fillRef>
+          <a:effectRef idx="0">
+            <a:schemeClr val="accent1"/>
+          </a:effectRef>
+          <a:fontRef idx="minor">
+            <a:schemeClr val="lt1"/>
+          </a:fontRef>
+        </p:style>
+        <p:txBody>
+          <a:bodyPr rtlCol="0" anchor="ctr"/>
+          <a:lstStyle/>
+          <a:p>
+            <a:pPr algn="ctr"/>
+            <a:r>
+              <a:rPr lang="en-US" dirty="0"/>
+              <a:t>PC</a:t>
+            </a:r>
+          </a:p>
+        </p:txBody>
+      </p:sp>
+      <p:sp>
+        <p:nvSpPr>
+          <p:cNvPr id="107" name="TextBox 106">
+            <a:extLst>
+              <a:ext uri="{FF2B5EF4-FFF2-40B4-BE49-F238E27FC236}">
+                <a16:creationId xmlns:a16="http://schemas.microsoft.com/office/drawing/2014/main" id="{B1546BBC-B812-DED8-4B26-9FABE47BC3AA}"/>
+              </a:ext>
+            </a:extLst>
+          </p:cNvPr>
+          <p:cNvSpPr txBox="1"/>
+          <p:nvPr/>
+        </p:nvSpPr>
+        <p:spPr>
+          <a:xfrm>
+            <a:off x="4171777" y="5125610"/>
+            <a:ext cx="574196" cy="384721"/>
+          </a:xfrm>
+          <a:prstGeom prst="rect">
+            <a:avLst/>
+          </a:prstGeom>
+          <a:noFill/>
+        </p:spPr>
+        <p:txBody>
+          <a:bodyPr wrap="none" rtlCol="0">
+            <a:spAutoFit/>
+          </a:bodyPr>
+          <a:lstStyle/>
+          <a:p>
+            <a:pPr algn="ctr"/>
+            <a:r>
+              <a:rPr lang="en-US" sz="1000" dirty="0"/>
+              <a:t>Stall</a:t>
+            </a:r>
+          </a:p>
+          <a:p>
+            <a:pPr algn="ctr"/>
+            <a:r>
+              <a:rPr lang="en-US" sz="900" dirty="0"/>
+              <a:t>counter</a:t>
+            </a:r>
+          </a:p>
+        </p:txBody>
+      </p:sp>
+      <p:cxnSp>
+        <p:nvCxnSpPr>
+          <p:cNvPr id="108" name="Straight Arrow Connector 107">
+            <a:extLst>
+              <a:ext uri="{FF2B5EF4-FFF2-40B4-BE49-F238E27FC236}">
+                <a16:creationId xmlns:a16="http://schemas.microsoft.com/office/drawing/2014/main" id="{55D04E53-F0F2-CC32-832F-AD990A0BD8D2}"/>
+              </a:ext>
+            </a:extLst>
+          </p:cNvPr>
+          <p:cNvCxnSpPr>
+            <a:cxnSpLocks/>
+          </p:cNvCxnSpPr>
+          <p:nvPr/>
+        </p:nvCxnSpPr>
+        <p:spPr>
+          <a:xfrm>
+            <a:off x="3882996" y="5224369"/>
+            <a:ext cx="229874" cy="0"/>
+          </a:xfrm>
+          <a:prstGeom prst="straightConnector1">
+            <a:avLst/>
+          </a:prstGeom>
+          <a:ln>
+            <a:solidFill>
+              <a:srgbClr val="FF0000"/>
+            </a:solidFill>
+            <a:tailEnd type="triangle"/>
+          </a:ln>
+        </p:spPr>
+        <p:style>
+          <a:lnRef idx="2">
+            <a:schemeClr val="accent1"/>
+          </a:lnRef>
+          <a:fillRef idx="0">
+            <a:schemeClr val="accent1"/>
+          </a:fillRef>
+          <a:effectRef idx="1">
+            <a:schemeClr val="accent1"/>
+          </a:effectRef>
+          <a:fontRef idx="minor">
+            <a:schemeClr val="tx1"/>
+          </a:fontRef>
+        </p:style>
+      </p:cxnSp>
+      <p:sp>
+        <p:nvSpPr>
+          <p:cNvPr id="109" name="Rectangle 108">
+            <a:extLst>
+              <a:ext uri="{FF2B5EF4-FFF2-40B4-BE49-F238E27FC236}">
+                <a16:creationId xmlns:a16="http://schemas.microsoft.com/office/drawing/2014/main" id="{A81CABDD-6671-8136-C507-5421CBF47C22}"/>
+              </a:ext>
+            </a:extLst>
+          </p:cNvPr>
+          <p:cNvSpPr/>
+          <p:nvPr/>
+        </p:nvSpPr>
+        <p:spPr>
+          <a:xfrm>
+            <a:off x="3204207" y="5087370"/>
+            <a:ext cx="678789" cy="484706"/>
+          </a:xfrm>
+          <a:prstGeom prst="rect">
+            <a:avLst/>
+          </a:prstGeom>
+          <a:solidFill>
+            <a:schemeClr val="bg1"/>
+          </a:solidFill>
+        </p:spPr>
+        <p:style>
+          <a:lnRef idx="2">
+            <a:schemeClr val="accent1">
+              <a:shade val="15000"/>
+            </a:schemeClr>
+          </a:lnRef>
+          <a:fillRef idx="1">
+            <a:schemeClr val="accent1"/>
+          </a:fillRef>
+          <a:effectRef idx="0">
+            <a:schemeClr val="accent1"/>
+          </a:effectRef>
+          <a:fontRef idx="minor">
+            <a:schemeClr val="lt1"/>
+          </a:fontRef>
+        </p:style>
+        <p:txBody>
+          <a:bodyPr rtlCol="0" anchor="ctr"/>
+          <a:lstStyle/>
+          <a:p>
+            <a:pPr algn="ctr"/>
+            <a:r>
+              <a:rPr lang="en-US" dirty="0"/>
+              <a:t>PC</a:t>
+            </a:r>
+          </a:p>
+        </p:txBody>
+      </p:sp>
+      <p:sp>
+        <p:nvSpPr>
+          <p:cNvPr id="110" name="TextBox 109">
+            <a:extLst>
+              <a:ext uri="{FF2B5EF4-FFF2-40B4-BE49-F238E27FC236}">
+                <a16:creationId xmlns:a16="http://schemas.microsoft.com/office/drawing/2014/main" id="{F182B11B-81F0-C7FD-76B3-7C27A04FAE43}"/>
+              </a:ext>
+            </a:extLst>
+          </p:cNvPr>
+          <p:cNvSpPr txBox="1"/>
+          <p:nvPr/>
+        </p:nvSpPr>
+        <p:spPr>
+          <a:xfrm>
+            <a:off x="3169553" y="5107257"/>
+            <a:ext cx="729687" cy="400110"/>
+          </a:xfrm>
+          <a:prstGeom prst="rect">
+            <a:avLst/>
+          </a:prstGeom>
+          <a:noFill/>
+        </p:spPr>
+        <p:txBody>
+          <a:bodyPr wrap="none" rtlCol="0">
+            <a:spAutoFit/>
+          </a:bodyPr>
+          <a:lstStyle/>
+          <a:p>
+            <a:pPr algn="ctr"/>
+            <a:r>
+              <a:rPr lang="en-US" sz="1000" dirty="0"/>
+              <a:t>Hazard</a:t>
+            </a:r>
+          </a:p>
+          <a:p>
+            <a:pPr algn="ctr"/>
+            <a:r>
+              <a:rPr lang="en-US" sz="1000" dirty="0"/>
+              <a:t>Detection</a:t>
+            </a:r>
+          </a:p>
+        </p:txBody>
+      </p:sp>
+      <p:cxnSp>
+        <p:nvCxnSpPr>
+          <p:cNvPr id="118" name="Straight Arrow Connector 117">
+            <a:extLst>
+              <a:ext uri="{FF2B5EF4-FFF2-40B4-BE49-F238E27FC236}">
+                <a16:creationId xmlns:a16="http://schemas.microsoft.com/office/drawing/2014/main" id="{3FFE2C33-996E-7ADF-F9EF-9E2CF7B04F43}"/>
+              </a:ext>
+            </a:extLst>
+          </p:cNvPr>
+          <p:cNvCxnSpPr>
+            <a:cxnSpLocks/>
+          </p:cNvCxnSpPr>
+          <p:nvPr/>
+        </p:nvCxnSpPr>
+        <p:spPr>
+          <a:xfrm>
+            <a:off x="2743887" y="5277871"/>
+            <a:ext cx="442253" cy="0"/>
+          </a:xfrm>
+          <a:prstGeom prst="straightConnector1">
+            <a:avLst/>
+          </a:prstGeom>
+          <a:ln>
             <a:tailEnd type="triangle"/>
           </a:ln>
         </p:spPr>
@@ -10609,10 +9645,10 @@
       </p:cxnSp>
       <p:cxnSp>
         <p:nvCxnSpPr>
-          <p:cNvPr id="77" name="Straight Connector 76">
-            <a:extLst>
-              <a:ext uri="{FF2B5EF4-FFF2-40B4-BE49-F238E27FC236}">
-                <a16:creationId xmlns:a16="http://schemas.microsoft.com/office/drawing/2014/main" id="{318283A9-1322-8DD9-D5D3-E250A298DF07}"/>
+          <p:cNvPr id="119" name="Straight Arrow Connector 118">
+            <a:extLst>
+              <a:ext uri="{FF2B5EF4-FFF2-40B4-BE49-F238E27FC236}">
+                <a16:creationId xmlns:a16="http://schemas.microsoft.com/office/drawing/2014/main" id="{E7E3730A-42E6-0433-39FD-2ACC0255676D}"/>
               </a:ext>
             </a:extLst>
           </p:cNvPr>
@@ -10622,13 +9658,19 @@
           <p:nvPr/>
         </p:nvCxnSpPr>
         <p:spPr>
-          <a:xfrm>
-            <a:off x="2763237" y="4519030"/>
-            <a:ext cx="0" cy="761538"/>
-          </a:xfrm>
-          <a:prstGeom prst="line">
-            <a:avLst/>
-          </a:prstGeom>
+          <a:xfrm flipH="1">
+            <a:off x="3888841" y="5478179"/>
+            <a:ext cx="205614" cy="0"/>
+          </a:xfrm>
+          <a:prstGeom prst="straightConnector1">
+            <a:avLst/>
+          </a:prstGeom>
+          <a:ln>
+            <a:solidFill>
+              <a:srgbClr val="FF0000"/>
+            </a:solidFill>
+            <a:tailEnd type="triangle"/>
+          </a:ln>
         </p:spPr>
         <p:style>
           <a:lnRef idx="2">
@@ -10647,10 +9689,10 @@
       </p:cxnSp>
       <p:cxnSp>
         <p:nvCxnSpPr>
-          <p:cNvPr id="79" name="Straight Arrow Connector 78">
-            <a:extLst>
-              <a:ext uri="{FF2B5EF4-FFF2-40B4-BE49-F238E27FC236}">
-                <a16:creationId xmlns:a16="http://schemas.microsoft.com/office/drawing/2014/main" id="{A9A8F4E2-BF11-CC7D-3DDC-10009DD0232B}"/>
+          <p:cNvPr id="120" name="Straight Connector 119">
+            <a:extLst>
+              <a:ext uri="{FF2B5EF4-FFF2-40B4-BE49-F238E27FC236}">
+                <a16:creationId xmlns:a16="http://schemas.microsoft.com/office/drawing/2014/main" id="{1883FA79-CBE1-81F9-475F-742DC442633A}"/>
               </a:ext>
             </a:extLst>
           </p:cNvPr>
@@ -10661,15 +9703,12 @@
         </p:nvCxnSpPr>
         <p:spPr>
           <a:xfrm>
-            <a:off x="2981569" y="5160759"/>
-            <a:ext cx="211703" cy="0"/>
-          </a:xfrm>
-          <a:prstGeom prst="straightConnector1">
-            <a:avLst/>
-          </a:prstGeom>
-          <a:ln>
-            <a:tailEnd type="triangle"/>
-          </a:ln>
+            <a:off x="2763237" y="4519030"/>
+            <a:ext cx="0" cy="761538"/>
+          </a:xfrm>
+          <a:prstGeom prst="line">
+            <a:avLst/>
+          </a:prstGeom>
         </p:spPr>
         <p:style>
           <a:lnRef idx="2">
@@ -10688,24 +9727,29 @@
       </p:cxnSp>
       <p:cxnSp>
         <p:nvCxnSpPr>
-          <p:cNvPr id="84" name="Straight Connector 83">
-            <a:extLst>
-              <a:ext uri="{FF2B5EF4-FFF2-40B4-BE49-F238E27FC236}">
-                <a16:creationId xmlns:a16="http://schemas.microsoft.com/office/drawing/2014/main" id="{1A52A5D1-1BB7-3403-A1A5-86E132AA172B}"/>
-              </a:ext>
-            </a:extLst>
-          </p:cNvPr>
-          <p:cNvCxnSpPr/>
+          <p:cNvPr id="121" name="Straight Arrow Connector 120">
+            <a:extLst>
+              <a:ext uri="{FF2B5EF4-FFF2-40B4-BE49-F238E27FC236}">
+                <a16:creationId xmlns:a16="http://schemas.microsoft.com/office/drawing/2014/main" id="{D53ADBF7-10DC-5789-46E9-813992762F1C}"/>
+              </a:ext>
+            </a:extLst>
+          </p:cNvPr>
+          <p:cNvCxnSpPr>
+            <a:cxnSpLocks/>
+          </p:cNvCxnSpPr>
           <p:nvPr/>
         </p:nvCxnSpPr>
         <p:spPr>
-          <a:xfrm flipH="1" flipV="1">
-            <a:off x="2602523" y="4499564"/>
-            <a:ext cx="164123" cy="7703"/>
-          </a:xfrm>
-          <a:prstGeom prst="line">
-            <a:avLst/>
-          </a:prstGeom>
+          <a:xfrm>
+            <a:off x="2981569" y="5160759"/>
+            <a:ext cx="211703" cy="0"/>
+          </a:xfrm>
+          <a:prstGeom prst="straightConnector1">
+            <a:avLst/>
+          </a:prstGeom>
+          <a:ln>
+            <a:tailEnd type="triangle"/>
+          </a:ln>
         </p:spPr>
         <p:style>
           <a:lnRef idx="2">
@@ -10724,10 +9768,10 @@
       </p:cxnSp>
       <p:cxnSp>
         <p:nvCxnSpPr>
-          <p:cNvPr id="88" name="Straight Connector 87">
-            <a:extLst>
-              <a:ext uri="{FF2B5EF4-FFF2-40B4-BE49-F238E27FC236}">
-                <a16:creationId xmlns:a16="http://schemas.microsoft.com/office/drawing/2014/main" id="{5F7582C7-10E1-623E-4E17-302DFD08C2CB}"/>
+          <p:cNvPr id="122" name="Straight Connector 121">
+            <a:extLst>
+              <a:ext uri="{FF2B5EF4-FFF2-40B4-BE49-F238E27FC236}">
+                <a16:creationId xmlns:a16="http://schemas.microsoft.com/office/drawing/2014/main" id="{47FF72DD-5839-7297-77B0-F5EC466118C5}"/>
               </a:ext>
             </a:extLst>
           </p:cNvPr>
@@ -10735,9 +9779,9 @@
           <p:nvPr/>
         </p:nvCxnSpPr>
         <p:spPr>
-          <a:xfrm>
-            <a:off x="2989385" y="4912022"/>
-            <a:ext cx="0" cy="253947"/>
+          <a:xfrm flipH="1" flipV="1">
+            <a:off x="2602523" y="4499564"/>
+            <a:ext cx="164123" cy="7703"/>
           </a:xfrm>
           <a:prstGeom prst="line">
             <a:avLst/>
@@ -10760,10 +9804,10 @@
       </p:cxnSp>
       <p:cxnSp>
         <p:nvCxnSpPr>
-          <p:cNvPr id="107" name="Straight Connector 106">
-            <a:extLst>
-              <a:ext uri="{FF2B5EF4-FFF2-40B4-BE49-F238E27FC236}">
-                <a16:creationId xmlns:a16="http://schemas.microsoft.com/office/drawing/2014/main" id="{E6A87E40-A761-8DD0-48F4-7E93FADB35F9}"/>
+          <p:cNvPr id="123" name="Straight Connector 122">
+            <a:extLst>
+              <a:ext uri="{FF2B5EF4-FFF2-40B4-BE49-F238E27FC236}">
+                <a16:creationId xmlns:a16="http://schemas.microsoft.com/office/drawing/2014/main" id="{61CB085F-EFA5-81F0-171A-B0F01423DFC7}"/>
               </a:ext>
             </a:extLst>
           </p:cNvPr>
@@ -10772,8 +9816,8 @@
         </p:nvCxnSpPr>
         <p:spPr>
           <a:xfrm>
-            <a:off x="2985477" y="4912022"/>
-            <a:ext cx="2313354" cy="0"/>
+            <a:off x="2989385" y="4912022"/>
+            <a:ext cx="0" cy="253947"/>
           </a:xfrm>
           <a:prstGeom prst="line">
             <a:avLst/>
@@ -10796,107 +9840,24 @@
       </p:cxnSp>
       <p:cxnSp>
         <p:nvCxnSpPr>
-          <p:cNvPr id="36" name="Straight Arrow Connector 35">
-            <a:extLst>
-              <a:ext uri="{FF2B5EF4-FFF2-40B4-BE49-F238E27FC236}">
-                <a16:creationId xmlns:a16="http://schemas.microsoft.com/office/drawing/2014/main" id="{1EE0AD67-CB2F-1EA8-73F4-A610CE181BCB}"/>
-              </a:ext>
-            </a:extLst>
-          </p:cNvPr>
-          <p:cNvCxnSpPr>
-            <a:cxnSpLocks/>
-          </p:cNvCxnSpPr>
+          <p:cNvPr id="124" name="Straight Connector 123">
+            <a:extLst>
+              <a:ext uri="{FF2B5EF4-FFF2-40B4-BE49-F238E27FC236}">
+                <a16:creationId xmlns:a16="http://schemas.microsoft.com/office/drawing/2014/main" id="{A7AA200C-FCA9-EE26-397A-A699E5A6646F}"/>
+              </a:ext>
+            </a:extLst>
+          </p:cNvPr>
+          <p:cNvCxnSpPr/>
           <p:nvPr/>
         </p:nvCxnSpPr>
         <p:spPr>
-          <a:xfrm flipV="1">
-            <a:off x="9207427" y="4345621"/>
-            <a:ext cx="100338" cy="2498"/>
-          </a:xfrm>
-          <a:prstGeom prst="straightConnector1">
-            <a:avLst/>
-          </a:prstGeom>
-          <a:ln>
-            <a:tailEnd type="triangle"/>
-          </a:ln>
-        </p:spPr>
-        <p:style>
-          <a:lnRef idx="2">
-            <a:schemeClr val="accent1"/>
-          </a:lnRef>
-          <a:fillRef idx="0">
-            <a:schemeClr val="accent1"/>
-          </a:fillRef>
-          <a:effectRef idx="1">
-            <a:schemeClr val="accent1"/>
-          </a:effectRef>
-          <a:fontRef idx="minor">
-            <a:schemeClr val="tx1"/>
-          </a:fontRef>
-        </p:style>
-      </p:cxnSp>
-      <p:sp>
-        <p:nvSpPr>
-          <p:cNvPr id="37" name="TextBox 36">
-            <a:extLst>
-              <a:ext uri="{FF2B5EF4-FFF2-40B4-BE49-F238E27FC236}">
-                <a16:creationId xmlns:a16="http://schemas.microsoft.com/office/drawing/2014/main" id="{FEBD6354-C348-CAC9-89DB-E3F28A4B9C7A}"/>
-              </a:ext>
-            </a:extLst>
-          </p:cNvPr>
-          <p:cNvSpPr txBox="1"/>
-          <p:nvPr/>
-        </p:nvSpPr>
-        <p:spPr>
-          <a:xfrm>
-            <a:off x="8914188" y="4227286"/>
-            <a:ext cx="356188" cy="230832"/>
-          </a:xfrm>
-          <a:prstGeom prst="rect">
-            <a:avLst/>
-          </a:prstGeom>
-          <a:noFill/>
-        </p:spPr>
-        <p:txBody>
-          <a:bodyPr wrap="none" rtlCol="0">
-            <a:spAutoFit/>
-          </a:bodyPr>
-          <a:lstStyle/>
-          <a:p>
-            <a:pPr algn="ctr"/>
-            <a:r>
-              <a:rPr lang="en-US" sz="900" dirty="0"/>
-              <a:t> PC</a:t>
-            </a:r>
-          </a:p>
-        </p:txBody>
-      </p:sp>
-      <p:cxnSp>
-        <p:nvCxnSpPr>
-          <p:cNvPr id="47" name="Straight Arrow Connector 46">
-            <a:extLst>
-              <a:ext uri="{FF2B5EF4-FFF2-40B4-BE49-F238E27FC236}">
-                <a16:creationId xmlns:a16="http://schemas.microsoft.com/office/drawing/2014/main" id="{4C88B74C-2825-380E-71DB-7071BFAD6C6D}"/>
-              </a:ext>
-            </a:extLst>
-          </p:cNvPr>
-          <p:cNvCxnSpPr/>
-          <p:nvPr/>
-        </p:nvCxnSpPr>
-        <p:spPr>
-          <a:xfrm flipV="1">
-            <a:off x="3977662" y="4996009"/>
-            <a:ext cx="0" cy="225402"/>
-          </a:xfrm>
-          <a:prstGeom prst="straightConnector1">
-            <a:avLst/>
-          </a:prstGeom>
-          <a:ln>
-            <a:solidFill>
-              <a:srgbClr val="FF0000"/>
-            </a:solidFill>
-            <a:tailEnd type="triangle"/>
-          </a:ln>
+          <a:xfrm>
+            <a:off x="2985477" y="4912022"/>
+            <a:ext cx="2313354" cy="0"/>
+          </a:xfrm>
+          <a:prstGeom prst="line">
+            <a:avLst/>
+          </a:prstGeom>
         </p:spPr>
         <p:style>
           <a:lnRef idx="2">
@@ -10915,10 +9876,10 @@
       </p:cxnSp>
       <p:cxnSp>
         <p:nvCxnSpPr>
-          <p:cNvPr id="53" name="Straight Arrow Connector 52">
-            <a:extLst>
-              <a:ext uri="{FF2B5EF4-FFF2-40B4-BE49-F238E27FC236}">
-                <a16:creationId xmlns:a16="http://schemas.microsoft.com/office/drawing/2014/main" id="{FBA8FA93-D7D6-E677-D331-61BDAA4D72AD}"/>
+          <p:cNvPr id="125" name="Straight Arrow Connector 124">
+            <a:extLst>
+              <a:ext uri="{FF2B5EF4-FFF2-40B4-BE49-F238E27FC236}">
+                <a16:creationId xmlns:a16="http://schemas.microsoft.com/office/drawing/2014/main" id="{EC42D385-1455-5F7D-5DE9-63C32D5B7E54}"/>
               </a:ext>
             </a:extLst>
           </p:cNvPr>
@@ -10926,9 +9887,9 @@
           <p:nvPr/>
         </p:nvCxnSpPr>
         <p:spPr>
-          <a:xfrm>
-            <a:off x="4019628" y="5487290"/>
-            <a:ext cx="0" cy="200651"/>
+          <a:xfrm flipV="1">
+            <a:off x="3977662" y="4996009"/>
+            <a:ext cx="0" cy="225402"/>
           </a:xfrm>
           <a:prstGeom prst="straightConnector1">
             <a:avLst/>
@@ -10939,6 +9900,1467 @@
             </a:solidFill>
             <a:tailEnd type="triangle"/>
           </a:ln>
+        </p:spPr>
+        <p:style>
+          <a:lnRef idx="2">
+            <a:schemeClr val="accent1"/>
+          </a:lnRef>
+          <a:fillRef idx="0">
+            <a:schemeClr val="accent1"/>
+          </a:fillRef>
+          <a:effectRef idx="1">
+            <a:schemeClr val="accent1"/>
+          </a:effectRef>
+          <a:fontRef idx="minor">
+            <a:schemeClr val="tx1"/>
+          </a:fontRef>
+        </p:style>
+      </p:cxnSp>
+      <p:cxnSp>
+        <p:nvCxnSpPr>
+          <p:cNvPr id="128" name="Straight Arrow Connector 127">
+            <a:extLst>
+              <a:ext uri="{FF2B5EF4-FFF2-40B4-BE49-F238E27FC236}">
+                <a16:creationId xmlns:a16="http://schemas.microsoft.com/office/drawing/2014/main" id="{2FF7584B-44F4-AC4F-1A2B-A5EEAC3183AF}"/>
+              </a:ext>
+            </a:extLst>
+          </p:cNvPr>
+          <p:cNvCxnSpPr/>
+          <p:nvPr/>
+        </p:nvCxnSpPr>
+        <p:spPr>
+          <a:xfrm>
+            <a:off x="4019628" y="5487290"/>
+            <a:ext cx="0" cy="200651"/>
+          </a:xfrm>
+          <a:prstGeom prst="straightConnector1">
+            <a:avLst/>
+          </a:prstGeom>
+          <a:ln>
+            <a:solidFill>
+              <a:srgbClr val="FF0000"/>
+            </a:solidFill>
+            <a:tailEnd type="triangle"/>
+          </a:ln>
+        </p:spPr>
+        <p:style>
+          <a:lnRef idx="2">
+            <a:schemeClr val="accent1"/>
+          </a:lnRef>
+          <a:fillRef idx="0">
+            <a:schemeClr val="accent1"/>
+          </a:fillRef>
+          <a:effectRef idx="1">
+            <a:schemeClr val="accent1"/>
+          </a:effectRef>
+          <a:fontRef idx="minor">
+            <a:schemeClr val="tx1"/>
+          </a:fontRef>
+        </p:style>
+      </p:cxnSp>
+      <p:grpSp>
+        <p:nvGrpSpPr>
+          <p:cNvPr id="131" name="Group 130">
+            <a:extLst>
+              <a:ext uri="{FF2B5EF4-FFF2-40B4-BE49-F238E27FC236}">
+                <a16:creationId xmlns:a16="http://schemas.microsoft.com/office/drawing/2014/main" id="{7985B0F1-5D5A-96E1-0D14-965720B89EB9}"/>
+              </a:ext>
+            </a:extLst>
+          </p:cNvPr>
+          <p:cNvGrpSpPr/>
+          <p:nvPr/>
+        </p:nvGrpSpPr>
+        <p:grpSpPr>
+          <a:xfrm>
+            <a:off x="9307301" y="4163398"/>
+            <a:ext cx="234557" cy="870633"/>
+            <a:chOff x="6175096" y="3854324"/>
+            <a:chExt cx="144932" cy="375881"/>
+          </a:xfrm>
+        </p:grpSpPr>
+        <p:cxnSp>
+          <p:nvCxnSpPr>
+            <p:cNvPr id="132" name="Straight Connector 131">
+              <a:extLst>
+                <a:ext uri="{FF2B5EF4-FFF2-40B4-BE49-F238E27FC236}">
+                  <a16:creationId xmlns:a16="http://schemas.microsoft.com/office/drawing/2014/main" id="{015F5EDE-17BE-0E3E-4DDD-864B147D406F}"/>
+                </a:ext>
+              </a:extLst>
+            </p:cNvPr>
+            <p:cNvCxnSpPr>
+              <a:cxnSpLocks/>
+            </p:cNvCxnSpPr>
+            <p:nvPr/>
+          </p:nvCxnSpPr>
+          <p:spPr>
+            <a:xfrm>
+              <a:off x="6180266" y="3861114"/>
+              <a:ext cx="0" cy="369091"/>
+            </a:xfrm>
+            <a:prstGeom prst="line">
+              <a:avLst/>
+            </a:prstGeom>
+          </p:spPr>
+          <p:style>
+            <a:lnRef idx="2">
+              <a:schemeClr val="accent1"/>
+            </a:lnRef>
+            <a:fillRef idx="0">
+              <a:schemeClr val="accent1"/>
+            </a:fillRef>
+            <a:effectRef idx="1">
+              <a:schemeClr val="accent1"/>
+            </a:effectRef>
+            <a:fontRef idx="minor">
+              <a:schemeClr val="tx1"/>
+            </a:fontRef>
+          </p:style>
+        </p:cxnSp>
+        <p:cxnSp>
+          <p:nvCxnSpPr>
+            <p:cNvPr id="133" name="Straight Connector 132">
+              <a:extLst>
+                <a:ext uri="{FF2B5EF4-FFF2-40B4-BE49-F238E27FC236}">
+                  <a16:creationId xmlns:a16="http://schemas.microsoft.com/office/drawing/2014/main" id="{AC388BCB-D579-EC08-5CBF-2CC85FB74523}"/>
+                </a:ext>
+              </a:extLst>
+            </p:cNvPr>
+            <p:cNvCxnSpPr>
+              <a:cxnSpLocks/>
+            </p:cNvCxnSpPr>
+            <p:nvPr/>
+          </p:nvCxnSpPr>
+          <p:spPr>
+            <a:xfrm>
+              <a:off x="6320028" y="3936909"/>
+              <a:ext cx="0" cy="212558"/>
+            </a:xfrm>
+            <a:prstGeom prst="line">
+              <a:avLst/>
+            </a:prstGeom>
+          </p:spPr>
+          <p:style>
+            <a:lnRef idx="2">
+              <a:schemeClr val="accent1"/>
+            </a:lnRef>
+            <a:fillRef idx="0">
+              <a:schemeClr val="accent1"/>
+            </a:fillRef>
+            <a:effectRef idx="1">
+              <a:schemeClr val="accent1"/>
+            </a:effectRef>
+            <a:fontRef idx="minor">
+              <a:schemeClr val="tx1"/>
+            </a:fontRef>
+          </p:style>
+        </p:cxnSp>
+        <p:cxnSp>
+          <p:nvCxnSpPr>
+            <p:cNvPr id="134" name="Straight Connector 133">
+              <a:extLst>
+                <a:ext uri="{FF2B5EF4-FFF2-40B4-BE49-F238E27FC236}">
+                  <a16:creationId xmlns:a16="http://schemas.microsoft.com/office/drawing/2014/main" id="{0E401010-BF44-D516-E855-B8E547F967F7}"/>
+                </a:ext>
+              </a:extLst>
+            </p:cNvPr>
+            <p:cNvCxnSpPr>
+              <a:cxnSpLocks/>
+            </p:cNvCxnSpPr>
+            <p:nvPr/>
+          </p:nvCxnSpPr>
+          <p:spPr>
+            <a:xfrm flipH="1">
+              <a:off x="6175096" y="4152620"/>
+              <a:ext cx="144932" cy="77585"/>
+            </a:xfrm>
+            <a:prstGeom prst="line">
+              <a:avLst/>
+            </a:prstGeom>
+          </p:spPr>
+          <p:style>
+            <a:lnRef idx="2">
+              <a:schemeClr val="accent1"/>
+            </a:lnRef>
+            <a:fillRef idx="0">
+              <a:schemeClr val="accent1"/>
+            </a:fillRef>
+            <a:effectRef idx="1">
+              <a:schemeClr val="accent1"/>
+            </a:effectRef>
+            <a:fontRef idx="minor">
+              <a:schemeClr val="tx1"/>
+            </a:fontRef>
+          </p:style>
+        </p:cxnSp>
+        <p:cxnSp>
+          <p:nvCxnSpPr>
+            <p:cNvPr id="135" name="Straight Connector 134">
+              <a:extLst>
+                <a:ext uri="{FF2B5EF4-FFF2-40B4-BE49-F238E27FC236}">
+                  <a16:creationId xmlns:a16="http://schemas.microsoft.com/office/drawing/2014/main" id="{F7768323-F4FD-A2FE-5BEF-EF5EE077975D}"/>
+                </a:ext>
+              </a:extLst>
+            </p:cNvPr>
+            <p:cNvCxnSpPr>
+              <a:cxnSpLocks/>
+            </p:cNvCxnSpPr>
+            <p:nvPr/>
+          </p:nvCxnSpPr>
+          <p:spPr>
+            <a:xfrm flipH="1" flipV="1">
+              <a:off x="6175096" y="3854324"/>
+              <a:ext cx="144932" cy="85738"/>
+            </a:xfrm>
+            <a:prstGeom prst="line">
+              <a:avLst/>
+            </a:prstGeom>
+          </p:spPr>
+          <p:style>
+            <a:lnRef idx="2">
+              <a:schemeClr val="accent1"/>
+            </a:lnRef>
+            <a:fillRef idx="0">
+              <a:schemeClr val="accent1"/>
+            </a:fillRef>
+            <a:effectRef idx="1">
+              <a:schemeClr val="accent1"/>
+            </a:effectRef>
+            <a:fontRef idx="minor">
+              <a:schemeClr val="tx1"/>
+            </a:fontRef>
+          </p:style>
+        </p:cxnSp>
+      </p:grpSp>
+      <p:cxnSp>
+        <p:nvCxnSpPr>
+          <p:cNvPr id="137" name="Straight Connector 136">
+            <a:extLst>
+              <a:ext uri="{FF2B5EF4-FFF2-40B4-BE49-F238E27FC236}">
+                <a16:creationId xmlns:a16="http://schemas.microsoft.com/office/drawing/2014/main" id="{3791C07A-D6C6-EEE2-DD1A-AAFBD13E03BD}"/>
+              </a:ext>
+            </a:extLst>
+          </p:cNvPr>
+          <p:cNvCxnSpPr>
+            <a:cxnSpLocks/>
+          </p:cNvCxnSpPr>
+          <p:nvPr/>
+        </p:nvCxnSpPr>
+        <p:spPr>
+          <a:xfrm>
+            <a:off x="9542834" y="4611234"/>
+            <a:ext cx="136187" cy="0"/>
+          </a:xfrm>
+          <a:prstGeom prst="line">
+            <a:avLst/>
+          </a:prstGeom>
+        </p:spPr>
+        <p:style>
+          <a:lnRef idx="2">
+            <a:schemeClr val="accent1"/>
+          </a:lnRef>
+          <a:fillRef idx="0">
+            <a:schemeClr val="accent1"/>
+          </a:fillRef>
+          <a:effectRef idx="1">
+            <a:schemeClr val="accent1"/>
+          </a:effectRef>
+          <a:fontRef idx="minor">
+            <a:schemeClr val="tx1"/>
+          </a:fontRef>
+        </p:style>
+      </p:cxnSp>
+      <p:cxnSp>
+        <p:nvCxnSpPr>
+          <p:cNvPr id="138" name="Straight Arrow Connector 137">
+            <a:extLst>
+              <a:ext uri="{FF2B5EF4-FFF2-40B4-BE49-F238E27FC236}">
+                <a16:creationId xmlns:a16="http://schemas.microsoft.com/office/drawing/2014/main" id="{34331E89-6C0B-1C5D-9642-5E0D0D9791DF}"/>
+              </a:ext>
+            </a:extLst>
+          </p:cNvPr>
+          <p:cNvCxnSpPr>
+            <a:cxnSpLocks/>
+          </p:cNvCxnSpPr>
+          <p:nvPr/>
+        </p:nvCxnSpPr>
+        <p:spPr>
+          <a:xfrm>
+            <a:off x="8930725" y="4560055"/>
+            <a:ext cx="374301" cy="0"/>
+          </a:xfrm>
+          <a:prstGeom prst="straightConnector1">
+            <a:avLst/>
+          </a:prstGeom>
+          <a:ln>
+            <a:tailEnd type="triangle"/>
+          </a:ln>
+        </p:spPr>
+        <p:style>
+          <a:lnRef idx="2">
+            <a:schemeClr val="accent1"/>
+          </a:lnRef>
+          <a:fillRef idx="0">
+            <a:schemeClr val="accent1"/>
+          </a:fillRef>
+          <a:effectRef idx="1">
+            <a:schemeClr val="accent1"/>
+          </a:effectRef>
+          <a:fontRef idx="minor">
+            <a:schemeClr val="tx1"/>
+          </a:fontRef>
+        </p:style>
+      </p:cxnSp>
+      <p:sp>
+        <p:nvSpPr>
+          <p:cNvPr id="140" name="TextBox 139">
+            <a:extLst>
+              <a:ext uri="{FF2B5EF4-FFF2-40B4-BE49-F238E27FC236}">
+                <a16:creationId xmlns:a16="http://schemas.microsoft.com/office/drawing/2014/main" id="{42D03EFD-C681-4EA9-84D6-2D58957476C9}"/>
+              </a:ext>
+            </a:extLst>
+          </p:cNvPr>
+          <p:cNvSpPr txBox="1"/>
+          <p:nvPr/>
+        </p:nvSpPr>
+        <p:spPr>
+          <a:xfrm>
+            <a:off x="7868407" y="4099798"/>
+            <a:ext cx="413896" cy="230832"/>
+          </a:xfrm>
+          <a:prstGeom prst="rect">
+            <a:avLst/>
+          </a:prstGeom>
+          <a:noFill/>
+        </p:spPr>
+        <p:txBody>
+          <a:bodyPr wrap="none" rtlCol="0">
+            <a:spAutoFit/>
+          </a:bodyPr>
+          <a:lstStyle/>
+          <a:p>
+            <a:pPr algn="ctr"/>
+            <a:r>
+              <a:rPr lang="en-US" sz="900" dirty="0"/>
+              <a:t>NPC</a:t>
+            </a:r>
+          </a:p>
+        </p:txBody>
+      </p:sp>
+      <p:sp>
+        <p:nvSpPr>
+          <p:cNvPr id="141" name="TextBox 140">
+            <a:extLst>
+              <a:ext uri="{FF2B5EF4-FFF2-40B4-BE49-F238E27FC236}">
+                <a16:creationId xmlns:a16="http://schemas.microsoft.com/office/drawing/2014/main" id="{130DB228-30F1-3EAB-8348-ADF6B84F5227}"/>
+              </a:ext>
+            </a:extLst>
+          </p:cNvPr>
+          <p:cNvSpPr txBox="1"/>
+          <p:nvPr/>
+        </p:nvSpPr>
+        <p:spPr>
+          <a:xfrm>
+            <a:off x="7871560" y="4515171"/>
+            <a:ext cx="407484" cy="230832"/>
+          </a:xfrm>
+          <a:prstGeom prst="rect">
+            <a:avLst/>
+          </a:prstGeom>
+          <a:noFill/>
+        </p:spPr>
+        <p:txBody>
+          <a:bodyPr wrap="none" rtlCol="0">
+            <a:spAutoFit/>
+          </a:bodyPr>
+          <a:lstStyle/>
+          <a:p>
+            <a:pPr algn="ctr"/>
+            <a:r>
+              <a:rPr lang="en-US" sz="900" dirty="0" err="1"/>
+              <a:t>imm</a:t>
+            </a:r>
+            <a:endParaRPr lang="en-US" sz="900" dirty="0"/>
+          </a:p>
+        </p:txBody>
+      </p:sp>
+      <p:cxnSp>
+        <p:nvCxnSpPr>
+          <p:cNvPr id="142" name="Straight Arrow Connector 141">
+            <a:extLst>
+              <a:ext uri="{FF2B5EF4-FFF2-40B4-BE49-F238E27FC236}">
+                <a16:creationId xmlns:a16="http://schemas.microsoft.com/office/drawing/2014/main" id="{8C8DC418-30F2-2E6B-79EB-C50A8BC90A03}"/>
+              </a:ext>
+            </a:extLst>
+          </p:cNvPr>
+          <p:cNvCxnSpPr>
+            <a:cxnSpLocks/>
+          </p:cNvCxnSpPr>
+          <p:nvPr/>
+        </p:nvCxnSpPr>
+        <p:spPr>
+          <a:xfrm flipV="1">
+            <a:off x="9214921" y="4718145"/>
+            <a:ext cx="100338" cy="2498"/>
+          </a:xfrm>
+          <a:prstGeom prst="straightConnector1">
+            <a:avLst/>
+          </a:prstGeom>
+          <a:ln>
+            <a:tailEnd type="triangle"/>
+          </a:ln>
+        </p:spPr>
+        <p:style>
+          <a:lnRef idx="2">
+            <a:schemeClr val="accent1"/>
+          </a:lnRef>
+          <a:fillRef idx="0">
+            <a:schemeClr val="accent1"/>
+          </a:fillRef>
+          <a:effectRef idx="1">
+            <a:schemeClr val="accent1"/>
+          </a:effectRef>
+          <a:fontRef idx="minor">
+            <a:schemeClr val="tx1"/>
+          </a:fontRef>
+        </p:style>
+      </p:cxnSp>
+      <p:sp>
+        <p:nvSpPr>
+          <p:cNvPr id="143" name="TextBox 142">
+            <a:extLst>
+              <a:ext uri="{FF2B5EF4-FFF2-40B4-BE49-F238E27FC236}">
+                <a16:creationId xmlns:a16="http://schemas.microsoft.com/office/drawing/2014/main" id="{28B52DA0-5124-B1DD-6399-E77E9F27E337}"/>
+              </a:ext>
+            </a:extLst>
+          </p:cNvPr>
+          <p:cNvSpPr txBox="1"/>
+          <p:nvPr/>
+        </p:nvSpPr>
+        <p:spPr>
+          <a:xfrm>
+            <a:off x="8892828" y="4599810"/>
+            <a:ext cx="413896" cy="230832"/>
+          </a:xfrm>
+          <a:prstGeom prst="rect">
+            <a:avLst/>
+          </a:prstGeom>
+          <a:noFill/>
+        </p:spPr>
+        <p:txBody>
+          <a:bodyPr wrap="none" rtlCol="0">
+            <a:spAutoFit/>
+          </a:bodyPr>
+          <a:lstStyle/>
+          <a:p>
+            <a:pPr algn="ctr"/>
+            <a:r>
+              <a:rPr lang="en-US" sz="900" dirty="0"/>
+              <a:t>NPC</a:t>
+            </a:r>
+          </a:p>
+        </p:txBody>
+      </p:sp>
+      <p:grpSp>
+        <p:nvGrpSpPr>
+          <p:cNvPr id="144" name="Group 143">
+            <a:extLst>
+              <a:ext uri="{FF2B5EF4-FFF2-40B4-BE49-F238E27FC236}">
+                <a16:creationId xmlns:a16="http://schemas.microsoft.com/office/drawing/2014/main" id="{668D9262-FD4F-8437-B65A-FF28CF8998C5}"/>
+              </a:ext>
+            </a:extLst>
+          </p:cNvPr>
+          <p:cNvGrpSpPr/>
+          <p:nvPr/>
+        </p:nvGrpSpPr>
+        <p:grpSpPr>
+          <a:xfrm>
+            <a:off x="8407592" y="4109253"/>
+            <a:ext cx="292770" cy="637674"/>
+            <a:chOff x="1074820" y="1507958"/>
+            <a:chExt cx="292770" cy="637674"/>
+          </a:xfrm>
+        </p:grpSpPr>
+        <p:cxnSp>
+          <p:nvCxnSpPr>
+            <p:cNvPr id="145" name="Straight Connector 144">
+              <a:extLst>
+                <a:ext uri="{FF2B5EF4-FFF2-40B4-BE49-F238E27FC236}">
+                  <a16:creationId xmlns:a16="http://schemas.microsoft.com/office/drawing/2014/main" id="{AEF94313-2CD9-F730-2951-3C043984003F}"/>
+                </a:ext>
+              </a:extLst>
+            </p:cNvPr>
+            <p:cNvCxnSpPr>
+              <a:cxnSpLocks/>
+            </p:cNvCxnSpPr>
+            <p:nvPr/>
+          </p:nvCxnSpPr>
+          <p:spPr>
+            <a:xfrm>
+              <a:off x="1074821" y="1507958"/>
+              <a:ext cx="0" cy="212558"/>
+            </a:xfrm>
+            <a:prstGeom prst="line">
+              <a:avLst/>
+            </a:prstGeom>
+          </p:spPr>
+          <p:style>
+            <a:lnRef idx="2">
+              <a:schemeClr val="accent1"/>
+            </a:lnRef>
+            <a:fillRef idx="0">
+              <a:schemeClr val="accent1"/>
+            </a:fillRef>
+            <a:effectRef idx="1">
+              <a:schemeClr val="accent1"/>
+            </a:effectRef>
+            <a:fontRef idx="minor">
+              <a:schemeClr val="tx1"/>
+            </a:fontRef>
+          </p:style>
+        </p:cxnSp>
+        <p:cxnSp>
+          <p:nvCxnSpPr>
+            <p:cNvPr id="146" name="Straight Connector 145">
+              <a:extLst>
+                <a:ext uri="{FF2B5EF4-FFF2-40B4-BE49-F238E27FC236}">
+                  <a16:creationId xmlns:a16="http://schemas.microsoft.com/office/drawing/2014/main" id="{0FE960F4-1D95-AE3E-FD52-BB27EEA05698}"/>
+                </a:ext>
+              </a:extLst>
+            </p:cNvPr>
+            <p:cNvCxnSpPr>
+              <a:cxnSpLocks/>
+            </p:cNvCxnSpPr>
+            <p:nvPr/>
+          </p:nvCxnSpPr>
+          <p:spPr>
+            <a:xfrm>
+              <a:off x="1367590" y="1720516"/>
+              <a:ext cx="0" cy="212558"/>
+            </a:xfrm>
+            <a:prstGeom prst="line">
+              <a:avLst/>
+            </a:prstGeom>
+          </p:spPr>
+          <p:style>
+            <a:lnRef idx="2">
+              <a:schemeClr val="accent1"/>
+            </a:lnRef>
+            <a:fillRef idx="0">
+              <a:schemeClr val="accent1"/>
+            </a:fillRef>
+            <a:effectRef idx="1">
+              <a:schemeClr val="accent1"/>
+            </a:effectRef>
+            <a:fontRef idx="minor">
+              <a:schemeClr val="tx1"/>
+            </a:fontRef>
+          </p:style>
+        </p:cxnSp>
+        <p:cxnSp>
+          <p:nvCxnSpPr>
+            <p:cNvPr id="147" name="Straight Connector 146">
+              <a:extLst>
+                <a:ext uri="{FF2B5EF4-FFF2-40B4-BE49-F238E27FC236}">
+                  <a16:creationId xmlns:a16="http://schemas.microsoft.com/office/drawing/2014/main" id="{2DD4560C-B14D-1712-6B66-8BA78DA65DB6}"/>
+                </a:ext>
+              </a:extLst>
+            </p:cNvPr>
+            <p:cNvCxnSpPr>
+              <a:cxnSpLocks/>
+            </p:cNvCxnSpPr>
+            <p:nvPr/>
+          </p:nvCxnSpPr>
+          <p:spPr>
+            <a:xfrm>
+              <a:off x="1074821" y="1933074"/>
+              <a:ext cx="0" cy="212558"/>
+            </a:xfrm>
+            <a:prstGeom prst="line">
+              <a:avLst/>
+            </a:prstGeom>
+          </p:spPr>
+          <p:style>
+            <a:lnRef idx="2">
+              <a:schemeClr val="accent1"/>
+            </a:lnRef>
+            <a:fillRef idx="0">
+              <a:schemeClr val="accent1"/>
+            </a:fillRef>
+            <a:effectRef idx="1">
+              <a:schemeClr val="accent1"/>
+            </a:effectRef>
+            <a:fontRef idx="minor">
+              <a:schemeClr val="tx1"/>
+            </a:fontRef>
+          </p:style>
+        </p:cxnSp>
+        <p:cxnSp>
+          <p:nvCxnSpPr>
+            <p:cNvPr id="148" name="Straight Connector 147">
+              <a:extLst>
+                <a:ext uri="{FF2B5EF4-FFF2-40B4-BE49-F238E27FC236}">
+                  <a16:creationId xmlns:a16="http://schemas.microsoft.com/office/drawing/2014/main" id="{76244964-CE6E-4181-63B0-7D164FD80CAD}"/>
+                </a:ext>
+              </a:extLst>
+            </p:cNvPr>
+            <p:cNvCxnSpPr>
+              <a:cxnSpLocks/>
+            </p:cNvCxnSpPr>
+            <p:nvPr/>
+          </p:nvCxnSpPr>
+          <p:spPr>
+            <a:xfrm flipH="1">
+              <a:off x="1074821" y="1936227"/>
+              <a:ext cx="292769" cy="209405"/>
+            </a:xfrm>
+            <a:prstGeom prst="line">
+              <a:avLst/>
+            </a:prstGeom>
+          </p:spPr>
+          <p:style>
+            <a:lnRef idx="2">
+              <a:schemeClr val="accent1"/>
+            </a:lnRef>
+            <a:fillRef idx="0">
+              <a:schemeClr val="accent1"/>
+            </a:fillRef>
+            <a:effectRef idx="1">
+              <a:schemeClr val="accent1"/>
+            </a:effectRef>
+            <a:fontRef idx="minor">
+              <a:schemeClr val="tx1"/>
+            </a:fontRef>
+          </p:style>
+        </p:cxnSp>
+        <p:cxnSp>
+          <p:nvCxnSpPr>
+            <p:cNvPr id="149" name="Straight Connector 148">
+              <a:extLst>
+                <a:ext uri="{FF2B5EF4-FFF2-40B4-BE49-F238E27FC236}">
+                  <a16:creationId xmlns:a16="http://schemas.microsoft.com/office/drawing/2014/main" id="{B92832FC-E56A-5B11-0E7E-1F6ADE6DE96F}"/>
+                </a:ext>
+              </a:extLst>
+            </p:cNvPr>
+            <p:cNvCxnSpPr>
+              <a:cxnSpLocks/>
+            </p:cNvCxnSpPr>
+            <p:nvPr/>
+          </p:nvCxnSpPr>
+          <p:spPr>
+            <a:xfrm flipH="1" flipV="1">
+              <a:off x="1074821" y="1507958"/>
+              <a:ext cx="292769" cy="215711"/>
+            </a:xfrm>
+            <a:prstGeom prst="line">
+              <a:avLst/>
+            </a:prstGeom>
+          </p:spPr>
+          <p:style>
+            <a:lnRef idx="2">
+              <a:schemeClr val="accent1"/>
+            </a:lnRef>
+            <a:fillRef idx="0">
+              <a:schemeClr val="accent1"/>
+            </a:fillRef>
+            <a:effectRef idx="1">
+              <a:schemeClr val="accent1"/>
+            </a:effectRef>
+            <a:fontRef idx="minor">
+              <a:schemeClr val="tx1"/>
+            </a:fontRef>
+          </p:style>
+        </p:cxnSp>
+        <p:cxnSp>
+          <p:nvCxnSpPr>
+            <p:cNvPr id="150" name="Straight Connector 149">
+              <a:extLst>
+                <a:ext uri="{FF2B5EF4-FFF2-40B4-BE49-F238E27FC236}">
+                  <a16:creationId xmlns:a16="http://schemas.microsoft.com/office/drawing/2014/main" id="{4C24C015-6A2B-58F9-2636-B99F0EF08544}"/>
+                </a:ext>
+              </a:extLst>
+            </p:cNvPr>
+            <p:cNvCxnSpPr>
+              <a:cxnSpLocks/>
+            </p:cNvCxnSpPr>
+            <p:nvPr/>
+          </p:nvCxnSpPr>
+          <p:spPr>
+            <a:xfrm flipV="1">
+              <a:off x="1074821" y="1829948"/>
+              <a:ext cx="140545" cy="103126"/>
+            </a:xfrm>
+            <a:prstGeom prst="line">
+              <a:avLst/>
+            </a:prstGeom>
+          </p:spPr>
+          <p:style>
+            <a:lnRef idx="2">
+              <a:schemeClr val="accent1"/>
+            </a:lnRef>
+            <a:fillRef idx="0">
+              <a:schemeClr val="accent1"/>
+            </a:fillRef>
+            <a:effectRef idx="1">
+              <a:schemeClr val="accent1"/>
+            </a:effectRef>
+            <a:fontRef idx="minor">
+              <a:schemeClr val="tx1"/>
+            </a:fontRef>
+          </p:style>
+        </p:cxnSp>
+        <p:cxnSp>
+          <p:nvCxnSpPr>
+            <p:cNvPr id="151" name="Straight Connector 150">
+              <a:extLst>
+                <a:ext uri="{FF2B5EF4-FFF2-40B4-BE49-F238E27FC236}">
+                  <a16:creationId xmlns:a16="http://schemas.microsoft.com/office/drawing/2014/main" id="{6613CFF8-5964-53FA-3F4B-1524F218D7F0}"/>
+                </a:ext>
+              </a:extLst>
+            </p:cNvPr>
+            <p:cNvCxnSpPr>
+              <a:cxnSpLocks/>
+            </p:cNvCxnSpPr>
+            <p:nvPr/>
+          </p:nvCxnSpPr>
+          <p:spPr>
+            <a:xfrm>
+              <a:off x="1074820" y="1716505"/>
+              <a:ext cx="140545" cy="107137"/>
+            </a:xfrm>
+            <a:prstGeom prst="line">
+              <a:avLst/>
+            </a:prstGeom>
+          </p:spPr>
+          <p:style>
+            <a:lnRef idx="2">
+              <a:schemeClr val="accent1"/>
+            </a:lnRef>
+            <a:fillRef idx="0">
+              <a:schemeClr val="accent1"/>
+            </a:fillRef>
+            <a:effectRef idx="1">
+              <a:schemeClr val="accent1"/>
+            </a:effectRef>
+            <a:fontRef idx="minor">
+              <a:schemeClr val="tx1"/>
+            </a:fontRef>
+          </p:style>
+        </p:cxnSp>
+      </p:grpSp>
+      <p:cxnSp>
+        <p:nvCxnSpPr>
+          <p:cNvPr id="152" name="Straight Arrow Connector 151">
+            <a:extLst>
+              <a:ext uri="{FF2B5EF4-FFF2-40B4-BE49-F238E27FC236}">
+                <a16:creationId xmlns:a16="http://schemas.microsoft.com/office/drawing/2014/main" id="{A6C1A2E8-6BD1-A1B8-EC64-95288FD839B1}"/>
+              </a:ext>
+            </a:extLst>
+          </p:cNvPr>
+          <p:cNvCxnSpPr>
+            <a:cxnSpLocks/>
+          </p:cNvCxnSpPr>
+          <p:nvPr/>
+        </p:nvCxnSpPr>
+        <p:spPr>
+          <a:xfrm>
+            <a:off x="8233657" y="4640648"/>
+            <a:ext cx="173935" cy="0"/>
+          </a:xfrm>
+          <a:prstGeom prst="straightConnector1">
+            <a:avLst/>
+          </a:prstGeom>
+          <a:ln>
+            <a:tailEnd type="triangle"/>
+          </a:ln>
+        </p:spPr>
+        <p:style>
+          <a:lnRef idx="2">
+            <a:schemeClr val="accent1"/>
+          </a:lnRef>
+          <a:fillRef idx="0">
+            <a:schemeClr val="accent1"/>
+          </a:fillRef>
+          <a:effectRef idx="1">
+            <a:schemeClr val="accent1"/>
+          </a:effectRef>
+          <a:fontRef idx="minor">
+            <a:schemeClr val="tx1"/>
+          </a:fontRef>
+        </p:style>
+      </p:cxnSp>
+      <p:cxnSp>
+        <p:nvCxnSpPr>
+          <p:cNvPr id="153" name="Straight Arrow Connector 152">
+            <a:extLst>
+              <a:ext uri="{FF2B5EF4-FFF2-40B4-BE49-F238E27FC236}">
+                <a16:creationId xmlns:a16="http://schemas.microsoft.com/office/drawing/2014/main" id="{17BA2245-CE26-F7B3-650C-1F9D9C02DE77}"/>
+              </a:ext>
+            </a:extLst>
+          </p:cNvPr>
+          <p:cNvCxnSpPr/>
+          <p:nvPr/>
+        </p:nvCxnSpPr>
+        <p:spPr>
+          <a:xfrm>
+            <a:off x="8229784" y="4215532"/>
+            <a:ext cx="177808" cy="0"/>
+          </a:xfrm>
+          <a:prstGeom prst="straightConnector1">
+            <a:avLst/>
+          </a:prstGeom>
+          <a:ln>
+            <a:tailEnd type="triangle"/>
+          </a:ln>
+        </p:spPr>
+        <p:style>
+          <a:lnRef idx="2">
+            <a:schemeClr val="accent1"/>
+          </a:lnRef>
+          <a:fillRef idx="0">
+            <a:schemeClr val="accent1"/>
+          </a:fillRef>
+          <a:effectRef idx="1">
+            <a:schemeClr val="accent1"/>
+          </a:effectRef>
+          <a:fontRef idx="minor">
+            <a:schemeClr val="tx1"/>
+          </a:fontRef>
+        </p:style>
+      </p:cxnSp>
+      <p:sp>
+        <p:nvSpPr>
+          <p:cNvPr id="154" name="TextBox 153">
+            <a:extLst>
+              <a:ext uri="{FF2B5EF4-FFF2-40B4-BE49-F238E27FC236}">
+                <a16:creationId xmlns:a16="http://schemas.microsoft.com/office/drawing/2014/main" id="{A1848007-5C57-2514-E0D9-E9FAA0E1581E}"/>
+              </a:ext>
+            </a:extLst>
+          </p:cNvPr>
+          <p:cNvSpPr txBox="1"/>
+          <p:nvPr/>
+        </p:nvSpPr>
+        <p:spPr>
+          <a:xfrm>
+            <a:off x="8442429" y="4314065"/>
+            <a:ext cx="351378" cy="230832"/>
+          </a:xfrm>
+          <a:prstGeom prst="rect">
+            <a:avLst/>
+          </a:prstGeom>
+          <a:noFill/>
+        </p:spPr>
+        <p:txBody>
+          <a:bodyPr wrap="none" rtlCol="0">
+            <a:spAutoFit/>
+          </a:bodyPr>
+          <a:lstStyle/>
+          <a:p>
+            <a:pPr algn="ctr"/>
+            <a:r>
+              <a:rPr lang="en-US" sz="900" dirty="0"/>
+              <a:t>“+”</a:t>
+            </a:r>
+          </a:p>
+        </p:txBody>
+      </p:sp>
+      <p:cxnSp>
+        <p:nvCxnSpPr>
+          <p:cNvPr id="155" name="Straight Arrow Connector 154">
+            <a:extLst>
+              <a:ext uri="{FF2B5EF4-FFF2-40B4-BE49-F238E27FC236}">
+                <a16:creationId xmlns:a16="http://schemas.microsoft.com/office/drawing/2014/main" id="{97DF8482-C9C8-E044-1756-D3B042D2D7ED}"/>
+              </a:ext>
+            </a:extLst>
+          </p:cNvPr>
+          <p:cNvCxnSpPr>
+            <a:cxnSpLocks/>
+          </p:cNvCxnSpPr>
+          <p:nvPr/>
+        </p:nvCxnSpPr>
+        <p:spPr>
+          <a:xfrm flipV="1">
+            <a:off x="9192573" y="4893615"/>
+            <a:ext cx="100338" cy="2498"/>
+          </a:xfrm>
+          <a:prstGeom prst="straightConnector1">
+            <a:avLst/>
+          </a:prstGeom>
+          <a:ln>
+            <a:tailEnd type="triangle"/>
+          </a:ln>
+        </p:spPr>
+        <p:style>
+          <a:lnRef idx="2">
+            <a:schemeClr val="accent1"/>
+          </a:lnRef>
+          <a:fillRef idx="0">
+            <a:schemeClr val="accent1"/>
+          </a:fillRef>
+          <a:effectRef idx="1">
+            <a:schemeClr val="accent1"/>
+          </a:effectRef>
+          <a:fontRef idx="minor">
+            <a:schemeClr val="tx1"/>
+          </a:fontRef>
+        </p:style>
+      </p:cxnSp>
+      <p:sp>
+        <p:nvSpPr>
+          <p:cNvPr id="156" name="TextBox 155">
+            <a:extLst>
+              <a:ext uri="{FF2B5EF4-FFF2-40B4-BE49-F238E27FC236}">
+                <a16:creationId xmlns:a16="http://schemas.microsoft.com/office/drawing/2014/main" id="{8EE68CD5-3828-66D3-CF69-264F08A0AC09}"/>
+              </a:ext>
+            </a:extLst>
+          </p:cNvPr>
+          <p:cNvSpPr txBox="1"/>
+          <p:nvPr/>
+        </p:nvSpPr>
+        <p:spPr>
+          <a:xfrm>
+            <a:off x="8937784" y="4780084"/>
+            <a:ext cx="332142" cy="230832"/>
+          </a:xfrm>
+          <a:prstGeom prst="rect">
+            <a:avLst/>
+          </a:prstGeom>
+          <a:noFill/>
+        </p:spPr>
+        <p:txBody>
+          <a:bodyPr wrap="none" rtlCol="0">
+            <a:spAutoFit/>
+          </a:bodyPr>
+          <a:lstStyle/>
+          <a:p>
+            <a:pPr algn="ctr"/>
+            <a:r>
+              <a:rPr lang="en-US" sz="900" dirty="0"/>
+              <a:t>PC</a:t>
+            </a:r>
+          </a:p>
+        </p:txBody>
+      </p:sp>
+      <p:cxnSp>
+        <p:nvCxnSpPr>
+          <p:cNvPr id="157" name="Straight Arrow Connector 156">
+            <a:extLst>
+              <a:ext uri="{FF2B5EF4-FFF2-40B4-BE49-F238E27FC236}">
+                <a16:creationId xmlns:a16="http://schemas.microsoft.com/office/drawing/2014/main" id="{CE23F81E-1E87-DE9B-046A-751F5B2EF337}"/>
+              </a:ext>
+            </a:extLst>
+          </p:cNvPr>
+          <p:cNvCxnSpPr>
+            <a:cxnSpLocks/>
+          </p:cNvCxnSpPr>
+          <p:nvPr/>
+        </p:nvCxnSpPr>
+        <p:spPr>
+          <a:xfrm>
+            <a:off x="8930725" y="4346119"/>
+            <a:ext cx="374301" cy="0"/>
+          </a:xfrm>
+          <a:prstGeom prst="straightConnector1">
+            <a:avLst/>
+          </a:prstGeom>
+          <a:ln>
+            <a:tailEnd type="triangle"/>
+          </a:ln>
+        </p:spPr>
+        <p:style>
+          <a:lnRef idx="2">
+            <a:schemeClr val="accent1"/>
+          </a:lnRef>
+          <a:fillRef idx="0">
+            <a:schemeClr val="accent1"/>
+          </a:fillRef>
+          <a:effectRef idx="1">
+            <a:schemeClr val="accent1"/>
+          </a:effectRef>
+          <a:fontRef idx="minor">
+            <a:schemeClr val="tx1"/>
+          </a:fontRef>
+        </p:style>
+      </p:cxnSp>
+      <p:cxnSp>
+        <p:nvCxnSpPr>
+          <p:cNvPr id="159" name="Straight Arrow Connector 158">
+            <a:extLst>
+              <a:ext uri="{FF2B5EF4-FFF2-40B4-BE49-F238E27FC236}">
+                <a16:creationId xmlns:a16="http://schemas.microsoft.com/office/drawing/2014/main" id="{A3FC0B57-60E9-D03D-A66F-04619217984F}"/>
+              </a:ext>
+            </a:extLst>
+          </p:cNvPr>
+          <p:cNvCxnSpPr>
+            <a:cxnSpLocks/>
+          </p:cNvCxnSpPr>
+          <p:nvPr/>
+        </p:nvCxnSpPr>
+        <p:spPr>
+          <a:xfrm>
+            <a:off x="8930725" y="4346119"/>
+            <a:ext cx="0" cy="213936"/>
+          </a:xfrm>
+          <a:prstGeom prst="straightConnector1">
+            <a:avLst/>
+          </a:prstGeom>
+          <a:ln>
+            <a:tailEnd type="none"/>
+          </a:ln>
+        </p:spPr>
+        <p:style>
+          <a:lnRef idx="2">
+            <a:schemeClr val="accent1"/>
+          </a:lnRef>
+          <a:fillRef idx="0">
+            <a:schemeClr val="accent1"/>
+          </a:fillRef>
+          <a:effectRef idx="1">
+            <a:schemeClr val="accent1"/>
+          </a:effectRef>
+          <a:fontRef idx="minor">
+            <a:schemeClr val="tx1"/>
+          </a:fontRef>
+        </p:style>
+      </p:cxnSp>
+      <p:cxnSp>
+        <p:nvCxnSpPr>
+          <p:cNvPr id="160" name="Straight Arrow Connector 159">
+            <a:extLst>
+              <a:ext uri="{FF2B5EF4-FFF2-40B4-BE49-F238E27FC236}">
+                <a16:creationId xmlns:a16="http://schemas.microsoft.com/office/drawing/2014/main" id="{5F47AAA6-0318-D08A-6320-0A794954F811}"/>
+              </a:ext>
+            </a:extLst>
+          </p:cNvPr>
+          <p:cNvCxnSpPr>
+            <a:cxnSpLocks/>
+          </p:cNvCxnSpPr>
+          <p:nvPr/>
+        </p:nvCxnSpPr>
+        <p:spPr>
+          <a:xfrm>
+            <a:off x="8698040" y="4454260"/>
+            <a:ext cx="232685" cy="0"/>
+          </a:xfrm>
+          <a:prstGeom prst="straightConnector1">
+            <a:avLst/>
+          </a:prstGeom>
+          <a:ln>
+            <a:tailEnd type="none"/>
+          </a:ln>
+        </p:spPr>
+        <p:style>
+          <a:lnRef idx="2">
+            <a:schemeClr val="accent1"/>
+          </a:lnRef>
+          <a:fillRef idx="0">
+            <a:schemeClr val="accent1"/>
+          </a:fillRef>
+          <a:effectRef idx="1">
+            <a:schemeClr val="accent1"/>
+          </a:effectRef>
+          <a:fontRef idx="minor">
+            <a:schemeClr val="tx1"/>
+          </a:fontRef>
+        </p:style>
+      </p:cxnSp>
+      <p:cxnSp>
+        <p:nvCxnSpPr>
+          <p:cNvPr id="161" name="Straight Arrow Connector 160">
+            <a:extLst>
+              <a:ext uri="{FF2B5EF4-FFF2-40B4-BE49-F238E27FC236}">
+                <a16:creationId xmlns:a16="http://schemas.microsoft.com/office/drawing/2014/main" id="{0FFDF2F4-DDDE-FB8D-64B3-74C68824CD4E}"/>
+              </a:ext>
+            </a:extLst>
+          </p:cNvPr>
+          <p:cNvCxnSpPr>
+            <a:cxnSpLocks/>
+          </p:cNvCxnSpPr>
+          <p:nvPr/>
+        </p:nvCxnSpPr>
+        <p:spPr>
+          <a:xfrm flipV="1">
+            <a:off x="9432653" y="4931909"/>
+            <a:ext cx="0" cy="318976"/>
+          </a:xfrm>
+          <a:prstGeom prst="straightConnector1">
+            <a:avLst/>
+          </a:prstGeom>
+          <a:ln>
+            <a:solidFill>
+              <a:srgbClr val="FF0000"/>
+            </a:solidFill>
+            <a:tailEnd type="triangle"/>
+          </a:ln>
+        </p:spPr>
+        <p:style>
+          <a:lnRef idx="2">
+            <a:schemeClr val="accent1"/>
+          </a:lnRef>
+          <a:fillRef idx="0">
+            <a:schemeClr val="accent1"/>
+          </a:fillRef>
+          <a:effectRef idx="1">
+            <a:schemeClr val="accent1"/>
+          </a:effectRef>
+          <a:fontRef idx="minor">
+            <a:schemeClr val="tx1"/>
+          </a:fontRef>
+        </p:style>
+      </p:cxnSp>
+      <p:cxnSp>
+        <p:nvCxnSpPr>
+          <p:cNvPr id="171" name="Straight Connector 170">
+            <a:extLst>
+              <a:ext uri="{FF2B5EF4-FFF2-40B4-BE49-F238E27FC236}">
+                <a16:creationId xmlns:a16="http://schemas.microsoft.com/office/drawing/2014/main" id="{30710D1B-628F-D0C5-C3B8-4E1DB5DB1822}"/>
+              </a:ext>
+            </a:extLst>
+          </p:cNvPr>
+          <p:cNvCxnSpPr>
+            <a:cxnSpLocks/>
+          </p:cNvCxnSpPr>
+          <p:nvPr/>
+        </p:nvCxnSpPr>
+        <p:spPr>
+          <a:xfrm flipH="1">
+            <a:off x="9388685" y="5117831"/>
+            <a:ext cx="85431" cy="62194"/>
+          </a:xfrm>
+          <a:prstGeom prst="line">
+            <a:avLst/>
+          </a:prstGeom>
+        </p:spPr>
+        <p:style>
+          <a:lnRef idx="2">
+            <a:schemeClr val="accent1"/>
+          </a:lnRef>
+          <a:fillRef idx="0">
+            <a:schemeClr val="accent1"/>
+          </a:fillRef>
+          <a:effectRef idx="1">
+            <a:schemeClr val="accent1"/>
+          </a:effectRef>
+          <a:fontRef idx="minor">
+            <a:schemeClr val="tx1"/>
+          </a:fontRef>
+        </p:style>
+      </p:cxnSp>
+      <p:cxnSp>
+        <p:nvCxnSpPr>
+          <p:cNvPr id="173" name="Straight Arrow Connector 172">
+            <a:extLst>
+              <a:ext uri="{FF2B5EF4-FFF2-40B4-BE49-F238E27FC236}">
+                <a16:creationId xmlns:a16="http://schemas.microsoft.com/office/drawing/2014/main" id="{D0735576-FA99-1226-FAE2-8A66AEE21921}"/>
+              </a:ext>
+            </a:extLst>
+          </p:cNvPr>
+          <p:cNvCxnSpPr>
+            <a:cxnSpLocks/>
+          </p:cNvCxnSpPr>
+          <p:nvPr/>
+        </p:nvCxnSpPr>
+        <p:spPr>
+          <a:xfrm>
+            <a:off x="9254353" y="3367023"/>
+            <a:ext cx="0" cy="137890"/>
+          </a:xfrm>
+          <a:prstGeom prst="straightConnector1">
+            <a:avLst/>
+          </a:prstGeom>
+          <a:ln>
+            <a:tailEnd type="triangle"/>
+          </a:ln>
+        </p:spPr>
+        <p:style>
+          <a:lnRef idx="2">
+            <a:schemeClr val="accent1"/>
+          </a:lnRef>
+          <a:fillRef idx="0">
+            <a:schemeClr val="accent1"/>
+          </a:fillRef>
+          <a:effectRef idx="1">
+            <a:schemeClr val="accent1"/>
+          </a:effectRef>
+          <a:fontRef idx="minor">
+            <a:schemeClr val="tx1"/>
+          </a:fontRef>
+        </p:style>
+      </p:cxnSp>
+      <p:sp>
+        <p:nvSpPr>
+          <p:cNvPr id="174" name="TextBox 173">
+            <a:extLst>
+              <a:ext uri="{FF2B5EF4-FFF2-40B4-BE49-F238E27FC236}">
+                <a16:creationId xmlns:a16="http://schemas.microsoft.com/office/drawing/2014/main" id="{7519AAD8-ECD9-BCFB-E19F-03D8220E44C3}"/>
+              </a:ext>
+            </a:extLst>
+          </p:cNvPr>
+          <p:cNvSpPr txBox="1"/>
+          <p:nvPr/>
+        </p:nvSpPr>
+        <p:spPr>
+          <a:xfrm>
+            <a:off x="9014468" y="3198168"/>
+            <a:ext cx="474810" cy="230832"/>
+          </a:xfrm>
+          <a:prstGeom prst="rect">
+            <a:avLst/>
+          </a:prstGeom>
+          <a:noFill/>
+        </p:spPr>
+        <p:txBody>
+          <a:bodyPr wrap="none" rtlCol="0">
+            <a:spAutoFit/>
+          </a:bodyPr>
+          <a:lstStyle/>
+          <a:p>
+            <a:pPr algn="ctr"/>
+            <a:r>
+              <a:rPr lang="en-US" sz="900" dirty="0"/>
+              <a:t>dout1</a:t>
+            </a:r>
+          </a:p>
+        </p:txBody>
+      </p:sp>
+      <p:cxnSp>
+        <p:nvCxnSpPr>
+          <p:cNvPr id="184" name="Straight Arrow Connector 183">
+            <a:extLst>
+              <a:ext uri="{FF2B5EF4-FFF2-40B4-BE49-F238E27FC236}">
+                <a16:creationId xmlns:a16="http://schemas.microsoft.com/office/drawing/2014/main" id="{DBCE76B6-4D18-835C-C24A-DF1E79C1CF76}"/>
+              </a:ext>
+            </a:extLst>
+          </p:cNvPr>
+          <p:cNvCxnSpPr>
+            <a:cxnSpLocks/>
+          </p:cNvCxnSpPr>
+          <p:nvPr/>
+        </p:nvCxnSpPr>
+        <p:spPr>
+          <a:xfrm>
+            <a:off x="9431921" y="3928834"/>
+            <a:ext cx="0" cy="325106"/>
+          </a:xfrm>
+          <a:prstGeom prst="straightConnector1">
+            <a:avLst/>
+          </a:prstGeom>
+          <a:ln>
+            <a:solidFill>
+              <a:srgbClr val="FF0000"/>
+            </a:solidFill>
+            <a:tailEnd type="triangle"/>
+          </a:ln>
+        </p:spPr>
+        <p:style>
+          <a:lnRef idx="2">
+            <a:schemeClr val="accent1"/>
+          </a:lnRef>
+          <a:fillRef idx="0">
+            <a:schemeClr val="accent1"/>
+          </a:fillRef>
+          <a:effectRef idx="1">
+            <a:schemeClr val="accent1"/>
+          </a:effectRef>
+          <a:fontRef idx="minor">
+            <a:schemeClr val="tx1"/>
+          </a:fontRef>
+        </p:style>
+      </p:cxnSp>
+      <p:sp>
+        <p:nvSpPr>
+          <p:cNvPr id="186" name="TextBox 185">
+            <a:extLst>
+              <a:ext uri="{FF2B5EF4-FFF2-40B4-BE49-F238E27FC236}">
+                <a16:creationId xmlns:a16="http://schemas.microsoft.com/office/drawing/2014/main" id="{4DF51EAB-8861-0396-BAA6-9479806818EB}"/>
+              </a:ext>
+            </a:extLst>
+          </p:cNvPr>
+          <p:cNvSpPr txBox="1"/>
+          <p:nvPr/>
+        </p:nvSpPr>
+        <p:spPr>
+          <a:xfrm>
+            <a:off x="9063374" y="3733304"/>
+            <a:ext cx="671979" cy="230832"/>
+          </a:xfrm>
+          <a:prstGeom prst="rect">
+            <a:avLst/>
+          </a:prstGeom>
+          <a:noFill/>
+        </p:spPr>
+        <p:txBody>
+          <a:bodyPr wrap="none" rtlCol="0">
+            <a:spAutoFit/>
+          </a:bodyPr>
+          <a:lstStyle/>
+          <a:p>
+            <a:pPr algn="ctr"/>
+            <a:r>
+              <a:rPr lang="en-US" sz="900" dirty="0"/>
+              <a:t>Not equal</a:t>
+            </a:r>
+          </a:p>
+        </p:txBody>
+      </p:sp>
+      <p:sp>
+        <p:nvSpPr>
+          <p:cNvPr id="187" name="Rectangle 186">
+            <a:extLst>
+              <a:ext uri="{FF2B5EF4-FFF2-40B4-BE49-F238E27FC236}">
+                <a16:creationId xmlns:a16="http://schemas.microsoft.com/office/drawing/2014/main" id="{02F76C24-B5A2-EF6E-0213-72D63A9FAEFB}"/>
+              </a:ext>
+            </a:extLst>
+          </p:cNvPr>
+          <p:cNvSpPr/>
+          <p:nvPr/>
+        </p:nvSpPr>
+        <p:spPr>
+          <a:xfrm>
+            <a:off x="9027891" y="3504913"/>
+            <a:ext cx="736311" cy="418585"/>
+          </a:xfrm>
+          <a:prstGeom prst="rect">
+            <a:avLst/>
+          </a:prstGeom>
+          <a:noFill/>
+          <a:ln>
+            <a:solidFill>
+              <a:srgbClr val="0070C0"/>
+            </a:solidFill>
+          </a:ln>
+        </p:spPr>
+        <p:style>
+          <a:lnRef idx="2">
+            <a:schemeClr val="accent1">
+              <a:shade val="15000"/>
+            </a:schemeClr>
+          </a:lnRef>
+          <a:fillRef idx="1">
+            <a:schemeClr val="accent1"/>
+          </a:fillRef>
+          <a:effectRef idx="0">
+            <a:schemeClr val="accent1"/>
+          </a:effectRef>
+          <a:fontRef idx="minor">
+            <a:schemeClr val="lt1"/>
+          </a:fontRef>
+        </p:style>
+        <p:txBody>
+          <a:bodyPr rtlCol="0" anchor="ctr"/>
+          <a:lstStyle/>
+          <a:p>
+            <a:pPr algn="ctr"/>
+            <a:endParaRPr lang="en-US"/>
+          </a:p>
+        </p:txBody>
+      </p:sp>
+      <p:cxnSp>
+        <p:nvCxnSpPr>
+          <p:cNvPr id="188" name="Straight Arrow Connector 187">
+            <a:extLst>
+              <a:ext uri="{FF2B5EF4-FFF2-40B4-BE49-F238E27FC236}">
+                <a16:creationId xmlns:a16="http://schemas.microsoft.com/office/drawing/2014/main" id="{FBAC4502-2B1D-5218-C2D9-AB667D10F3CF}"/>
+              </a:ext>
+            </a:extLst>
+          </p:cNvPr>
+          <p:cNvCxnSpPr>
+            <a:cxnSpLocks/>
+          </p:cNvCxnSpPr>
+          <p:nvPr/>
+        </p:nvCxnSpPr>
+        <p:spPr>
+          <a:xfrm>
+            <a:off x="9601800" y="3367023"/>
+            <a:ext cx="0" cy="137890"/>
+          </a:xfrm>
+          <a:prstGeom prst="straightConnector1">
+            <a:avLst/>
+          </a:prstGeom>
+          <a:ln>
+            <a:tailEnd type="triangle"/>
+          </a:ln>
+        </p:spPr>
+        <p:style>
+          <a:lnRef idx="2">
+            <a:schemeClr val="accent1"/>
+          </a:lnRef>
+          <a:fillRef idx="0">
+            <a:schemeClr val="accent1"/>
+          </a:fillRef>
+          <a:effectRef idx="1">
+            <a:schemeClr val="accent1"/>
+          </a:effectRef>
+          <a:fontRef idx="minor">
+            <a:schemeClr val="tx1"/>
+          </a:fontRef>
+        </p:style>
+      </p:cxnSp>
+      <p:cxnSp>
+        <p:nvCxnSpPr>
+          <p:cNvPr id="189" name="Straight Arrow Connector 188">
+            <a:extLst>
+              <a:ext uri="{FF2B5EF4-FFF2-40B4-BE49-F238E27FC236}">
+                <a16:creationId xmlns:a16="http://schemas.microsoft.com/office/drawing/2014/main" id="{4F79E217-E351-6707-29A8-684823FCD841}"/>
+              </a:ext>
+            </a:extLst>
+          </p:cNvPr>
+          <p:cNvCxnSpPr>
+            <a:cxnSpLocks/>
+          </p:cNvCxnSpPr>
+          <p:nvPr/>
+        </p:nvCxnSpPr>
+        <p:spPr>
+          <a:xfrm flipV="1">
+            <a:off x="10822834" y="3193477"/>
+            <a:ext cx="0" cy="616523"/>
+          </a:xfrm>
+          <a:prstGeom prst="straightConnector1">
+            <a:avLst/>
+          </a:prstGeom>
+          <a:ln>
+            <a:solidFill>
+              <a:srgbClr val="FF0000"/>
+            </a:solidFill>
+            <a:tailEnd type="triangle"/>
+          </a:ln>
+        </p:spPr>
+        <p:style>
+          <a:lnRef idx="2">
+            <a:schemeClr val="accent1"/>
+          </a:lnRef>
+          <a:fillRef idx="0">
+            <a:schemeClr val="accent1"/>
+          </a:fillRef>
+          <a:effectRef idx="1">
+            <a:schemeClr val="accent1"/>
+          </a:effectRef>
+          <a:fontRef idx="minor">
+            <a:schemeClr val="tx1"/>
+          </a:fontRef>
+        </p:style>
+      </p:cxnSp>
+      <p:cxnSp>
+        <p:nvCxnSpPr>
+          <p:cNvPr id="190" name="Straight Connector 189">
+            <a:extLst>
+              <a:ext uri="{FF2B5EF4-FFF2-40B4-BE49-F238E27FC236}">
+                <a16:creationId xmlns:a16="http://schemas.microsoft.com/office/drawing/2014/main" id="{88E60B1A-8F9F-F801-EE6D-5051B5DDD7FD}"/>
+              </a:ext>
+            </a:extLst>
+          </p:cNvPr>
+          <p:cNvCxnSpPr>
+            <a:cxnSpLocks/>
+          </p:cNvCxnSpPr>
+          <p:nvPr/>
+        </p:nvCxnSpPr>
+        <p:spPr>
+          <a:xfrm flipH="1">
+            <a:off x="10772078" y="3608496"/>
+            <a:ext cx="107051" cy="69157"/>
+          </a:xfrm>
+          <a:prstGeom prst="line">
+            <a:avLst/>
+          </a:prstGeom>
         </p:spPr>
         <p:style>
           <a:lnRef idx="2">
@@ -11281,4 +11703,10 @@
     </a:ext>
   </a:extLst>
 </a:theme>
+</file>
+
+<file path=docMetadata/LabelInfo.xml><?xml version="1.0" encoding="utf-8"?>
+<clbl:labelList xmlns:clbl="http://schemas.microsoft.com/office/2020/mipLabelMetadata">
+  <clbl:label id="{7ab80a06-f029-45c0-84d1-7dad19ce3c61}" enabled="0" method="" siteId="{7ab80a06-f029-45c0-84d1-7dad19ce3c61}" removed="1"/>
+</clbl:labelList>
 </file>
--- a/_downloads/134e415b8a40d408c1cfa6f36ebc74a2/RISCVstage3.pptx
+++ b/_downloads/134e415b8a40d408c1cfa6f36ebc74a2/RISCVstage3.pptx
@@ -115,7 +115,7 @@
 <file path=ppt/revisionInfo.xml><?xml version="1.0" encoding="utf-8"?>
 <p1510:revInfo xmlns:a="http://schemas.openxmlformats.org/drawingml/2006/main" xmlns:r="http://schemas.openxmlformats.org/officeDocument/2006/relationships" xmlns:p1510="http://schemas.microsoft.com/office/powerpoint/2015/10/main">
   <p1510:revLst>
-    <p1510:client id="{E75867FF-49DB-4DC0-967A-A19776D02C5E}" v="4" dt="2026-03-10T16:48:05.976"/>
+    <p1510:client id="{E75867FF-49DB-4DC0-967A-A19776D02C5E}" v="6" dt="2026-03-10T17:14:29.583"/>
   </p1510:revLst>
 </p1510:revInfo>
 </file>
@@ -125,12 +125,12 @@
   <pc:docChgLst>
     <pc:chgData name="York, George W CIV USAF USAFA DF/DFEC" userId="1fb5875a-4594-4db2-80fb-f0db3de11280" providerId="ADAL" clId="{09330963-85FD-4C99-A81B-94D0EE5CFFEB}"/>
     <pc:docChg chg="custSel modSld">
-      <pc:chgData name="York, George W CIV USAF USAFA DF/DFEC" userId="1fb5875a-4594-4db2-80fb-f0db3de11280" providerId="ADAL" clId="{09330963-85FD-4C99-A81B-94D0EE5CFFEB}" dt="2026-03-10T16:48:05.976" v="8"/>
+      <pc:chgData name="York, George W CIV USAF USAFA DF/DFEC" userId="1fb5875a-4594-4db2-80fb-f0db3de11280" providerId="ADAL" clId="{09330963-85FD-4C99-A81B-94D0EE5CFFEB}" dt="2026-03-10T17:14:37.305" v="17" actId="1076"/>
       <pc:docMkLst>
         <pc:docMk/>
       </pc:docMkLst>
       <pc:sldChg chg="addSp delSp modSp mod">
-        <pc:chgData name="York, George W CIV USAF USAFA DF/DFEC" userId="1fb5875a-4594-4db2-80fb-f0db3de11280" providerId="ADAL" clId="{09330963-85FD-4C99-A81B-94D0EE5CFFEB}" dt="2026-03-10T16:48:05.976" v="8"/>
+        <pc:chgData name="York, George W CIV USAF USAFA DF/DFEC" userId="1fb5875a-4594-4db2-80fb-f0db3de11280" providerId="ADAL" clId="{09330963-85FD-4C99-A81B-94D0EE5CFFEB}" dt="2026-03-10T17:14:37.305" v="17" actId="1076"/>
         <pc:sldMkLst>
           <pc:docMk/>
           <pc:sldMk cId="1501170907" sldId="256"/>
@@ -141,6 +141,14 @@
             <pc:docMk/>
             <pc:sldMk cId="1501170907" sldId="256"/>
             <ac:spMk id="4" creationId="{FB55267A-D19E-887C-DE49-0FCC56FF700B}"/>
+          </ac:spMkLst>
+        </pc:spChg>
+        <pc:spChg chg="add mod">
+          <ac:chgData name="York, George W CIV USAF USAFA DF/DFEC" userId="1fb5875a-4594-4db2-80fb-f0db3de11280" providerId="ADAL" clId="{09330963-85FD-4C99-A81B-94D0EE5CFFEB}" dt="2026-03-10T17:10:31.494" v="11" actId="1076"/>
+          <ac:spMkLst>
+            <pc:docMk/>
+            <pc:sldMk cId="1501170907" sldId="256"/>
+            <ac:spMk id="17" creationId="{F3C357C1-6CA0-FE49-1679-B84ECC79460C}"/>
           </ac:spMkLst>
         </pc:spChg>
         <pc:spChg chg="del">
@@ -312,6 +320,14 @@
           </ac:spMkLst>
         </pc:spChg>
         <pc:grpChg chg="del">
+          <ac:chgData name="York, George W CIV USAF USAFA DF/DFEC" userId="1fb5875a-4594-4db2-80fb-f0db3de11280" providerId="ADAL" clId="{09330963-85FD-4C99-A81B-94D0EE5CFFEB}" dt="2026-03-10T17:14:24.856" v="15" actId="478"/>
+          <ac:grpSpMkLst>
+            <pc:docMk/>
+            <pc:sldMk cId="1501170907" sldId="256"/>
+            <ac:grpSpMk id="30" creationId="{F29CD4F1-4D65-2071-CB5D-56C21B0A8ADD}"/>
+          </ac:grpSpMkLst>
+        </pc:grpChg>
+        <pc:grpChg chg="del">
           <ac:chgData name="York, George W CIV USAF USAFA DF/DFEC" userId="1fb5875a-4594-4db2-80fb-f0db3de11280" providerId="ADAL" clId="{09330963-85FD-4C99-A81B-94D0EE5CFFEB}" dt="2026-03-10T16:47:43.899" v="5" actId="478"/>
           <ac:grpSpMkLst>
             <pc:docMk/>
@@ -335,6 +351,14 @@
             <ac:grpSpMk id="144" creationId="{668D9262-FD4F-8437-B65A-FF28CF8998C5}"/>
           </ac:grpSpMkLst>
         </pc:grpChg>
+        <pc:picChg chg="del">
+          <ac:chgData name="York, George W CIV USAF USAFA DF/DFEC" userId="1fb5875a-4594-4db2-80fb-f0db3de11280" providerId="ADAL" clId="{09330963-85FD-4C99-A81B-94D0EE5CFFEB}" dt="2026-03-10T17:14:07.197" v="12" actId="478"/>
+          <ac:picMkLst>
+            <pc:docMk/>
+            <pc:sldMk cId="1501170907" sldId="256"/>
+            <ac:picMk id="36" creationId="{7D1B8B85-7F90-6201-21E9-F6ABDFFBBFF8}"/>
+          </ac:picMkLst>
+        </pc:picChg>
         <pc:cxnChg chg="del">
           <ac:chgData name="York, George W CIV USAF USAFA DF/DFEC" userId="1fb5875a-4594-4db2-80fb-f0db3de11280" providerId="ADAL" clId="{09330963-85FD-4C99-A81B-94D0EE5CFFEB}" dt="2026-03-10T16:47:53.742" v="7" actId="478"/>
           <ac:cxnSpMkLst>
@@ -351,12 +375,36 @@
             <ac:cxnSpMk id="26" creationId="{EFC7A41C-61ED-49E4-BA0B-27EC82F62902}"/>
           </ac:cxnSpMkLst>
         </pc:cxnChg>
+        <pc:cxnChg chg="add mod">
+          <ac:chgData name="York, George W CIV USAF USAFA DF/DFEC" userId="1fb5875a-4594-4db2-80fb-f0db3de11280" providerId="ADAL" clId="{09330963-85FD-4C99-A81B-94D0EE5CFFEB}" dt="2026-03-10T17:14:37.305" v="17" actId="1076"/>
+          <ac:cxnSpMkLst>
+            <pc:docMk/>
+            <pc:sldMk cId="1501170907" sldId="256"/>
+            <ac:cxnSpMk id="26" creationId="{F93FF150-8370-FB86-5E5C-59855FA6B568}"/>
+          </ac:cxnSpMkLst>
+        </pc:cxnChg>
         <pc:cxnChg chg="del">
           <ac:chgData name="York, George W CIV USAF USAFA DF/DFEC" userId="1fb5875a-4594-4db2-80fb-f0db3de11280" providerId="ADAL" clId="{09330963-85FD-4C99-A81B-94D0EE5CFFEB}" dt="2026-03-10T16:47:53.742" v="7" actId="478"/>
           <ac:cxnSpMkLst>
             <pc:docMk/>
             <pc:sldMk cId="1501170907" sldId="256"/>
             <ac:cxnSpMk id="28" creationId="{EE79F449-2B1D-87A9-9E7B-9DD8C11C7B9B}"/>
+          </ac:cxnSpMkLst>
+        </pc:cxnChg>
+        <pc:cxnChg chg="del">
+          <ac:chgData name="York, George W CIV USAF USAFA DF/DFEC" userId="1fb5875a-4594-4db2-80fb-f0db3de11280" providerId="ADAL" clId="{09330963-85FD-4C99-A81B-94D0EE5CFFEB}" dt="2026-03-10T17:14:18.066" v="14" actId="478"/>
+          <ac:cxnSpMkLst>
+            <pc:docMk/>
+            <pc:sldMk cId="1501170907" sldId="256"/>
+            <ac:cxnSpMk id="37" creationId="{A09C37C1-E5D0-9FBA-A932-2F98BACEC0B2}"/>
+          </ac:cxnSpMkLst>
+        </pc:cxnChg>
+        <pc:cxnChg chg="mod">
+          <ac:chgData name="York, George W CIV USAF USAFA DF/DFEC" userId="1fb5875a-4594-4db2-80fb-f0db3de11280" providerId="ADAL" clId="{09330963-85FD-4C99-A81B-94D0EE5CFFEB}" dt="2026-03-10T17:14:16.193" v="13" actId="1076"/>
+          <ac:cxnSpMkLst>
+            <pc:docMk/>
+            <pc:sldMk cId="1501170907" sldId="256"/>
+            <ac:cxnSpMk id="38" creationId="{4D9B3B66-045C-4BC7-2F4D-857D0D686CD3}"/>
           </ac:cxnSpMkLst>
         </pc:cxnChg>
         <pc:cxnChg chg="add mod">
@@ -3643,36 +3691,6 @@
           <a:chExt cx="0" cy="0"/>
         </a:xfrm>
       </p:grpSpPr>
-      <p:pic>
-        <p:nvPicPr>
-          <p:cNvPr id="36" name="Picture 35">
-            <a:extLst>
-              <a:ext uri="{FF2B5EF4-FFF2-40B4-BE49-F238E27FC236}">
-                <a16:creationId xmlns:a16="http://schemas.microsoft.com/office/drawing/2014/main" id="{7D1B8B85-7F90-6201-21E9-F6ABDFFBBFF8}"/>
-              </a:ext>
-            </a:extLst>
-          </p:cNvPr>
-          <p:cNvPicPr>
-            <a:picLocks noChangeAspect="1"/>
-          </p:cNvPicPr>
-          <p:nvPr/>
-        </p:nvPicPr>
-        <p:blipFill>
-          <a:blip r:embed="rId2"/>
-          <a:stretch>
-            <a:fillRect/>
-          </a:stretch>
-        </p:blipFill>
-        <p:spPr>
-          <a:xfrm>
-            <a:off x="2899612" y="3237305"/>
-            <a:ext cx="503999" cy="267608"/>
-          </a:xfrm>
-          <a:prstGeom prst="rect">
-            <a:avLst/>
-          </a:prstGeom>
-        </p:spPr>
-      </p:pic>
       <p:sp>
         <p:nvSpPr>
           <p:cNvPr id="4" name="TextBox 3">
@@ -9145,187 +9163,6 @@
           </a:p>
         </p:txBody>
       </p:sp>
-      <p:grpSp>
-        <p:nvGrpSpPr>
-          <p:cNvPr id="30" name="Group 29">
-            <a:extLst>
-              <a:ext uri="{FF2B5EF4-FFF2-40B4-BE49-F238E27FC236}">
-                <a16:creationId xmlns:a16="http://schemas.microsoft.com/office/drawing/2014/main" id="{F29CD4F1-4D65-2071-CB5D-56C21B0A8ADD}"/>
-              </a:ext>
-            </a:extLst>
-          </p:cNvPr>
-          <p:cNvGrpSpPr/>
-          <p:nvPr/>
-        </p:nvGrpSpPr>
-        <p:grpSpPr>
-          <a:xfrm rot="16200000">
-            <a:off x="8495764" y="2520050"/>
-            <a:ext cx="405246" cy="267608"/>
-            <a:chOff x="6169099" y="3766490"/>
-            <a:chExt cx="533480" cy="267608"/>
-          </a:xfrm>
-        </p:grpSpPr>
-        <p:pic>
-          <p:nvPicPr>
-            <p:cNvPr id="32" name="Picture 31">
-              <a:extLst>
-                <a:ext uri="{FF2B5EF4-FFF2-40B4-BE49-F238E27FC236}">
-                  <a16:creationId xmlns:a16="http://schemas.microsoft.com/office/drawing/2014/main" id="{08E484B5-905D-B38D-3D91-241CE1719D6C}"/>
-                </a:ext>
-              </a:extLst>
-            </p:cNvPr>
-            <p:cNvPicPr>
-              <a:picLocks noChangeAspect="1"/>
-            </p:cNvPicPr>
-            <p:nvPr/>
-          </p:nvPicPr>
-          <p:blipFill>
-            <a:blip r:embed="rId2"/>
-            <a:stretch>
-              <a:fillRect/>
-            </a:stretch>
-          </p:blipFill>
-          <p:spPr>
-            <a:xfrm>
-              <a:off x="6198580" y="3766490"/>
-              <a:ext cx="503999" cy="267608"/>
-            </a:xfrm>
-            <a:prstGeom prst="rect">
-              <a:avLst/>
-            </a:prstGeom>
-          </p:spPr>
-        </p:pic>
-        <p:cxnSp>
-          <p:nvCxnSpPr>
-            <p:cNvPr id="34" name="Straight Arrow Connector 33">
-              <a:extLst>
-                <a:ext uri="{FF2B5EF4-FFF2-40B4-BE49-F238E27FC236}">
-                  <a16:creationId xmlns:a16="http://schemas.microsoft.com/office/drawing/2014/main" id="{72BE6CC3-2C59-A24A-5E92-68A707F8638E}"/>
-                </a:ext>
-              </a:extLst>
-            </p:cNvPr>
-            <p:cNvCxnSpPr>
-              <a:cxnSpLocks/>
-            </p:cNvCxnSpPr>
-            <p:nvPr/>
-          </p:nvCxnSpPr>
-          <p:spPr>
-            <a:xfrm>
-              <a:off x="6169099" y="3838587"/>
-              <a:ext cx="177808" cy="0"/>
-            </a:xfrm>
-            <a:prstGeom prst="straightConnector1">
-              <a:avLst/>
-            </a:prstGeom>
-            <a:ln>
-              <a:solidFill>
-                <a:srgbClr val="FF0000"/>
-              </a:solidFill>
-              <a:tailEnd type="triangle"/>
-            </a:ln>
-          </p:spPr>
-          <p:style>
-            <a:lnRef idx="2">
-              <a:schemeClr val="accent1"/>
-            </a:lnRef>
-            <a:fillRef idx="0">
-              <a:schemeClr val="accent1"/>
-            </a:fillRef>
-            <a:effectRef idx="1">
-              <a:schemeClr val="accent1"/>
-            </a:effectRef>
-            <a:fontRef idx="minor">
-              <a:schemeClr val="tx1"/>
-            </a:fontRef>
-          </p:style>
-        </p:cxnSp>
-        <p:cxnSp>
-          <p:nvCxnSpPr>
-            <p:cNvPr id="35" name="Straight Arrow Connector 34">
-              <a:extLst>
-                <a:ext uri="{FF2B5EF4-FFF2-40B4-BE49-F238E27FC236}">
-                  <a16:creationId xmlns:a16="http://schemas.microsoft.com/office/drawing/2014/main" id="{8AB80F94-094C-4CE9-C275-29945A350AA8}"/>
-                </a:ext>
-              </a:extLst>
-            </p:cNvPr>
-            <p:cNvCxnSpPr>
-              <a:cxnSpLocks/>
-            </p:cNvCxnSpPr>
-            <p:nvPr/>
-          </p:nvCxnSpPr>
-          <p:spPr>
-            <a:xfrm>
-              <a:off x="6169099" y="3958185"/>
-              <a:ext cx="177808" cy="0"/>
-            </a:xfrm>
-            <a:prstGeom prst="straightConnector1">
-              <a:avLst/>
-            </a:prstGeom>
-            <a:ln>
-              <a:solidFill>
-                <a:srgbClr val="FF0000"/>
-              </a:solidFill>
-              <a:tailEnd type="triangle"/>
-            </a:ln>
-          </p:spPr>
-          <p:style>
-            <a:lnRef idx="2">
-              <a:schemeClr val="accent1"/>
-            </a:lnRef>
-            <a:fillRef idx="0">
-              <a:schemeClr val="accent1"/>
-            </a:fillRef>
-            <a:effectRef idx="1">
-              <a:schemeClr val="accent1"/>
-            </a:effectRef>
-            <a:fontRef idx="minor">
-              <a:schemeClr val="tx1"/>
-            </a:fontRef>
-          </p:style>
-        </p:cxnSp>
-      </p:grpSp>
-      <p:cxnSp>
-        <p:nvCxnSpPr>
-          <p:cNvPr id="37" name="Straight Arrow Connector 36">
-            <a:extLst>
-              <a:ext uri="{FF2B5EF4-FFF2-40B4-BE49-F238E27FC236}">
-                <a16:creationId xmlns:a16="http://schemas.microsoft.com/office/drawing/2014/main" id="{A09C37C1-E5D0-9FBA-A932-2F98BACEC0B2}"/>
-              </a:ext>
-            </a:extLst>
-          </p:cNvPr>
-          <p:cNvCxnSpPr/>
-          <p:nvPr/>
-        </p:nvCxnSpPr>
-        <p:spPr>
-          <a:xfrm>
-            <a:off x="2870131" y="3309402"/>
-            <a:ext cx="177808" cy="0"/>
-          </a:xfrm>
-          <a:prstGeom prst="straightConnector1">
-            <a:avLst/>
-          </a:prstGeom>
-          <a:ln>
-            <a:solidFill>
-              <a:srgbClr val="FF0000"/>
-            </a:solidFill>
-            <a:tailEnd type="triangle"/>
-          </a:ln>
-        </p:spPr>
-        <p:style>
-          <a:lnRef idx="2">
-            <a:schemeClr val="accent1"/>
-          </a:lnRef>
-          <a:fillRef idx="0">
-            <a:schemeClr val="accent1"/>
-          </a:fillRef>
-          <a:effectRef idx="1">
-            <a:schemeClr val="accent1"/>
-          </a:effectRef>
-          <a:fontRef idx="minor">
-            <a:schemeClr val="tx1"/>
-          </a:fontRef>
-        </p:style>
-      </p:cxnSp>
       <p:cxnSp>
         <p:nvCxnSpPr>
           <p:cNvPr id="38" name="Straight Arrow Connector 37">
@@ -9340,7 +9177,7 @@
         </p:nvCxnSpPr>
         <p:spPr>
           <a:xfrm>
-            <a:off x="2870131" y="3429000"/>
+            <a:off x="3209831" y="3367023"/>
             <a:ext cx="177808" cy="0"/>
           </a:xfrm>
           <a:prstGeom prst="straightConnector1">
@@ -11361,6 +11198,84 @@
           <a:prstGeom prst="line">
             <a:avLst/>
           </a:prstGeom>
+        </p:spPr>
+        <p:style>
+          <a:lnRef idx="2">
+            <a:schemeClr val="accent1"/>
+          </a:lnRef>
+          <a:fillRef idx="0">
+            <a:schemeClr val="accent1"/>
+          </a:fillRef>
+          <a:effectRef idx="1">
+            <a:schemeClr val="accent1"/>
+          </a:effectRef>
+          <a:fontRef idx="minor">
+            <a:schemeClr val="tx1"/>
+          </a:fontRef>
+        </p:style>
+      </p:cxnSp>
+      <p:sp>
+        <p:nvSpPr>
+          <p:cNvPr id="17" name="TextBox 16">
+            <a:extLst>
+              <a:ext uri="{FF2B5EF4-FFF2-40B4-BE49-F238E27FC236}">
+                <a16:creationId xmlns:a16="http://schemas.microsoft.com/office/drawing/2014/main" id="{F3C357C1-6CA0-FE49-1679-B84ECC79460C}"/>
+              </a:ext>
+            </a:extLst>
+          </p:cNvPr>
+          <p:cNvSpPr txBox="1"/>
+          <p:nvPr/>
+        </p:nvSpPr>
+        <p:spPr>
+          <a:xfrm>
+            <a:off x="9370905" y="3184375"/>
+            <a:ext cx="474810" cy="230832"/>
+          </a:xfrm>
+          <a:prstGeom prst="rect">
+            <a:avLst/>
+          </a:prstGeom>
+          <a:noFill/>
+        </p:spPr>
+        <p:txBody>
+          <a:bodyPr wrap="none" rtlCol="0">
+            <a:spAutoFit/>
+          </a:bodyPr>
+          <a:lstStyle/>
+          <a:p>
+            <a:pPr algn="ctr"/>
+            <a:r>
+              <a:rPr lang="en-US" sz="900" dirty="0"/>
+              <a:t>dout2</a:t>
+            </a:r>
+          </a:p>
+        </p:txBody>
+      </p:sp>
+      <p:cxnSp>
+        <p:nvCxnSpPr>
+          <p:cNvPr id="26" name="Straight Arrow Connector 25">
+            <a:extLst>
+              <a:ext uri="{FF2B5EF4-FFF2-40B4-BE49-F238E27FC236}">
+                <a16:creationId xmlns:a16="http://schemas.microsoft.com/office/drawing/2014/main" id="{F93FF150-8370-FB86-5E5C-59855FA6B568}"/>
+              </a:ext>
+            </a:extLst>
+          </p:cNvPr>
+          <p:cNvCxnSpPr/>
+          <p:nvPr/>
+        </p:nvCxnSpPr>
+        <p:spPr>
+          <a:xfrm flipV="1">
+            <a:off x="8718196" y="2434882"/>
+            <a:ext cx="0" cy="167673"/>
+          </a:xfrm>
+          <a:prstGeom prst="straightConnector1">
+            <a:avLst/>
+          </a:prstGeom>
+          <a:ln>
+            <a:solidFill>
+              <a:srgbClr val="FF0000"/>
+            </a:solidFill>
+            <a:tailEnd type="triangle"/>
+          </a:ln>
         </p:spPr>
         <p:style>
           <a:lnRef idx="2">

--- a/_downloads/134e415b8a40d408c1cfa6f36ebc74a2/RISCVstage3.pptx
+++ b/_downloads/134e415b8a40d408c1cfa6f36ebc74a2/RISCVstage3.pptx
@@ -115,7 +115,7 @@
 <file path=ppt/revisionInfo.xml><?xml version="1.0" encoding="utf-8"?>
 <p1510:revInfo xmlns:a="http://schemas.openxmlformats.org/drawingml/2006/main" xmlns:r="http://schemas.openxmlformats.org/officeDocument/2006/relationships" xmlns:p1510="http://schemas.microsoft.com/office/powerpoint/2015/10/main">
   <p1510:revLst>
-    <p1510:client id="{E75867FF-49DB-4DC0-967A-A19776D02C5E}" v="6" dt="2026-03-10T17:14:29.583"/>
+    <p1510:client id="{ACF1FCC7-50D8-4515-B9C3-EEEC3DB5664C}" v="7" dt="2026-04-07T21:43:30.324"/>
   </p1510:revLst>
 </p1510:revInfo>
 </file>
@@ -124,25 +124,17 @@
 <pc:chgInfo xmlns:a="http://schemas.openxmlformats.org/drawingml/2006/main" xmlns:r="http://schemas.openxmlformats.org/officeDocument/2006/relationships" xmlns:ac="http://schemas.microsoft.com/office/drawing/2013/main/command" xmlns:pc="http://schemas.microsoft.com/office/powerpoint/2013/main/command">
   <pc:docChgLst>
     <pc:chgData name="York, George W CIV USAF USAFA DF/DFEC" userId="1fb5875a-4594-4db2-80fb-f0db3de11280" providerId="ADAL" clId="{09330963-85FD-4C99-A81B-94D0EE5CFFEB}"/>
-    <pc:docChg chg="custSel modSld">
-      <pc:chgData name="York, George W CIV USAF USAFA DF/DFEC" userId="1fb5875a-4594-4db2-80fb-f0db3de11280" providerId="ADAL" clId="{09330963-85FD-4C99-A81B-94D0EE5CFFEB}" dt="2026-03-10T17:14:37.305" v="17" actId="1076"/>
+    <pc:docChg chg="undo custSel modSld">
+      <pc:chgData name="York, George W CIV USAF USAFA DF/DFEC" userId="1fb5875a-4594-4db2-80fb-f0db3de11280" providerId="ADAL" clId="{09330963-85FD-4C99-A81B-94D0EE5CFFEB}" dt="2026-04-07T21:43:57.765" v="118" actId="20577"/>
       <pc:docMkLst>
         <pc:docMk/>
       </pc:docMkLst>
       <pc:sldChg chg="addSp delSp modSp mod">
-        <pc:chgData name="York, George W CIV USAF USAFA DF/DFEC" userId="1fb5875a-4594-4db2-80fb-f0db3de11280" providerId="ADAL" clId="{09330963-85FD-4C99-A81B-94D0EE5CFFEB}" dt="2026-03-10T17:14:37.305" v="17" actId="1076"/>
+        <pc:chgData name="York, George W CIV USAF USAFA DF/DFEC" userId="1fb5875a-4594-4db2-80fb-f0db3de11280" providerId="ADAL" clId="{09330963-85FD-4C99-A81B-94D0EE5CFFEB}" dt="2026-04-07T21:43:57.765" v="118" actId="20577"/>
         <pc:sldMkLst>
           <pc:docMk/>
           <pc:sldMk cId="1501170907" sldId="256"/>
         </pc:sldMkLst>
-        <pc:spChg chg="mod">
-          <ac:chgData name="York, George W CIV USAF USAFA DF/DFEC" userId="1fb5875a-4594-4db2-80fb-f0db3de11280" providerId="ADAL" clId="{09330963-85FD-4C99-A81B-94D0EE5CFFEB}" dt="2026-03-05T22:46:17.762" v="4" actId="20577"/>
-          <ac:spMkLst>
-            <pc:docMk/>
-            <pc:sldMk cId="1501170907" sldId="256"/>
-            <ac:spMk id="4" creationId="{FB55267A-D19E-887C-DE49-0FCC56FF700B}"/>
-          </ac:spMkLst>
-        </pc:spChg>
         <pc:spChg chg="add mod">
           <ac:chgData name="York, George W CIV USAF USAFA DF/DFEC" userId="1fb5875a-4594-4db2-80fb-f0db3de11280" providerId="ADAL" clId="{09330963-85FD-4C99-A81B-94D0EE5CFFEB}" dt="2026-03-10T17:10:31.494" v="11" actId="1076"/>
           <ac:spMkLst>
@@ -151,84 +143,116 @@
             <ac:spMk id="17" creationId="{F3C357C1-6CA0-FE49-1679-B84ECC79460C}"/>
           </ac:spMkLst>
         </pc:spChg>
-        <pc:spChg chg="del">
-          <ac:chgData name="York, George W CIV USAF USAFA DF/DFEC" userId="1fb5875a-4594-4db2-80fb-f0db3de11280" providerId="ADAL" clId="{09330963-85FD-4C99-A81B-94D0EE5CFFEB}" dt="2026-03-10T16:47:43.899" v="5" actId="478"/>
+        <pc:spChg chg="mod">
+          <ac:chgData name="York, George W CIV USAF USAFA DF/DFEC" userId="1fb5875a-4594-4db2-80fb-f0db3de11280" providerId="ADAL" clId="{09330963-85FD-4C99-A81B-94D0EE5CFFEB}" dt="2026-04-07T21:17:34.236" v="18" actId="14100"/>
           <ac:spMkLst>
             <pc:docMk/>
             <pc:sldMk cId="1501170907" sldId="256"/>
-            <ac:spMk id="54" creationId="{7C5CCBD1-0844-480F-8141-9A9CAA44FF50}"/>
+            <ac:spMk id="23" creationId="{A8009FE0-7787-A3EB-6282-7D22C75D2C48}"/>
           </ac:spMkLst>
         </pc:spChg>
-        <pc:spChg chg="del">
-          <ac:chgData name="York, George W CIV USAF USAFA DF/DFEC" userId="1fb5875a-4594-4db2-80fb-f0db3de11280" providerId="ADAL" clId="{09330963-85FD-4C99-A81B-94D0EE5CFFEB}" dt="2026-03-10T16:47:43.899" v="5" actId="478"/>
+        <pc:spChg chg="add mod">
+          <ac:chgData name="York, George W CIV USAF USAFA DF/DFEC" userId="1fb5875a-4594-4db2-80fb-f0db3de11280" providerId="ADAL" clId="{09330963-85FD-4C99-A81B-94D0EE5CFFEB}" dt="2026-04-07T21:24:36.037" v="49" actId="1076"/>
           <ac:spMkLst>
             <pc:docMk/>
             <pc:sldMk cId="1501170907" sldId="256"/>
-            <ac:spMk id="57" creationId="{BE8947B1-691B-936E-60AD-9FDFE4A4EA75}"/>
+            <ac:spMk id="59" creationId="{186A631B-F190-7086-D3E4-E64D63EF623D}"/>
           </ac:spMkLst>
         </pc:spChg>
-        <pc:spChg chg="del">
-          <ac:chgData name="York, George W CIV USAF USAFA DF/DFEC" userId="1fb5875a-4594-4db2-80fb-f0db3de11280" providerId="ADAL" clId="{09330963-85FD-4C99-A81B-94D0EE5CFFEB}" dt="2026-03-10T16:47:43.899" v="5" actId="478"/>
+        <pc:spChg chg="add del mod">
+          <ac:chgData name="York, George W CIV USAF USAFA DF/DFEC" userId="1fb5875a-4594-4db2-80fb-f0db3de11280" providerId="ADAL" clId="{09330963-85FD-4C99-A81B-94D0EE5CFFEB}" dt="2026-04-07T21:24:56.863" v="50" actId="478"/>
           <ac:spMkLst>
             <pc:docMk/>
             <pc:sldMk cId="1501170907" sldId="256"/>
-            <ac:spMk id="59" creationId="{62908768-78CB-6AA2-9F8F-560147BBA50C}"/>
+            <ac:spMk id="66" creationId="{D3B8DB5F-1693-7C15-AAE5-35655C0E7637}"/>
           </ac:spMkLst>
         </pc:spChg>
-        <pc:spChg chg="del">
-          <ac:chgData name="York, George W CIV USAF USAFA DF/DFEC" userId="1fb5875a-4594-4db2-80fb-f0db3de11280" providerId="ADAL" clId="{09330963-85FD-4C99-A81B-94D0EE5CFFEB}" dt="2026-03-10T16:47:43.899" v="5" actId="478"/>
+        <pc:spChg chg="add mod">
+          <ac:chgData name="York, George W CIV USAF USAFA DF/DFEC" userId="1fb5875a-4594-4db2-80fb-f0db3de11280" providerId="ADAL" clId="{09330963-85FD-4C99-A81B-94D0EE5CFFEB}" dt="2026-04-07T21:41:27.757" v="59" actId="1076"/>
           <ac:spMkLst>
             <pc:docMk/>
             <pc:sldMk cId="1501170907" sldId="256"/>
-            <ac:spMk id="80" creationId="{55A3E227-0BF3-A73B-3BC7-43B3ED0C951A}"/>
+            <ac:spMk id="67" creationId="{2A1D9753-7066-13C9-A737-FE724AE089F0}"/>
           </ac:spMkLst>
         </pc:spChg>
-        <pc:spChg chg="del">
-          <ac:chgData name="York, George W CIV USAF USAFA DF/DFEC" userId="1fb5875a-4594-4db2-80fb-f0db3de11280" providerId="ADAL" clId="{09330963-85FD-4C99-A81B-94D0EE5CFFEB}" dt="2026-03-10T16:47:43.899" v="5" actId="478"/>
+        <pc:spChg chg="add mod">
+          <ac:chgData name="York, George W CIV USAF USAFA DF/DFEC" userId="1fb5875a-4594-4db2-80fb-f0db3de11280" providerId="ADAL" clId="{09330963-85FD-4C99-A81B-94D0EE5CFFEB}" dt="2026-04-07T21:42:17.969" v="69" actId="1076"/>
           <ac:spMkLst>
             <pc:docMk/>
             <pc:sldMk cId="1501170907" sldId="256"/>
-            <ac:spMk id="84" creationId="{D1142331-E346-04E4-CE7D-40DA0254B7E8}"/>
+            <ac:spMk id="68" creationId="{0182E3FA-2050-1E0B-90D7-8E7982835657}"/>
           </ac:spMkLst>
         </pc:spChg>
-        <pc:spChg chg="add del mod">
-          <ac:chgData name="York, George W CIV USAF USAFA DF/DFEC" userId="1fb5875a-4594-4db2-80fb-f0db3de11280" providerId="ADAL" clId="{09330963-85FD-4C99-A81B-94D0EE5CFFEB}" dt="2026-03-10T16:47:43.899" v="5" actId="478"/>
+        <pc:spChg chg="add mod">
+          <ac:chgData name="York, George W CIV USAF USAFA DF/DFEC" userId="1fb5875a-4594-4db2-80fb-f0db3de11280" providerId="ADAL" clId="{09330963-85FD-4C99-A81B-94D0EE5CFFEB}" dt="2026-04-07T21:42:02.423" v="66" actId="20577"/>
           <ac:spMkLst>
             <pc:docMk/>
             <pc:sldMk cId="1501170907" sldId="256"/>
-            <ac:spMk id="105" creationId="{8150CAF1-DAFF-41B1-37D9-3AA58EDF71DA}"/>
+            <ac:spMk id="84" creationId="{465A98EB-4880-884F-D153-0515CE8BDEB2}"/>
           </ac:spMkLst>
         </pc:spChg>
         <pc:spChg chg="add mod">
-          <ac:chgData name="York, George W CIV USAF USAFA DF/DFEC" userId="1fb5875a-4594-4db2-80fb-f0db3de11280" providerId="ADAL" clId="{09330963-85FD-4C99-A81B-94D0EE5CFFEB}" dt="2026-03-05T22:29:55.846" v="0"/>
+          <ac:chgData name="York, George W CIV USAF USAFA DF/DFEC" userId="1fb5875a-4594-4db2-80fb-f0db3de11280" providerId="ADAL" clId="{09330963-85FD-4C99-A81B-94D0EE5CFFEB}" dt="2026-04-07T21:42:43.586" v="74" actId="20577"/>
+          <ac:spMkLst>
+            <pc:docMk/>
+            <pc:sldMk cId="1501170907" sldId="256"/>
+            <ac:spMk id="86" creationId="{33E037D7-FFD6-1A3F-9638-8C8F09EEE8FF}"/>
+          </ac:spMkLst>
+        </pc:spChg>
+        <pc:spChg chg="add mod">
+          <ac:chgData name="York, George W CIV USAF USAFA DF/DFEC" userId="1fb5875a-4594-4db2-80fb-f0db3de11280" providerId="ADAL" clId="{09330963-85FD-4C99-A81B-94D0EE5CFFEB}" dt="2026-04-07T21:43:20.962" v="87" actId="1076"/>
+          <ac:spMkLst>
+            <pc:docMk/>
+            <pc:sldMk cId="1501170907" sldId="256"/>
+            <ac:spMk id="88" creationId="{3444F36D-44DB-30F1-9A93-0662301A031E}"/>
+          </ac:spMkLst>
+        </pc:spChg>
+        <pc:spChg chg="add mod">
+          <ac:chgData name="York, George W CIV USAF USAFA DF/DFEC" userId="1fb5875a-4594-4db2-80fb-f0db3de11280" providerId="ADAL" clId="{09330963-85FD-4C99-A81B-94D0EE5CFFEB}" dt="2026-04-07T21:43:57.765" v="118" actId="20577"/>
+          <ac:spMkLst>
+            <pc:docMk/>
+            <pc:sldMk cId="1501170907" sldId="256"/>
+            <ac:spMk id="92" creationId="{17776570-4E75-3096-0631-C034786BC80E}"/>
+          </ac:spMkLst>
+        </pc:spChg>
+        <pc:spChg chg="mod">
+          <ac:chgData name="York, George W CIV USAF USAFA DF/DFEC" userId="1fb5875a-4594-4db2-80fb-f0db3de11280" providerId="ADAL" clId="{09330963-85FD-4C99-A81B-94D0EE5CFFEB}" dt="2026-04-07T21:18:37.994" v="24" actId="14100"/>
           <ac:spMkLst>
             <pc:docMk/>
             <pc:sldMk cId="1501170907" sldId="256"/>
             <ac:spMk id="106" creationId="{802EBAD3-1207-E175-F4E6-F1CAAFD5CB84}"/>
           </ac:spMkLst>
         </pc:spChg>
-        <pc:spChg chg="add mod">
-          <ac:chgData name="York, George W CIV USAF USAFA DF/DFEC" userId="1fb5875a-4594-4db2-80fb-f0db3de11280" providerId="ADAL" clId="{09330963-85FD-4C99-A81B-94D0EE5CFFEB}" dt="2026-03-05T22:29:55.846" v="0"/>
+        <pc:spChg chg="mod">
+          <ac:chgData name="York, George W CIV USAF USAFA DF/DFEC" userId="1fb5875a-4594-4db2-80fb-f0db3de11280" providerId="ADAL" clId="{09330963-85FD-4C99-A81B-94D0EE5CFFEB}" dt="2026-04-07T21:18:37.994" v="24" actId="14100"/>
           <ac:spMkLst>
             <pc:docMk/>
             <pc:sldMk cId="1501170907" sldId="256"/>
             <ac:spMk id="107" creationId="{B1546BBC-B812-DED8-4B26-9FABE47BC3AA}"/>
           </ac:spMkLst>
         </pc:spChg>
-        <pc:spChg chg="add mod">
-          <ac:chgData name="York, George W CIV USAF USAFA DF/DFEC" userId="1fb5875a-4594-4db2-80fb-f0db3de11280" providerId="ADAL" clId="{09330963-85FD-4C99-A81B-94D0EE5CFFEB}" dt="2026-03-05T22:29:55.846" v="0"/>
+        <pc:spChg chg="mod">
+          <ac:chgData name="York, George W CIV USAF USAFA DF/DFEC" userId="1fb5875a-4594-4db2-80fb-f0db3de11280" providerId="ADAL" clId="{09330963-85FD-4C99-A81B-94D0EE5CFFEB}" dt="2026-04-07T21:18:37.994" v="24" actId="14100"/>
           <ac:spMkLst>
             <pc:docMk/>
             <pc:sldMk cId="1501170907" sldId="256"/>
             <ac:spMk id="109" creationId="{A81CABDD-6671-8136-C507-5421CBF47C22}"/>
           </ac:spMkLst>
         </pc:spChg>
-        <pc:spChg chg="add mod">
-          <ac:chgData name="York, George W CIV USAF USAFA DF/DFEC" userId="1fb5875a-4594-4db2-80fb-f0db3de11280" providerId="ADAL" clId="{09330963-85FD-4C99-A81B-94D0EE5CFFEB}" dt="2026-03-05T22:29:55.846" v="0"/>
+        <pc:spChg chg="mod">
+          <ac:chgData name="York, George W CIV USAF USAFA DF/DFEC" userId="1fb5875a-4594-4db2-80fb-f0db3de11280" providerId="ADAL" clId="{09330963-85FD-4C99-A81B-94D0EE5CFFEB}" dt="2026-04-07T21:18:37.994" v="24" actId="14100"/>
           <ac:spMkLst>
             <pc:docMk/>
             <pc:sldMk cId="1501170907" sldId="256"/>
             <ac:spMk id="110" creationId="{F182B11B-81F0-C7FD-76B3-7C27A04FAE43}"/>
+          </ac:spMkLst>
+        </pc:spChg>
+        <pc:spChg chg="mod">
+          <ac:chgData name="York, George W CIV USAF USAFA DF/DFEC" userId="1fb5875a-4594-4db2-80fb-f0db3de11280" providerId="ADAL" clId="{09330963-85FD-4C99-A81B-94D0EE5CFFEB}" dt="2026-04-07T21:20:41.767" v="43" actId="1076"/>
+          <ac:spMkLst>
+            <pc:docMk/>
+            <pc:sldMk cId="1501170907" sldId="256"/>
+            <ac:spMk id="127" creationId="{E8F9A210-9B95-3371-FB33-95617722EA31}"/>
           </ac:spMkLst>
         </pc:spChg>
         <pc:spChg chg="add mod">
@@ -295,46 +319,6 @@
             <ac:spMk id="187" creationId="{02F76C24-B5A2-EF6E-0213-72D63A9FAEFB}"/>
           </ac:spMkLst>
         </pc:spChg>
-        <pc:spChg chg="del">
-          <ac:chgData name="York, George W CIV USAF USAFA DF/DFEC" userId="1fb5875a-4594-4db2-80fb-f0db3de11280" providerId="ADAL" clId="{09330963-85FD-4C99-A81B-94D0EE5CFFEB}" dt="2026-03-10T16:47:43.899" v="5" actId="478"/>
-          <ac:spMkLst>
-            <pc:docMk/>
-            <pc:sldMk cId="1501170907" sldId="256"/>
-            <ac:spMk id="264" creationId="{18102C07-F7E1-1AF1-477B-00B68F177F07}"/>
-          </ac:spMkLst>
-        </pc:spChg>
-        <pc:spChg chg="del">
-          <ac:chgData name="York, George W CIV USAF USAFA DF/DFEC" userId="1fb5875a-4594-4db2-80fb-f0db3de11280" providerId="ADAL" clId="{09330963-85FD-4C99-A81B-94D0EE5CFFEB}" dt="2026-03-10T16:47:43.899" v="5" actId="478"/>
-          <ac:spMkLst>
-            <pc:docMk/>
-            <pc:sldMk cId="1501170907" sldId="256"/>
-            <ac:spMk id="265" creationId="{00A05C49-A5A2-CC74-BAEB-00CF47323BC9}"/>
-          </ac:spMkLst>
-        </pc:spChg>
-        <pc:spChg chg="del">
-          <ac:chgData name="York, George W CIV USAF USAFA DF/DFEC" userId="1fb5875a-4594-4db2-80fb-f0db3de11280" providerId="ADAL" clId="{09330963-85FD-4C99-A81B-94D0EE5CFFEB}" dt="2026-03-10T16:47:43.899" v="5" actId="478"/>
-          <ac:spMkLst>
-            <pc:docMk/>
-            <pc:sldMk cId="1501170907" sldId="256"/>
-            <ac:spMk id="266" creationId="{B178740B-BE6B-31B0-B4FD-0ED1D3EABF36}"/>
-          </ac:spMkLst>
-        </pc:spChg>
-        <pc:grpChg chg="del">
-          <ac:chgData name="York, George W CIV USAF USAFA DF/DFEC" userId="1fb5875a-4594-4db2-80fb-f0db3de11280" providerId="ADAL" clId="{09330963-85FD-4C99-A81B-94D0EE5CFFEB}" dt="2026-03-10T17:14:24.856" v="15" actId="478"/>
-          <ac:grpSpMkLst>
-            <pc:docMk/>
-            <pc:sldMk cId="1501170907" sldId="256"/>
-            <ac:grpSpMk id="30" creationId="{F29CD4F1-4D65-2071-CB5D-56C21B0A8ADD}"/>
-          </ac:grpSpMkLst>
-        </pc:grpChg>
-        <pc:grpChg chg="del">
-          <ac:chgData name="York, George W CIV USAF USAFA DF/DFEC" userId="1fb5875a-4594-4db2-80fb-f0db3de11280" providerId="ADAL" clId="{09330963-85FD-4C99-A81B-94D0EE5CFFEB}" dt="2026-03-10T16:47:43.899" v="5" actId="478"/>
-          <ac:grpSpMkLst>
-            <pc:docMk/>
-            <pc:sldMk cId="1501170907" sldId="256"/>
-            <ac:grpSpMk id="61" creationId="{16FC76F5-1B0B-DFD2-2DFE-467D7246D31F}"/>
-          </ac:grpSpMkLst>
-        </pc:grpChg>
         <pc:grpChg chg="add mod">
           <ac:chgData name="York, George W CIV USAF USAFA DF/DFEC" userId="1fb5875a-4594-4db2-80fb-f0db3de11280" providerId="ADAL" clId="{09330963-85FD-4C99-A81B-94D0EE5CFFEB}" dt="2026-03-10T16:47:45.074" v="6"/>
           <ac:grpSpMkLst>
@@ -351,52 +335,12 @@
             <ac:grpSpMk id="144" creationId="{668D9262-FD4F-8437-B65A-FF28CF8998C5}"/>
           </ac:grpSpMkLst>
         </pc:grpChg>
-        <pc:picChg chg="del">
-          <ac:chgData name="York, George W CIV USAF USAFA DF/DFEC" userId="1fb5875a-4594-4db2-80fb-f0db3de11280" providerId="ADAL" clId="{09330963-85FD-4C99-A81B-94D0EE5CFFEB}" dt="2026-03-10T17:14:07.197" v="12" actId="478"/>
-          <ac:picMkLst>
-            <pc:docMk/>
-            <pc:sldMk cId="1501170907" sldId="256"/>
-            <ac:picMk id="36" creationId="{7D1B8B85-7F90-6201-21E9-F6ABDFFBBFF8}"/>
-          </ac:picMkLst>
-        </pc:picChg>
-        <pc:cxnChg chg="del">
-          <ac:chgData name="York, George W CIV USAF USAFA DF/DFEC" userId="1fb5875a-4594-4db2-80fb-f0db3de11280" providerId="ADAL" clId="{09330963-85FD-4C99-A81B-94D0EE5CFFEB}" dt="2026-03-10T16:47:53.742" v="7" actId="478"/>
-          <ac:cxnSpMkLst>
-            <pc:docMk/>
-            <pc:sldMk cId="1501170907" sldId="256"/>
-            <ac:cxnSpMk id="17" creationId="{D24E488E-A173-AFA0-3F6A-78FF8CC6952B}"/>
-          </ac:cxnSpMkLst>
-        </pc:cxnChg>
-        <pc:cxnChg chg="del">
-          <ac:chgData name="York, George W CIV USAF USAFA DF/DFEC" userId="1fb5875a-4594-4db2-80fb-f0db3de11280" providerId="ADAL" clId="{09330963-85FD-4C99-A81B-94D0EE5CFFEB}" dt="2026-03-10T16:47:53.742" v="7" actId="478"/>
-          <ac:cxnSpMkLst>
-            <pc:docMk/>
-            <pc:sldMk cId="1501170907" sldId="256"/>
-            <ac:cxnSpMk id="26" creationId="{EFC7A41C-61ED-49E4-BA0B-27EC82F62902}"/>
-          </ac:cxnSpMkLst>
-        </pc:cxnChg>
         <pc:cxnChg chg="add mod">
           <ac:chgData name="York, George W CIV USAF USAFA DF/DFEC" userId="1fb5875a-4594-4db2-80fb-f0db3de11280" providerId="ADAL" clId="{09330963-85FD-4C99-A81B-94D0EE5CFFEB}" dt="2026-03-10T17:14:37.305" v="17" actId="1076"/>
           <ac:cxnSpMkLst>
             <pc:docMk/>
             <pc:sldMk cId="1501170907" sldId="256"/>
             <ac:cxnSpMk id="26" creationId="{F93FF150-8370-FB86-5E5C-59855FA6B568}"/>
-          </ac:cxnSpMkLst>
-        </pc:cxnChg>
-        <pc:cxnChg chg="del">
-          <ac:chgData name="York, George W CIV USAF USAFA DF/DFEC" userId="1fb5875a-4594-4db2-80fb-f0db3de11280" providerId="ADAL" clId="{09330963-85FD-4C99-A81B-94D0EE5CFFEB}" dt="2026-03-10T16:47:53.742" v="7" actId="478"/>
-          <ac:cxnSpMkLst>
-            <pc:docMk/>
-            <pc:sldMk cId="1501170907" sldId="256"/>
-            <ac:cxnSpMk id="28" creationId="{EE79F449-2B1D-87A9-9E7B-9DD8C11C7B9B}"/>
-          </ac:cxnSpMkLst>
-        </pc:cxnChg>
-        <pc:cxnChg chg="del">
-          <ac:chgData name="York, George W CIV USAF USAFA DF/DFEC" userId="1fb5875a-4594-4db2-80fb-f0db3de11280" providerId="ADAL" clId="{09330963-85FD-4C99-A81B-94D0EE5CFFEB}" dt="2026-03-10T17:14:18.066" v="14" actId="478"/>
-          <ac:cxnSpMkLst>
-            <pc:docMk/>
-            <pc:sldMk cId="1501170907" sldId="256"/>
-            <ac:cxnSpMk id="37" creationId="{A09C37C1-E5D0-9FBA-A932-2F98BACEC0B2}"/>
           </ac:cxnSpMkLst>
         </pc:cxnChg>
         <pc:cxnChg chg="mod">
@@ -408,47 +352,127 @@
           </ac:cxnSpMkLst>
         </pc:cxnChg>
         <pc:cxnChg chg="add mod">
-          <ac:chgData name="York, George W CIV USAF USAFA DF/DFEC" userId="1fb5875a-4594-4db2-80fb-f0db3de11280" providerId="ADAL" clId="{09330963-85FD-4C99-A81B-94D0EE5CFFEB}" dt="2026-03-05T22:29:55.846" v="0"/>
+          <ac:chgData name="York, George W CIV USAF USAFA DF/DFEC" userId="1fb5875a-4594-4db2-80fb-f0db3de11280" providerId="ADAL" clId="{09330963-85FD-4C99-A81B-94D0EE5CFFEB}" dt="2026-04-07T21:20:52.576" v="45" actId="1076"/>
+          <ac:cxnSpMkLst>
+            <pc:docMk/>
+            <pc:sldMk cId="1501170907" sldId="256"/>
+            <ac:cxnSpMk id="58" creationId="{FC5A1AC6-CF53-3493-56F7-589C74FEA80A}"/>
+          </ac:cxnSpMkLst>
+        </pc:cxnChg>
+        <pc:cxnChg chg="add del mod">
+          <ac:chgData name="York, George W CIV USAF USAFA DF/DFEC" userId="1fb5875a-4594-4db2-80fb-f0db3de11280" providerId="ADAL" clId="{09330963-85FD-4C99-A81B-94D0EE5CFFEB}" dt="2026-04-07T21:24:57.993" v="51" actId="478"/>
+          <ac:cxnSpMkLst>
+            <pc:docMk/>
+            <pc:sldMk cId="1501170907" sldId="256"/>
+            <ac:cxnSpMk id="61" creationId="{160F255A-AA1C-9C42-A50B-995EFED2120D}"/>
+          </ac:cxnSpMkLst>
+        </pc:cxnChg>
+        <pc:cxnChg chg="add mod">
+          <ac:chgData name="York, George W CIV USAF USAFA DF/DFEC" userId="1fb5875a-4594-4db2-80fb-f0db3de11280" providerId="ADAL" clId="{09330963-85FD-4C99-A81B-94D0EE5CFFEB}" dt="2026-04-07T21:41:27.757" v="59" actId="1076"/>
+          <ac:cxnSpMkLst>
+            <pc:docMk/>
+            <pc:sldMk cId="1501170907" sldId="256"/>
+            <ac:cxnSpMk id="72" creationId="{4B1579FE-1A01-8122-525C-1BF52DFA00E3}"/>
+          </ac:cxnSpMkLst>
+        </pc:cxnChg>
+        <pc:cxnChg chg="add del mod">
+          <ac:chgData name="York, George W CIV USAF USAFA DF/DFEC" userId="1fb5875a-4594-4db2-80fb-f0db3de11280" providerId="ADAL" clId="{09330963-85FD-4C99-A81B-94D0EE5CFFEB}" dt="2026-04-07T21:42:21.595" v="70" actId="478"/>
+          <ac:cxnSpMkLst>
+            <pc:docMk/>
+            <pc:sldMk cId="1501170907" sldId="256"/>
+            <ac:cxnSpMk id="75" creationId="{F3F07CC7-3576-96D0-5E9D-2FA4D6604664}"/>
+          </ac:cxnSpMkLst>
+        </pc:cxnChg>
+        <pc:cxnChg chg="add del mod">
+          <ac:chgData name="York, George W CIV USAF USAFA DF/DFEC" userId="1fb5875a-4594-4db2-80fb-f0db3de11280" providerId="ADAL" clId="{09330963-85FD-4C99-A81B-94D0EE5CFFEB}" dt="2026-04-07T21:42:23.514" v="71" actId="478"/>
+          <ac:cxnSpMkLst>
+            <pc:docMk/>
+            <pc:sldMk cId="1501170907" sldId="256"/>
+            <ac:cxnSpMk id="76" creationId="{E1F4FD1C-64DA-F8D6-BE06-BB885DCFC055}"/>
+          </ac:cxnSpMkLst>
+        </pc:cxnChg>
+        <pc:cxnChg chg="add mod">
+          <ac:chgData name="York, George W CIV USAF USAFA DF/DFEC" userId="1fb5875a-4594-4db2-80fb-f0db3de11280" providerId="ADAL" clId="{09330963-85FD-4C99-A81B-94D0EE5CFFEB}" dt="2026-04-07T21:41:45.405" v="62" actId="14100"/>
+          <ac:cxnSpMkLst>
+            <pc:docMk/>
+            <pc:sldMk cId="1501170907" sldId="256"/>
+            <ac:cxnSpMk id="77" creationId="{947FAF0E-6260-E911-7037-28D14C3C707B}"/>
+          </ac:cxnSpMkLst>
+        </pc:cxnChg>
+        <pc:cxnChg chg="mod">
+          <ac:chgData name="York, George W CIV USAF USAFA DF/DFEC" userId="1fb5875a-4594-4db2-80fb-f0db3de11280" providerId="ADAL" clId="{09330963-85FD-4C99-A81B-94D0EE5CFFEB}" dt="2026-04-07T21:18:37.994" v="24" actId="14100"/>
           <ac:cxnSpMkLst>
             <pc:docMk/>
             <pc:sldMk cId="1501170907" sldId="256"/>
             <ac:cxnSpMk id="108" creationId="{55D04E53-F0F2-CC32-832F-AD990A0BD8D2}"/>
           </ac:cxnSpMkLst>
         </pc:cxnChg>
+        <pc:cxnChg chg="mod">
+          <ac:chgData name="York, George W CIV USAF USAFA DF/DFEC" userId="1fb5875a-4594-4db2-80fb-f0db3de11280" providerId="ADAL" clId="{09330963-85FD-4C99-A81B-94D0EE5CFFEB}" dt="2026-04-07T21:20:27.308" v="41" actId="208"/>
+          <ac:cxnSpMkLst>
+            <pc:docMk/>
+            <pc:sldMk cId="1501170907" sldId="256"/>
+            <ac:cxnSpMk id="118" creationId="{3FFE2C33-996E-7ADF-F9EF-9E2CF7B04F43}"/>
+          </ac:cxnSpMkLst>
+        </pc:cxnChg>
+        <pc:cxnChg chg="mod">
+          <ac:chgData name="York, George W CIV USAF USAFA DF/DFEC" userId="1fb5875a-4594-4db2-80fb-f0db3de11280" providerId="ADAL" clId="{09330963-85FD-4C99-A81B-94D0EE5CFFEB}" dt="2026-04-07T21:41:31.559" v="60" actId="1076"/>
+          <ac:cxnSpMkLst>
+            <pc:docMk/>
+            <pc:sldMk cId="1501170907" sldId="256"/>
+            <ac:cxnSpMk id="119" creationId="{E7E3730A-42E6-0433-39FD-2ACC0255676D}"/>
+          </ac:cxnSpMkLst>
+        </pc:cxnChg>
         <pc:cxnChg chg="add mod">
-          <ac:chgData name="York, George W CIV USAF USAFA DF/DFEC" userId="1fb5875a-4594-4db2-80fb-f0db3de11280" providerId="ADAL" clId="{09330963-85FD-4C99-A81B-94D0EE5CFFEB}" dt="2026-03-05T22:29:55.846" v="0"/>
+          <ac:chgData name="York, George W CIV USAF USAFA DF/DFEC" userId="1fb5875a-4594-4db2-80fb-f0db3de11280" providerId="ADAL" clId="{09330963-85FD-4C99-A81B-94D0EE5CFFEB}" dt="2026-04-07T21:20:21.699" v="40" actId="208"/>
           <ac:cxnSpMkLst>
             <pc:docMk/>
             <pc:sldMk cId="1501170907" sldId="256"/>
             <ac:cxnSpMk id="120" creationId="{1883FA79-CBE1-81F9-475F-742DC442633A}"/>
           </ac:cxnSpMkLst>
         </pc:cxnChg>
-        <pc:cxnChg chg="add mod">
-          <ac:chgData name="York, George W CIV USAF USAFA DF/DFEC" userId="1fb5875a-4594-4db2-80fb-f0db3de11280" providerId="ADAL" clId="{09330963-85FD-4C99-A81B-94D0EE5CFFEB}" dt="2026-03-05T22:29:55.846" v="0"/>
+        <pc:cxnChg chg="mod">
+          <ac:chgData name="York, George W CIV USAF USAFA DF/DFEC" userId="1fb5875a-4594-4db2-80fb-f0db3de11280" providerId="ADAL" clId="{09330963-85FD-4C99-A81B-94D0EE5CFFEB}" dt="2026-04-07T21:20:09.242" v="38" actId="208"/>
           <ac:cxnSpMkLst>
             <pc:docMk/>
             <pc:sldMk cId="1501170907" sldId="256"/>
             <ac:cxnSpMk id="121" creationId="{D53ADBF7-10DC-5789-46E9-813992762F1C}"/>
           </ac:cxnSpMkLst>
         </pc:cxnChg>
-        <pc:cxnChg chg="add mod">
-          <ac:chgData name="York, George W CIV USAF USAFA DF/DFEC" userId="1fb5875a-4594-4db2-80fb-f0db3de11280" providerId="ADAL" clId="{09330963-85FD-4C99-A81B-94D0EE5CFFEB}" dt="2026-03-05T22:29:55.846" v="0"/>
+        <pc:cxnChg chg="mod">
+          <ac:chgData name="York, George W CIV USAF USAFA DF/DFEC" userId="1fb5875a-4594-4db2-80fb-f0db3de11280" providerId="ADAL" clId="{09330963-85FD-4C99-A81B-94D0EE5CFFEB}" dt="2026-04-07T21:20:15.198" v="39" actId="208"/>
+          <ac:cxnSpMkLst>
+            <pc:docMk/>
+            <pc:sldMk cId="1501170907" sldId="256"/>
+            <ac:cxnSpMk id="122" creationId="{47FF72DD-5839-7297-77B0-F5EC466118C5}"/>
+          </ac:cxnSpMkLst>
+        </pc:cxnChg>
+        <pc:cxnChg chg="mod">
+          <ac:chgData name="York, George W CIV USAF USAFA DF/DFEC" userId="1fb5875a-4594-4db2-80fb-f0db3de11280" providerId="ADAL" clId="{09330963-85FD-4C99-A81B-94D0EE5CFFEB}" dt="2026-04-07T21:20:03.539" v="37" actId="208"/>
           <ac:cxnSpMkLst>
             <pc:docMk/>
             <pc:sldMk cId="1501170907" sldId="256"/>
             <ac:cxnSpMk id="123" creationId="{61CB085F-EFA5-81F0-171A-B0F01423DFC7}"/>
           </ac:cxnSpMkLst>
         </pc:cxnChg>
-        <pc:cxnChg chg="add mod">
-          <ac:chgData name="York, George W CIV USAF USAFA DF/DFEC" userId="1fb5875a-4594-4db2-80fb-f0db3de11280" providerId="ADAL" clId="{09330963-85FD-4C99-A81B-94D0EE5CFFEB}" dt="2026-03-05T22:29:55.846" v="0"/>
+        <pc:cxnChg chg="mod">
+          <ac:chgData name="York, George W CIV USAF USAFA DF/DFEC" userId="1fb5875a-4594-4db2-80fb-f0db3de11280" providerId="ADAL" clId="{09330963-85FD-4C99-A81B-94D0EE5CFFEB}" dt="2026-04-07T21:19:57.574" v="36" actId="208"/>
+          <ac:cxnSpMkLst>
+            <pc:docMk/>
+            <pc:sldMk cId="1501170907" sldId="256"/>
+            <ac:cxnSpMk id="124" creationId="{A7AA200C-FCA9-EE26-397A-A699E5A6646F}"/>
+          </ac:cxnSpMkLst>
+        </pc:cxnChg>
+        <pc:cxnChg chg="mod">
+          <ac:chgData name="York, George W CIV USAF USAFA DF/DFEC" userId="1fb5875a-4594-4db2-80fb-f0db3de11280" providerId="ADAL" clId="{09330963-85FD-4C99-A81B-94D0EE5CFFEB}" dt="2026-04-07T21:18:37.994" v="24" actId="14100"/>
           <ac:cxnSpMkLst>
             <pc:docMk/>
             <pc:sldMk cId="1501170907" sldId="256"/>
             <ac:cxnSpMk id="125" creationId="{EC42D385-1455-5F7D-5DE9-63C32D5B7E54}"/>
           </ac:cxnSpMkLst>
         </pc:cxnChg>
-        <pc:cxnChg chg="add mod">
-          <ac:chgData name="York, George W CIV USAF USAFA DF/DFEC" userId="1fb5875a-4594-4db2-80fb-f0db3de11280" providerId="ADAL" clId="{09330963-85FD-4C99-A81B-94D0EE5CFFEB}" dt="2026-03-05T22:29:55.846" v="0"/>
+        <pc:cxnChg chg="mod">
+          <ac:chgData name="York, George W CIV USAF USAFA DF/DFEC" userId="1fb5875a-4594-4db2-80fb-f0db3de11280" providerId="ADAL" clId="{09330963-85FD-4C99-A81B-94D0EE5CFFEB}" dt="2026-04-07T21:41:35.047" v="61" actId="14100"/>
           <ac:cxnSpMkLst>
             <pc:docMk/>
             <pc:sldMk cId="1501170907" sldId="256"/>
@@ -624,7 +648,7 @@
           <a:p>
             <a:fld id="{51AFF834-1BEC-4F95-9622-28B5DCC1FE16}" type="datetimeFigureOut">
               <a:rPr lang="en-US" smtClean="0"/>
-              <a:t>3/10/2026</a:t>
+              <a:t>4/7/2026</a:t>
             </a:fld>
             <a:endParaRPr lang="en-US"/>
           </a:p>
@@ -822,7 +846,7 @@
           <a:p>
             <a:fld id="{51AFF834-1BEC-4F95-9622-28B5DCC1FE16}" type="datetimeFigureOut">
               <a:rPr lang="en-US" smtClean="0"/>
-              <a:t>3/10/2026</a:t>
+              <a:t>4/7/2026</a:t>
             </a:fld>
             <a:endParaRPr lang="en-US"/>
           </a:p>
@@ -1030,7 +1054,7 @@
           <a:p>
             <a:fld id="{51AFF834-1BEC-4F95-9622-28B5DCC1FE16}" type="datetimeFigureOut">
               <a:rPr lang="en-US" smtClean="0"/>
-              <a:t>3/10/2026</a:t>
+              <a:t>4/7/2026</a:t>
             </a:fld>
             <a:endParaRPr lang="en-US"/>
           </a:p>
@@ -1228,7 +1252,7 @@
           <a:p>
             <a:fld id="{51AFF834-1BEC-4F95-9622-28B5DCC1FE16}" type="datetimeFigureOut">
               <a:rPr lang="en-US" smtClean="0"/>
-              <a:t>3/10/2026</a:t>
+              <a:t>4/7/2026</a:t>
             </a:fld>
             <a:endParaRPr lang="en-US"/>
           </a:p>
@@ -1503,7 +1527,7 @@
           <a:p>
             <a:fld id="{51AFF834-1BEC-4F95-9622-28B5DCC1FE16}" type="datetimeFigureOut">
               <a:rPr lang="en-US" smtClean="0"/>
-              <a:t>3/10/2026</a:t>
+              <a:t>4/7/2026</a:t>
             </a:fld>
             <a:endParaRPr lang="en-US"/>
           </a:p>
@@ -1768,7 +1792,7 @@
           <a:p>
             <a:fld id="{51AFF834-1BEC-4F95-9622-28B5DCC1FE16}" type="datetimeFigureOut">
               <a:rPr lang="en-US" smtClean="0"/>
-              <a:t>3/10/2026</a:t>
+              <a:t>4/7/2026</a:t>
             </a:fld>
             <a:endParaRPr lang="en-US"/>
           </a:p>
@@ -2180,7 +2204,7 @@
           <a:p>
             <a:fld id="{51AFF834-1BEC-4F95-9622-28B5DCC1FE16}" type="datetimeFigureOut">
               <a:rPr lang="en-US" smtClean="0"/>
-              <a:t>3/10/2026</a:t>
+              <a:t>4/7/2026</a:t>
             </a:fld>
             <a:endParaRPr lang="en-US"/>
           </a:p>
@@ -2321,7 +2345,7 @@
           <a:p>
             <a:fld id="{51AFF834-1BEC-4F95-9622-28B5DCC1FE16}" type="datetimeFigureOut">
               <a:rPr lang="en-US" smtClean="0"/>
-              <a:t>3/10/2026</a:t>
+              <a:t>4/7/2026</a:t>
             </a:fld>
             <a:endParaRPr lang="en-US"/>
           </a:p>
@@ -2434,7 +2458,7 @@
           <a:p>
             <a:fld id="{51AFF834-1BEC-4F95-9622-28B5DCC1FE16}" type="datetimeFigureOut">
               <a:rPr lang="en-US" smtClean="0"/>
-              <a:t>3/10/2026</a:t>
+              <a:t>4/7/2026</a:t>
             </a:fld>
             <a:endParaRPr lang="en-US"/>
           </a:p>
@@ -2745,7 +2769,7 @@
           <a:p>
             <a:fld id="{51AFF834-1BEC-4F95-9622-28B5DCC1FE16}" type="datetimeFigureOut">
               <a:rPr lang="en-US" smtClean="0"/>
-              <a:t>3/10/2026</a:t>
+              <a:t>4/7/2026</a:t>
             </a:fld>
             <a:endParaRPr lang="en-US"/>
           </a:p>
@@ -3033,7 +3057,7 @@
           <a:p>
             <a:fld id="{51AFF834-1BEC-4F95-9622-28B5DCC1FE16}" type="datetimeFigureOut">
               <a:rPr lang="en-US" smtClean="0"/>
-              <a:t>3/10/2026</a:t>
+              <a:t>4/7/2026</a:t>
             </a:fld>
             <a:endParaRPr lang="en-US"/>
           </a:p>
@@ -3274,7 +3298,7 @@
           <a:p>
             <a:fld id="{51AFF834-1BEC-4F95-9622-28B5DCC1FE16}" type="datetimeFigureOut">
               <a:rPr lang="en-US" smtClean="0"/>
-              <a:t>3/10/2026</a:t>
+              <a:t>4/7/2026</a:t>
             </a:fld>
             <a:endParaRPr lang="en-US"/>
           </a:p>
@@ -9118,8 +9142,8 @@
         </p:nvSpPr>
         <p:spPr>
           <a:xfrm>
-            <a:off x="2458496" y="983375"/>
-            <a:ext cx="124516" cy="4611756"/>
+            <a:off x="2458495" y="983375"/>
+            <a:ext cx="125873" cy="3438801"/>
           </a:xfrm>
           <a:prstGeom prst="rect">
             <a:avLst/>
@@ -9219,7 +9243,7 @@
         </p:nvSpPr>
         <p:spPr>
           <a:xfrm>
-            <a:off x="4112869" y="5087156"/>
+            <a:off x="4081802" y="4715527"/>
             <a:ext cx="663423" cy="460640"/>
           </a:xfrm>
           <a:prstGeom prst="rect">
@@ -9271,7 +9295,7 @@
         </p:nvSpPr>
         <p:spPr>
           <a:xfrm>
-            <a:off x="4171777" y="5125610"/>
+            <a:off x="4140710" y="4753981"/>
             <a:ext cx="574196" cy="384721"/>
           </a:xfrm>
           <a:prstGeom prst="rect">
@@ -9280,7 +9304,7 @@
           <a:noFill/>
         </p:spPr>
         <p:txBody>
-          <a:bodyPr wrap="none" rtlCol="0">
+          <a:bodyPr wrap="square" rtlCol="0">
             <a:spAutoFit/>
           </a:bodyPr>
           <a:lstStyle/>
@@ -9316,7 +9340,7 @@
         </p:nvCxnSpPr>
         <p:spPr>
           <a:xfrm>
-            <a:off x="3882996" y="5224369"/>
+            <a:off x="3851929" y="4852740"/>
             <a:ext cx="229874" cy="0"/>
           </a:xfrm>
           <a:prstGeom prst="straightConnector1">
@@ -9358,7 +9382,7 @@
         </p:nvSpPr>
         <p:spPr>
           <a:xfrm>
-            <a:off x="3204207" y="5087370"/>
+            <a:off x="3173140" y="4715741"/>
             <a:ext cx="678789" cy="484706"/>
           </a:xfrm>
           <a:prstGeom prst="rect">
@@ -9410,7 +9434,7 @@
         </p:nvSpPr>
         <p:spPr>
           <a:xfrm>
-            <a:off x="3169553" y="5107257"/>
+            <a:off x="3138486" y="4735628"/>
             <a:ext cx="729687" cy="400110"/>
           </a:xfrm>
           <a:prstGeom prst="rect">
@@ -9419,7 +9443,7 @@
           <a:noFill/>
         </p:spPr>
         <p:txBody>
-          <a:bodyPr wrap="none" rtlCol="0">
+          <a:bodyPr wrap="square" rtlCol="0">
             <a:spAutoFit/>
           </a:bodyPr>
           <a:lstStyle/>
@@ -9455,13 +9479,16 @@
         </p:nvCxnSpPr>
         <p:spPr>
           <a:xfrm>
-            <a:off x="2743887" y="5277871"/>
+            <a:off x="2731530" y="5071925"/>
             <a:ext cx="442253" cy="0"/>
           </a:xfrm>
           <a:prstGeom prst="straightConnector1">
             <a:avLst/>
           </a:prstGeom>
           <a:ln>
+            <a:solidFill>
+              <a:srgbClr val="FF0000"/>
+            </a:solidFill>
             <a:tailEnd type="triangle"/>
           </a:ln>
         </p:spPr>
@@ -9496,7 +9523,7 @@
         </p:nvCxnSpPr>
         <p:spPr>
           <a:xfrm flipH="1">
-            <a:off x="3888841" y="5478179"/>
+            <a:off x="3862656" y="5059827"/>
             <a:ext cx="205614" cy="0"/>
           </a:xfrm>
           <a:prstGeom prst="straightConnector1">
@@ -9540,12 +9567,17 @@
         </p:nvCxnSpPr>
         <p:spPr>
           <a:xfrm>
-            <a:off x="2763237" y="4519030"/>
-            <a:ext cx="0" cy="761538"/>
+            <a:off x="2742642" y="4702781"/>
+            <a:ext cx="0" cy="367608"/>
           </a:xfrm>
           <a:prstGeom prst="line">
             <a:avLst/>
           </a:prstGeom>
+          <a:ln>
+            <a:solidFill>
+              <a:srgbClr val="FF0000"/>
+            </a:solidFill>
+          </a:ln>
         </p:spPr>
         <p:style>
           <a:lnRef idx="2">
@@ -9578,13 +9610,16 @@
         </p:nvCxnSpPr>
         <p:spPr>
           <a:xfrm>
-            <a:off x="2981569" y="5160759"/>
+            <a:off x="2967078" y="4855032"/>
             <a:ext cx="211703" cy="0"/>
           </a:xfrm>
           <a:prstGeom prst="straightConnector1">
             <a:avLst/>
           </a:prstGeom>
           <a:ln>
+            <a:solidFill>
+              <a:srgbClr val="FF0000"/>
+            </a:solidFill>
             <a:tailEnd type="triangle"/>
           </a:ln>
         </p:spPr>
@@ -9612,17 +9647,24 @@
               </a:ext>
             </a:extLst>
           </p:cNvPr>
-          <p:cNvCxnSpPr/>
+          <p:cNvCxnSpPr>
+            <a:cxnSpLocks/>
+          </p:cNvCxnSpPr>
           <p:nvPr/>
         </p:nvCxnSpPr>
         <p:spPr>
-          <a:xfrm flipH="1" flipV="1">
-            <a:off x="2602523" y="4499564"/>
-            <a:ext cx="164123" cy="7703"/>
+          <a:xfrm flipH="1">
+            <a:off x="2332953" y="4719577"/>
+            <a:ext cx="398618" cy="0"/>
           </a:xfrm>
           <a:prstGeom prst="line">
             <a:avLst/>
           </a:prstGeom>
+          <a:ln>
+            <a:solidFill>
+              <a:srgbClr val="FF0000"/>
+            </a:solidFill>
+          </a:ln>
         </p:spPr>
         <p:style>
           <a:lnRef idx="2">
@@ -9648,17 +9690,24 @@
               </a:ext>
             </a:extLst>
           </p:cNvPr>
-          <p:cNvCxnSpPr/>
+          <p:cNvCxnSpPr>
+            <a:cxnSpLocks/>
+          </p:cNvCxnSpPr>
           <p:nvPr/>
         </p:nvCxnSpPr>
         <p:spPr>
           <a:xfrm>
-            <a:off x="2989385" y="4912022"/>
-            <a:ext cx="0" cy="253947"/>
+            <a:off x="2958318" y="4393497"/>
+            <a:ext cx="0" cy="470946"/>
           </a:xfrm>
           <a:prstGeom prst="line">
             <a:avLst/>
           </a:prstGeom>
+          <a:ln>
+            <a:solidFill>
+              <a:srgbClr val="FF0000"/>
+            </a:solidFill>
+          </a:ln>
         </p:spPr>
         <p:style>
           <a:lnRef idx="2">
@@ -9684,17 +9733,24 @@
               </a:ext>
             </a:extLst>
           </p:cNvPr>
-          <p:cNvCxnSpPr/>
+          <p:cNvCxnSpPr>
+            <a:cxnSpLocks/>
+          </p:cNvCxnSpPr>
           <p:nvPr/>
         </p:nvCxnSpPr>
         <p:spPr>
           <a:xfrm>
-            <a:off x="2985477" y="4912022"/>
-            <a:ext cx="2313354" cy="0"/>
+            <a:off x="2581684" y="4384148"/>
+            <a:ext cx="383938" cy="0"/>
           </a:xfrm>
           <a:prstGeom prst="line">
             <a:avLst/>
           </a:prstGeom>
+          <a:ln>
+            <a:solidFill>
+              <a:srgbClr val="FF0000"/>
+            </a:solidFill>
+          </a:ln>
         </p:spPr>
         <p:style>
           <a:lnRef idx="2">
@@ -9720,12 +9776,14 @@
               </a:ext>
             </a:extLst>
           </p:cNvPr>
-          <p:cNvCxnSpPr/>
+          <p:cNvCxnSpPr>
+            <a:cxnSpLocks/>
+          </p:cNvCxnSpPr>
           <p:nvPr/>
         </p:nvCxnSpPr>
         <p:spPr>
           <a:xfrm flipV="1">
-            <a:off x="3977662" y="4996009"/>
+            <a:off x="3946595" y="4624380"/>
             <a:ext cx="0" cy="225402"/>
           </a:xfrm>
           <a:prstGeom prst="straightConnector1">
@@ -9762,13 +9820,15 @@
               </a:ext>
             </a:extLst>
           </p:cNvPr>
-          <p:cNvCxnSpPr/>
+          <p:cNvCxnSpPr>
+            <a:cxnSpLocks/>
+          </p:cNvCxnSpPr>
           <p:nvPr/>
         </p:nvCxnSpPr>
         <p:spPr>
           <a:xfrm>
-            <a:off x="4019628" y="5487290"/>
-            <a:ext cx="0" cy="200651"/>
+            <a:off x="3994657" y="5074508"/>
+            <a:ext cx="0" cy="402752"/>
           </a:xfrm>
           <a:prstGeom prst="straightConnector1">
             <a:avLst/>
@@ -11292,6 +11352,401 @@
           </a:fontRef>
         </p:style>
       </p:cxnSp>
+      <p:cxnSp>
+        <p:nvCxnSpPr>
+          <p:cNvPr id="58" name="Straight Connector 57">
+            <a:extLst>
+              <a:ext uri="{FF2B5EF4-FFF2-40B4-BE49-F238E27FC236}">
+                <a16:creationId xmlns:a16="http://schemas.microsoft.com/office/drawing/2014/main" id="{FC5A1AC6-CF53-3493-56F7-589C74FEA80A}"/>
+              </a:ext>
+            </a:extLst>
+          </p:cNvPr>
+          <p:cNvCxnSpPr/>
+          <p:nvPr/>
+        </p:nvCxnSpPr>
+        <p:spPr>
+          <a:xfrm flipH="1">
+            <a:off x="2774640" y="4319783"/>
+            <a:ext cx="77899" cy="129540"/>
+          </a:xfrm>
+          <a:prstGeom prst="line">
+            <a:avLst/>
+          </a:prstGeom>
+        </p:spPr>
+        <p:style>
+          <a:lnRef idx="2">
+            <a:schemeClr val="accent1"/>
+          </a:lnRef>
+          <a:fillRef idx="0">
+            <a:schemeClr val="accent1"/>
+          </a:fillRef>
+          <a:effectRef idx="1">
+            <a:schemeClr val="accent1"/>
+          </a:effectRef>
+          <a:fontRef idx="minor">
+            <a:schemeClr val="tx1"/>
+          </a:fontRef>
+        </p:style>
+      </p:cxnSp>
+      <p:sp>
+        <p:nvSpPr>
+          <p:cNvPr id="59" name="TextBox 58">
+            <a:extLst>
+              <a:ext uri="{FF2B5EF4-FFF2-40B4-BE49-F238E27FC236}">
+                <a16:creationId xmlns:a16="http://schemas.microsoft.com/office/drawing/2014/main" id="{186A631B-F190-7086-D3E4-E64D63EF623D}"/>
+              </a:ext>
+            </a:extLst>
+          </p:cNvPr>
+          <p:cNvSpPr txBox="1"/>
+          <p:nvPr/>
+        </p:nvSpPr>
+        <p:spPr>
+          <a:xfrm>
+            <a:off x="2656442" y="4215214"/>
+            <a:ext cx="245580" cy="230832"/>
+          </a:xfrm>
+          <a:prstGeom prst="rect">
+            <a:avLst/>
+          </a:prstGeom>
+          <a:noFill/>
+        </p:spPr>
+        <p:txBody>
+          <a:bodyPr wrap="none" rtlCol="0">
+            <a:spAutoFit/>
+          </a:bodyPr>
+          <a:lstStyle/>
+          <a:p>
+            <a:pPr algn="ctr"/>
+            <a:r>
+              <a:rPr lang="en-US" sz="900" dirty="0"/>
+              <a:t>4</a:t>
+            </a:r>
+          </a:p>
+        </p:txBody>
+      </p:sp>
+      <p:sp>
+        <p:nvSpPr>
+          <p:cNvPr id="67" name="Rectangle 66">
+            <a:extLst>
+              <a:ext uri="{FF2B5EF4-FFF2-40B4-BE49-F238E27FC236}">
+                <a16:creationId xmlns:a16="http://schemas.microsoft.com/office/drawing/2014/main" id="{2A1D9753-7066-13C9-A737-FE724AE089F0}"/>
+              </a:ext>
+            </a:extLst>
+          </p:cNvPr>
+          <p:cNvSpPr/>
+          <p:nvPr/>
+        </p:nvSpPr>
+        <p:spPr>
+          <a:xfrm>
+            <a:off x="3849692" y="5487290"/>
+            <a:ext cx="663423" cy="460640"/>
+          </a:xfrm>
+          <a:prstGeom prst="rect">
+            <a:avLst/>
+          </a:prstGeom>
+          <a:solidFill>
+            <a:schemeClr val="bg1"/>
+          </a:solidFill>
+        </p:spPr>
+        <p:style>
+          <a:lnRef idx="2">
+            <a:schemeClr val="accent1">
+              <a:shade val="15000"/>
+            </a:schemeClr>
+          </a:lnRef>
+          <a:fillRef idx="1">
+            <a:schemeClr val="accent1"/>
+          </a:fillRef>
+          <a:effectRef idx="0">
+            <a:schemeClr val="accent1"/>
+          </a:effectRef>
+          <a:fontRef idx="minor">
+            <a:schemeClr val="lt1"/>
+          </a:fontRef>
+        </p:style>
+        <p:txBody>
+          <a:bodyPr rtlCol="0" anchor="ctr"/>
+          <a:lstStyle/>
+          <a:p>
+            <a:pPr algn="ctr"/>
+            <a:r>
+              <a:rPr lang="en-US" dirty="0"/>
+              <a:t>PC</a:t>
+            </a:r>
+          </a:p>
+        </p:txBody>
+      </p:sp>
+      <p:sp>
+        <p:nvSpPr>
+          <p:cNvPr id="68" name="TextBox 67">
+            <a:extLst>
+              <a:ext uri="{FF2B5EF4-FFF2-40B4-BE49-F238E27FC236}">
+                <a16:creationId xmlns:a16="http://schemas.microsoft.com/office/drawing/2014/main" id="{0182E3FA-2050-1E0B-90D7-8E7982835657}"/>
+              </a:ext>
+            </a:extLst>
+          </p:cNvPr>
+          <p:cNvSpPr txBox="1"/>
+          <p:nvPr/>
+        </p:nvSpPr>
+        <p:spPr>
+          <a:xfrm>
+            <a:off x="4327311" y="5584796"/>
+            <a:ext cx="194710" cy="246221"/>
+          </a:xfrm>
+          <a:prstGeom prst="rect">
+            <a:avLst/>
+          </a:prstGeom>
+          <a:noFill/>
+        </p:spPr>
+        <p:txBody>
+          <a:bodyPr wrap="square" rtlCol="0">
+            <a:spAutoFit/>
+          </a:bodyPr>
+          <a:lstStyle/>
+          <a:p>
+            <a:pPr algn="ctr"/>
+            <a:r>
+              <a:rPr lang="en-US" sz="1000" dirty="0"/>
+              <a:t>&gt;</a:t>
+            </a:r>
+            <a:endParaRPr lang="en-US" sz="900" dirty="0"/>
+          </a:p>
+        </p:txBody>
+      </p:sp>
+      <p:cxnSp>
+        <p:nvCxnSpPr>
+          <p:cNvPr id="72" name="Straight Arrow Connector 71">
+            <a:extLst>
+              <a:ext uri="{FF2B5EF4-FFF2-40B4-BE49-F238E27FC236}">
+                <a16:creationId xmlns:a16="http://schemas.microsoft.com/office/drawing/2014/main" id="{4B1579FE-1A01-8122-525C-1BF52DFA00E3}"/>
+              </a:ext>
+            </a:extLst>
+          </p:cNvPr>
+          <p:cNvCxnSpPr>
+            <a:cxnSpLocks/>
+          </p:cNvCxnSpPr>
+          <p:nvPr/>
+        </p:nvCxnSpPr>
+        <p:spPr>
+          <a:xfrm>
+            <a:off x="4518382" y="5717610"/>
+            <a:ext cx="229874" cy="0"/>
+          </a:xfrm>
+          <a:prstGeom prst="straightConnector1">
+            <a:avLst/>
+          </a:prstGeom>
+          <a:ln>
+            <a:solidFill>
+              <a:srgbClr val="FF0000"/>
+            </a:solidFill>
+            <a:tailEnd type="triangle"/>
+          </a:ln>
+        </p:spPr>
+        <p:style>
+          <a:lnRef idx="2">
+            <a:schemeClr val="accent1"/>
+          </a:lnRef>
+          <a:fillRef idx="0">
+            <a:schemeClr val="accent1"/>
+          </a:fillRef>
+          <a:effectRef idx="1">
+            <a:schemeClr val="accent1"/>
+          </a:effectRef>
+          <a:fontRef idx="minor">
+            <a:schemeClr val="tx1"/>
+          </a:fontRef>
+        </p:style>
+      </p:cxnSp>
+      <p:cxnSp>
+        <p:nvCxnSpPr>
+          <p:cNvPr id="77" name="Straight Arrow Connector 76">
+            <a:extLst>
+              <a:ext uri="{FF2B5EF4-FFF2-40B4-BE49-F238E27FC236}">
+                <a16:creationId xmlns:a16="http://schemas.microsoft.com/office/drawing/2014/main" id="{947FAF0E-6260-E911-7037-28D14C3C707B}"/>
+              </a:ext>
+            </a:extLst>
+          </p:cNvPr>
+          <p:cNvCxnSpPr>
+            <a:cxnSpLocks/>
+          </p:cNvCxnSpPr>
+          <p:nvPr/>
+        </p:nvCxnSpPr>
+        <p:spPr>
+          <a:xfrm>
+            <a:off x="4388470" y="5377092"/>
+            <a:ext cx="0" cy="100168"/>
+          </a:xfrm>
+          <a:prstGeom prst="straightConnector1">
+            <a:avLst/>
+          </a:prstGeom>
+          <a:ln>
+            <a:solidFill>
+              <a:srgbClr val="FF0000"/>
+            </a:solidFill>
+            <a:tailEnd type="triangle"/>
+          </a:ln>
+        </p:spPr>
+        <p:style>
+          <a:lnRef idx="2">
+            <a:schemeClr val="accent1"/>
+          </a:lnRef>
+          <a:fillRef idx="0">
+            <a:schemeClr val="accent1"/>
+          </a:fillRef>
+          <a:effectRef idx="1">
+            <a:schemeClr val="accent1"/>
+          </a:effectRef>
+          <a:fontRef idx="minor">
+            <a:schemeClr val="tx1"/>
+          </a:fontRef>
+        </p:style>
+      </p:cxnSp>
+      <p:sp>
+        <p:nvSpPr>
+          <p:cNvPr id="84" name="TextBox 83">
+            <a:extLst>
+              <a:ext uri="{FF2B5EF4-FFF2-40B4-BE49-F238E27FC236}">
+                <a16:creationId xmlns:a16="http://schemas.microsoft.com/office/drawing/2014/main" id="{465A98EB-4880-884F-D153-0515CE8BDEB2}"/>
+              </a:ext>
+            </a:extLst>
+          </p:cNvPr>
+          <p:cNvSpPr txBox="1"/>
+          <p:nvPr/>
+        </p:nvSpPr>
+        <p:spPr>
+          <a:xfrm>
+            <a:off x="4265205" y="5181420"/>
+            <a:ext cx="245580" cy="230832"/>
+          </a:xfrm>
+          <a:prstGeom prst="rect">
+            <a:avLst/>
+          </a:prstGeom>
+          <a:noFill/>
+        </p:spPr>
+        <p:txBody>
+          <a:bodyPr wrap="none" rtlCol="0">
+            <a:spAutoFit/>
+          </a:bodyPr>
+          <a:lstStyle/>
+          <a:p>
+            <a:pPr algn="ctr"/>
+            <a:r>
+              <a:rPr lang="en-US" sz="900" dirty="0"/>
+              <a:t>0</a:t>
+            </a:r>
+          </a:p>
+        </p:txBody>
+      </p:sp>
+      <p:sp>
+        <p:nvSpPr>
+          <p:cNvPr id="86" name="TextBox 85">
+            <a:extLst>
+              <a:ext uri="{FF2B5EF4-FFF2-40B4-BE49-F238E27FC236}">
+                <a16:creationId xmlns:a16="http://schemas.microsoft.com/office/drawing/2014/main" id="{33E037D7-FFD6-1A3F-9638-8C8F09EEE8FF}"/>
+              </a:ext>
+            </a:extLst>
+          </p:cNvPr>
+          <p:cNvSpPr txBox="1"/>
+          <p:nvPr/>
+        </p:nvSpPr>
+        <p:spPr>
+          <a:xfrm>
+            <a:off x="4624446" y="5604159"/>
+            <a:ext cx="574196" cy="246221"/>
+          </a:xfrm>
+          <a:prstGeom prst="rect">
+            <a:avLst/>
+          </a:prstGeom>
+          <a:noFill/>
+        </p:spPr>
+        <p:txBody>
+          <a:bodyPr wrap="square" rtlCol="0">
+            <a:spAutoFit/>
+          </a:bodyPr>
+          <a:lstStyle/>
+          <a:p>
+            <a:pPr algn="ctr"/>
+            <a:r>
+              <a:rPr lang="en-US" sz="1000" dirty="0"/>
+              <a:t>Stall</a:t>
+            </a:r>
+          </a:p>
+        </p:txBody>
+      </p:sp>
+      <p:sp>
+        <p:nvSpPr>
+          <p:cNvPr id="88" name="TextBox 87">
+            <a:extLst>
+              <a:ext uri="{FF2B5EF4-FFF2-40B4-BE49-F238E27FC236}">
+                <a16:creationId xmlns:a16="http://schemas.microsoft.com/office/drawing/2014/main" id="{3444F36D-44DB-30F1-9A93-0662301A031E}"/>
+              </a:ext>
+            </a:extLst>
+          </p:cNvPr>
+          <p:cNvSpPr txBox="1"/>
+          <p:nvPr/>
+        </p:nvSpPr>
+        <p:spPr>
+          <a:xfrm>
+            <a:off x="3230284" y="5189712"/>
+            <a:ext cx="861489" cy="246221"/>
+          </a:xfrm>
+          <a:prstGeom prst="rect">
+            <a:avLst/>
+          </a:prstGeom>
+          <a:noFill/>
+        </p:spPr>
+        <p:txBody>
+          <a:bodyPr wrap="square" rtlCol="0">
+            <a:spAutoFit/>
+          </a:bodyPr>
+          <a:lstStyle/>
+          <a:p>
+            <a:pPr algn="ctr"/>
+            <a:r>
+              <a:rPr lang="en-US" sz="1000" dirty="0" err="1"/>
+              <a:t>stall_count</a:t>
+            </a:r>
+            <a:endParaRPr lang="en-US" sz="1000" dirty="0"/>
+          </a:p>
+        </p:txBody>
+      </p:sp>
+      <p:sp>
+        <p:nvSpPr>
+          <p:cNvPr id="92" name="TextBox 91">
+            <a:extLst>
+              <a:ext uri="{FF2B5EF4-FFF2-40B4-BE49-F238E27FC236}">
+                <a16:creationId xmlns:a16="http://schemas.microsoft.com/office/drawing/2014/main" id="{17776570-4E75-3096-0631-C034786BC80E}"/>
+              </a:ext>
+            </a:extLst>
+          </p:cNvPr>
+          <p:cNvSpPr txBox="1"/>
+          <p:nvPr/>
+        </p:nvSpPr>
+        <p:spPr>
+          <a:xfrm>
+            <a:off x="3512283" y="4407829"/>
+            <a:ext cx="861489" cy="246221"/>
+          </a:xfrm>
+          <a:prstGeom prst="rect">
+            <a:avLst/>
+          </a:prstGeom>
+          <a:noFill/>
+        </p:spPr>
+        <p:txBody>
+          <a:bodyPr wrap="square" rtlCol="0">
+            <a:spAutoFit/>
+          </a:bodyPr>
+          <a:lstStyle/>
+          <a:p>
+            <a:pPr algn="ctr"/>
+            <a:r>
+              <a:rPr lang="en-US" sz="1000" dirty="0" err="1"/>
+              <a:t>start_stall</a:t>
+            </a:r>
+            <a:endParaRPr lang="en-US" sz="1000" dirty="0"/>
+          </a:p>
+        </p:txBody>
+      </p:sp>
     </p:spTree>
     <p:extLst>
       <p:ext uri="{BB962C8B-B14F-4D97-AF65-F5344CB8AC3E}">
